--- a/fibonacci_analise_v2.pptx
+++ b/fibonacci_analise_v2.pptx
@@ -3,27 +3,28 @@
 <p:presentation xmlns:a="http://schemas.openxmlformats.org/drawingml/2006/main" xmlns:p="http://schemas.openxmlformats.org/presentationml/2006/main" xmlns:r="http://schemas.openxmlformats.org/officeDocument/2006/relationships" xmlns:p14="http://schemas.microsoft.com/office/powerpoint/2010/main" xmlns:p15="http://schemas.microsoft.com/office/powerpoint/2012/main" xmlns:mc="http://schemas.openxmlformats.org/markup-compatibility/2006">
   <p:sldMasterIdLst>
     <p:sldMasterId id="2147483648" r:id="rId2"/>
-    <p:sldMasterId id="2147483651" r:id="rId3"/>
+    <p:sldMasterId id="2147483652" r:id="rId3"/>
+    <p:sldMasterId id="2147483654" r:id="rId4"/>
   </p:sldMasterIdLst>
   <p:notesMasterIdLst>
-    <p:notesMasterId r:id="rId4"/>
+    <p:notesMasterId r:id="rId5"/>
   </p:notesMasterIdLst>
   <p:sldIdLst>
-    <p:sldId id="256" r:id="rId5"/>
-    <p:sldId id="257" r:id="rId6"/>
-    <p:sldId id="258" r:id="rId7"/>
-    <p:sldId id="259" r:id="rId8"/>
-    <p:sldId id="260" r:id="rId9"/>
-    <p:sldId id="261" r:id="rId10"/>
-    <p:sldId id="262" r:id="rId11"/>
-    <p:sldId id="263" r:id="rId12"/>
-    <p:sldId id="264" r:id="rId13"/>
-    <p:sldId id="265" r:id="rId14"/>
-    <p:sldId id="266" r:id="rId15"/>
-    <p:sldId id="267" r:id="rId16"/>
-    <p:sldId id="268" r:id="rId17"/>
-    <p:sldId id="269" r:id="rId18"/>
-    <p:sldId id="270" r:id="rId19"/>
+    <p:sldId id="256" r:id="rId6"/>
+    <p:sldId id="257" r:id="rId7"/>
+    <p:sldId id="258" r:id="rId8"/>
+    <p:sldId id="259" r:id="rId9"/>
+    <p:sldId id="260" r:id="rId10"/>
+    <p:sldId id="261" r:id="rId11"/>
+    <p:sldId id="262" r:id="rId12"/>
+    <p:sldId id="263" r:id="rId13"/>
+    <p:sldId id="264" r:id="rId14"/>
+    <p:sldId id="265" r:id="rId15"/>
+    <p:sldId id="266" r:id="rId16"/>
+    <p:sldId id="267" r:id="rId17"/>
+    <p:sldId id="268" r:id="rId18"/>
+    <p:sldId id="269" r:id="rId19"/>
+    <p:sldId id="270" r:id="rId20"/>
   </p:sldIdLst>
   <p:sldSz cx="9144000" cy="5143500"/>
   <p:notesSz cx="5143500" cy="9144000"/>
@@ -49,7 +50,7 @@
       </p:grpSpPr>
       <p:sp>
         <p:nvSpPr>
-          <p:cNvPr id="8" name="PlaceHolder 1"/>
+          <p:cNvPr id="13" name="PlaceHolder 1"/>
           <p:cNvSpPr>
             <a:spLocks noGrp="1"/>
           </p:cNvSpPr>
@@ -85,18 +86,7 @@
                 <a:uFillTx/>
                 <a:latin typeface="Arial"/>
               </a:rPr>
-              <a:t>Clique para </a:t>
-            </a:r>
-            <a:r>
-              <a:rPr lang="pt-BR" sz="4400" b="0" u="none" strike="noStrike">
-                <a:solidFill>
-                  <a:srgbClr val="000000"/>
-                </a:solidFill>
-                <a:effectLst/>
-                <a:uFillTx/>
-                <a:latin typeface="Arial"/>
-              </a:rPr>
-              <a:t>mover o slide</a:t>
+              <a:t>Clique para mover o slide</a:t>
             </a:r>
             <a:endParaRPr lang="pt-BR" sz="4400" b="0" u="none" strike="noStrike">
               <a:solidFill>
@@ -111,7 +101,7 @@
       </p:sp>
       <p:sp>
         <p:nvSpPr>
-          <p:cNvPr id="9" name="PlaceHolder 2"/>
+          <p:cNvPr id="14" name="PlaceHolder 2"/>
           <p:cNvSpPr>
             <a:spLocks noGrp="1"/>
           </p:cNvSpPr>
@@ -149,7 +139,7 @@
                 <a:uFillTx/>
                 <a:latin typeface="Arial"/>
               </a:rPr>
-              <a:t>Clique para editar o </a:t>
+              <a:t>Clique </a:t>
             </a:r>
             <a:r>
               <a:rPr lang="pt-BR" sz="2000" b="0" u="none" strike="noStrike">
@@ -160,7 +150,62 @@
                 <a:uFillTx/>
                 <a:latin typeface="Arial"/>
               </a:rPr>
-              <a:t>formato de notas</a:t>
+              <a:t>para </a:t>
+            </a:r>
+            <a:r>
+              <a:rPr lang="pt-BR" sz="2000" b="0" u="none" strike="noStrike">
+                <a:solidFill>
+                  <a:srgbClr val="000000"/>
+                </a:solidFill>
+                <a:effectLst/>
+                <a:uFillTx/>
+                <a:latin typeface="Arial"/>
+              </a:rPr>
+              <a:t>editar </a:t>
+            </a:r>
+            <a:r>
+              <a:rPr lang="pt-BR" sz="2000" b="0" u="none" strike="noStrike">
+                <a:solidFill>
+                  <a:srgbClr val="000000"/>
+                </a:solidFill>
+                <a:effectLst/>
+                <a:uFillTx/>
+                <a:latin typeface="Arial"/>
+              </a:rPr>
+              <a:t>o </a:t>
+            </a:r>
+            <a:r>
+              <a:rPr lang="pt-BR" sz="2000" b="0" u="none" strike="noStrike">
+                <a:solidFill>
+                  <a:srgbClr val="000000"/>
+                </a:solidFill>
+                <a:effectLst/>
+                <a:uFillTx/>
+                <a:latin typeface="Arial"/>
+              </a:rPr>
+              <a:t>format</a:t>
+            </a:r>
+            <a:r>
+              <a:rPr lang="pt-BR" sz="2000" b="0" u="none" strike="noStrike">
+                <a:solidFill>
+                  <a:srgbClr val="000000"/>
+                </a:solidFill>
+                <a:effectLst/>
+                <a:uFillTx/>
+                <a:latin typeface="Arial"/>
+              </a:rPr>
+              <a:t>o de </a:t>
+            </a:r>
+            <a:r>
+              <a:rPr lang="pt-BR" sz="2000" b="0" u="none" strike="noStrike">
+                <a:solidFill>
+                  <a:srgbClr val="000000"/>
+                </a:solidFill>
+                <a:effectLst/>
+                <a:uFillTx/>
+                <a:latin typeface="Arial"/>
+              </a:rPr>
+              <a:t>notas</a:t>
             </a:r>
             <a:endParaRPr lang="pt-BR" sz="2000" b="0" u="none" strike="noStrike">
               <a:solidFill>
@@ -175,7 +220,7 @@
       </p:sp>
       <p:sp>
         <p:nvSpPr>
-          <p:cNvPr id="10" name="PlaceHolder 3"/>
+          <p:cNvPr id="15" name="PlaceHolder 3"/>
           <p:cNvSpPr>
             <a:spLocks noGrp="1"/>
           </p:cNvSpPr>
@@ -228,7 +273,7 @@
       </p:sp>
       <p:sp>
         <p:nvSpPr>
-          <p:cNvPr id="11" name="PlaceHolder 4"/>
+          <p:cNvPr id="16" name="PlaceHolder 4"/>
           <p:cNvSpPr>
             <a:spLocks noGrp="1"/>
           </p:cNvSpPr>
@@ -294,7 +339,7 @@
       </p:sp>
       <p:sp>
         <p:nvSpPr>
-          <p:cNvPr id="12" name="PlaceHolder 5"/>
+          <p:cNvPr id="17" name="PlaceHolder 5"/>
           <p:cNvSpPr>
             <a:spLocks noGrp="1"/>
           </p:cNvSpPr>
@@ -360,7 +405,7 @@
       </p:sp>
       <p:sp>
         <p:nvSpPr>
-          <p:cNvPr id="13" name="PlaceHolder 6"/>
+          <p:cNvPr id="18" name="PlaceHolder 6"/>
           <p:cNvSpPr>
             <a:spLocks noGrp="1"/>
           </p:cNvSpPr>
@@ -402,7 +447,7 @@
             <a:pPr indent="0" algn="r">
               <a:buNone/>
             </a:pPr>
-            <a:fld id="{CCEC9EC3-063D-43D4-802A-0D52C1E8D2AD}" type="slidenum">
+            <a:fld id="{6B9E565D-46F1-4D47-808D-45D0C286AC11}" type="slidenum">
               <a:rPr lang="pt-BR" sz="1400" b="0" u="none" strike="noStrike">
                 <a:solidFill>
                   <a:srgbClr val="000000"/>
@@ -449,7 +494,7 @@
       </p:grpSpPr>
       <p:sp>
         <p:nvSpPr>
-          <p:cNvPr id="205" name="PlaceHolder 1"/>
+          <p:cNvPr id="211" name="PlaceHolder 1"/>
           <p:cNvSpPr>
             <a:spLocks noGrp="1"/>
           </p:cNvSpPr>
@@ -460,19 +505,19 @@
         <p:spPr>
           <a:xfrm>
             <a:off x="685800" y="1143000"/>
-            <a:ext cx="5485680" cy="3085560"/>
-          </a:xfrm>
-          <a:prstGeom prst="rect">
-            <a:avLst/>
-          </a:prstGeom>
-          <a:ln w="0">
-            <a:noFill/>
-          </a:ln>
-        </p:spPr>
-      </p:sp>
-      <p:sp>
-        <p:nvSpPr>
-          <p:cNvPr id="206" name="PlaceHolder 2"/>
+            <a:ext cx="5484960" cy="3084840"/>
+          </a:xfrm>
+          <a:prstGeom prst="rect">
+            <a:avLst/>
+          </a:prstGeom>
+          <a:ln w="0">
+            <a:noFill/>
+          </a:ln>
+        </p:spPr>
+      </p:sp>
+      <p:sp>
+        <p:nvSpPr>
+          <p:cNvPr id="212" name="PlaceHolder 2"/>
           <p:cNvSpPr>
             <a:spLocks noGrp="1"/>
           </p:cNvSpPr>
@@ -483,7 +528,7 @@
         <p:spPr>
           <a:xfrm>
             <a:off x="685800" y="4400640"/>
-            <a:ext cx="5485680" cy="3599640"/>
+            <a:ext cx="5484960" cy="3598920"/>
           </a:xfrm>
           <a:prstGeom prst="rect">
             <a:avLst/>
@@ -514,7 +559,7 @@
       </p:sp>
       <p:sp>
         <p:nvSpPr>
-          <p:cNvPr id="207" name="PlaceHolder 3"/>
+          <p:cNvPr id="213" name="PlaceHolder 3"/>
           <p:cNvSpPr>
             <a:spLocks noGrp="1"/>
           </p:cNvSpPr>
@@ -525,7 +570,7 @@
         <p:spPr>
           <a:xfrm>
             <a:off x="3884760" y="8685360"/>
-            <a:ext cx="2971080" cy="457920"/>
+            <a:ext cx="2970360" cy="457200"/>
           </a:xfrm>
           <a:prstGeom prst="rect">
             <a:avLst/>
@@ -569,7 +614,7 @@
                 <a:tab algn="l" pos="0"/>
               </a:tabLst>
             </a:pPr>
-            <a:fld id="{D758865B-15E4-4895-A423-4196252D6F51}" type="slidenum">
+            <a:fld id="{3944B66D-6069-42D2-829E-715F61D39433}" type="slidenum">
               <a:rPr lang="en-US" sz="1200" b="0" u="none" strike="noStrike">
                 <a:solidFill>
                   <a:schemeClr val="dk1"/>
@@ -616,7 +661,7 @@
       </p:grpSpPr>
       <p:sp>
         <p:nvSpPr>
-          <p:cNvPr id="232" name="PlaceHolder 1"/>
+          <p:cNvPr id="238" name="PlaceHolder 1"/>
           <p:cNvSpPr>
             <a:spLocks noGrp="1"/>
           </p:cNvSpPr>
@@ -627,19 +672,19 @@
         <p:spPr>
           <a:xfrm>
             <a:off x="685800" y="1143000"/>
-            <a:ext cx="5485680" cy="3085560"/>
-          </a:xfrm>
-          <a:prstGeom prst="rect">
-            <a:avLst/>
-          </a:prstGeom>
-          <a:ln w="0">
-            <a:noFill/>
-          </a:ln>
-        </p:spPr>
-      </p:sp>
-      <p:sp>
-        <p:nvSpPr>
-          <p:cNvPr id="233" name="PlaceHolder 2"/>
+            <a:ext cx="5484960" cy="3084840"/>
+          </a:xfrm>
+          <a:prstGeom prst="rect">
+            <a:avLst/>
+          </a:prstGeom>
+          <a:ln w="0">
+            <a:noFill/>
+          </a:ln>
+        </p:spPr>
+      </p:sp>
+      <p:sp>
+        <p:nvSpPr>
+          <p:cNvPr id="239" name="PlaceHolder 2"/>
           <p:cNvSpPr>
             <a:spLocks noGrp="1"/>
           </p:cNvSpPr>
@@ -650,7 +695,7 @@
         <p:spPr>
           <a:xfrm>
             <a:off x="685800" y="4400640"/>
-            <a:ext cx="5485680" cy="3599640"/>
+            <a:ext cx="5484960" cy="3598920"/>
           </a:xfrm>
           <a:prstGeom prst="rect">
             <a:avLst/>
@@ -681,7 +726,7 @@
       </p:sp>
       <p:sp>
         <p:nvSpPr>
-          <p:cNvPr id="234" name="PlaceHolder 3"/>
+          <p:cNvPr id="240" name="PlaceHolder 3"/>
           <p:cNvSpPr>
             <a:spLocks noGrp="1"/>
           </p:cNvSpPr>
@@ -692,7 +737,7 @@
         <p:spPr>
           <a:xfrm>
             <a:off x="3884760" y="8685360"/>
-            <a:ext cx="2971080" cy="457920"/>
+            <a:ext cx="2970360" cy="457200"/>
           </a:xfrm>
           <a:prstGeom prst="rect">
             <a:avLst/>
@@ -736,7 +781,7 @@
                 <a:tab algn="l" pos="0"/>
               </a:tabLst>
             </a:pPr>
-            <a:fld id="{5F7E50A4-2A71-411E-B6B3-0B71AF5F5AE7}" type="slidenum">
+            <a:fld id="{D3B276BB-F0B8-49CC-9AAE-1163736E9B83}" type="slidenum">
               <a:rPr lang="en-US" sz="1200" b="0" u="none" strike="noStrike">
                 <a:solidFill>
                   <a:schemeClr val="dk1"/>
@@ -783,7 +828,7 @@
       </p:grpSpPr>
       <p:sp>
         <p:nvSpPr>
-          <p:cNvPr id="235" name="PlaceHolder 1"/>
+          <p:cNvPr id="241" name="PlaceHolder 1"/>
           <p:cNvSpPr>
             <a:spLocks noGrp="1"/>
           </p:cNvSpPr>
@@ -794,19 +839,19 @@
         <p:spPr>
           <a:xfrm>
             <a:off x="685800" y="1143000"/>
-            <a:ext cx="5485680" cy="3085560"/>
-          </a:xfrm>
-          <a:prstGeom prst="rect">
-            <a:avLst/>
-          </a:prstGeom>
-          <a:ln w="0">
-            <a:noFill/>
-          </a:ln>
-        </p:spPr>
-      </p:sp>
-      <p:sp>
-        <p:nvSpPr>
-          <p:cNvPr id="236" name="PlaceHolder 2"/>
+            <a:ext cx="5484960" cy="3084840"/>
+          </a:xfrm>
+          <a:prstGeom prst="rect">
+            <a:avLst/>
+          </a:prstGeom>
+          <a:ln w="0">
+            <a:noFill/>
+          </a:ln>
+        </p:spPr>
+      </p:sp>
+      <p:sp>
+        <p:nvSpPr>
+          <p:cNvPr id="242" name="PlaceHolder 2"/>
           <p:cNvSpPr>
             <a:spLocks noGrp="1"/>
           </p:cNvSpPr>
@@ -817,7 +862,7 @@
         <p:spPr>
           <a:xfrm>
             <a:off x="685800" y="4400640"/>
-            <a:ext cx="5485680" cy="3599640"/>
+            <a:ext cx="5484960" cy="3598920"/>
           </a:xfrm>
           <a:prstGeom prst="rect">
             <a:avLst/>
@@ -848,7 +893,7 @@
       </p:sp>
       <p:sp>
         <p:nvSpPr>
-          <p:cNvPr id="237" name="PlaceHolder 3"/>
+          <p:cNvPr id="243" name="PlaceHolder 3"/>
           <p:cNvSpPr>
             <a:spLocks noGrp="1"/>
           </p:cNvSpPr>
@@ -859,7 +904,7 @@
         <p:spPr>
           <a:xfrm>
             <a:off x="3884760" y="8685360"/>
-            <a:ext cx="2971080" cy="457920"/>
+            <a:ext cx="2970360" cy="457200"/>
           </a:xfrm>
           <a:prstGeom prst="rect">
             <a:avLst/>
@@ -903,7 +948,7 @@
                 <a:tab algn="l" pos="0"/>
               </a:tabLst>
             </a:pPr>
-            <a:fld id="{8855AD75-B6FA-4754-B99C-77B64F79F5A1}" type="slidenum">
+            <a:fld id="{5E3C62C5-54E8-4A8F-A361-01FB19DFFFAC}" type="slidenum">
               <a:rPr lang="en-US" sz="1200" b="0" u="none" strike="noStrike">
                 <a:solidFill>
                   <a:schemeClr val="dk1"/>
@@ -950,7 +995,7 @@
       </p:grpSpPr>
       <p:sp>
         <p:nvSpPr>
-          <p:cNvPr id="238" name="PlaceHolder 1"/>
+          <p:cNvPr id="244" name="PlaceHolder 1"/>
           <p:cNvSpPr>
             <a:spLocks noGrp="1"/>
           </p:cNvSpPr>
@@ -961,19 +1006,19 @@
         <p:spPr>
           <a:xfrm>
             <a:off x="685800" y="1143000"/>
-            <a:ext cx="5485680" cy="3085560"/>
-          </a:xfrm>
-          <a:prstGeom prst="rect">
-            <a:avLst/>
-          </a:prstGeom>
-          <a:ln w="0">
-            <a:noFill/>
-          </a:ln>
-        </p:spPr>
-      </p:sp>
-      <p:sp>
-        <p:nvSpPr>
-          <p:cNvPr id="239" name="PlaceHolder 2"/>
+            <a:ext cx="5484960" cy="3084840"/>
+          </a:xfrm>
+          <a:prstGeom prst="rect">
+            <a:avLst/>
+          </a:prstGeom>
+          <a:ln w="0">
+            <a:noFill/>
+          </a:ln>
+        </p:spPr>
+      </p:sp>
+      <p:sp>
+        <p:nvSpPr>
+          <p:cNvPr id="245" name="PlaceHolder 2"/>
           <p:cNvSpPr>
             <a:spLocks noGrp="1"/>
           </p:cNvSpPr>
@@ -984,7 +1029,7 @@
         <p:spPr>
           <a:xfrm>
             <a:off x="685800" y="4400640"/>
-            <a:ext cx="5485680" cy="3599640"/>
+            <a:ext cx="5484960" cy="3598920"/>
           </a:xfrm>
           <a:prstGeom prst="rect">
             <a:avLst/>
@@ -1015,7 +1060,7 @@
       </p:sp>
       <p:sp>
         <p:nvSpPr>
-          <p:cNvPr id="240" name="PlaceHolder 3"/>
+          <p:cNvPr id="246" name="PlaceHolder 3"/>
           <p:cNvSpPr>
             <a:spLocks noGrp="1"/>
           </p:cNvSpPr>
@@ -1026,7 +1071,7 @@
         <p:spPr>
           <a:xfrm>
             <a:off x="3884760" y="8685360"/>
-            <a:ext cx="2971080" cy="457920"/>
+            <a:ext cx="2970360" cy="457200"/>
           </a:xfrm>
           <a:prstGeom prst="rect">
             <a:avLst/>
@@ -1070,7 +1115,7 @@
                 <a:tab algn="l" pos="0"/>
               </a:tabLst>
             </a:pPr>
-            <a:fld id="{081F179D-3A5D-47D9-AF60-428B36BD71B5}" type="slidenum">
+            <a:fld id="{FBB21CD7-E8F5-4296-BC71-C1092F3AB495}" type="slidenum">
               <a:rPr lang="en-US" sz="1200" b="0" u="none" strike="noStrike">
                 <a:solidFill>
                   <a:schemeClr val="dk1"/>
@@ -1117,7 +1162,7 @@
       </p:grpSpPr>
       <p:sp>
         <p:nvSpPr>
-          <p:cNvPr id="241" name="PlaceHolder 1"/>
+          <p:cNvPr id="247" name="PlaceHolder 1"/>
           <p:cNvSpPr>
             <a:spLocks noGrp="1"/>
           </p:cNvSpPr>
@@ -1128,19 +1173,19 @@
         <p:spPr>
           <a:xfrm>
             <a:off x="685800" y="1143000"/>
-            <a:ext cx="5485680" cy="3085560"/>
-          </a:xfrm>
-          <a:prstGeom prst="rect">
-            <a:avLst/>
-          </a:prstGeom>
-          <a:ln w="0">
-            <a:noFill/>
-          </a:ln>
-        </p:spPr>
-      </p:sp>
-      <p:sp>
-        <p:nvSpPr>
-          <p:cNvPr id="242" name="PlaceHolder 2"/>
+            <a:ext cx="5484960" cy="3084840"/>
+          </a:xfrm>
+          <a:prstGeom prst="rect">
+            <a:avLst/>
+          </a:prstGeom>
+          <a:ln w="0">
+            <a:noFill/>
+          </a:ln>
+        </p:spPr>
+      </p:sp>
+      <p:sp>
+        <p:nvSpPr>
+          <p:cNvPr id="248" name="PlaceHolder 2"/>
           <p:cNvSpPr>
             <a:spLocks noGrp="1"/>
           </p:cNvSpPr>
@@ -1151,7 +1196,7 @@
         <p:spPr>
           <a:xfrm>
             <a:off x="685800" y="4400640"/>
-            <a:ext cx="5485680" cy="3599640"/>
+            <a:ext cx="5484960" cy="3598920"/>
           </a:xfrm>
           <a:prstGeom prst="rect">
             <a:avLst/>
@@ -1182,7 +1227,7 @@
       </p:sp>
       <p:sp>
         <p:nvSpPr>
-          <p:cNvPr id="243" name="PlaceHolder 3"/>
+          <p:cNvPr id="249" name="PlaceHolder 3"/>
           <p:cNvSpPr>
             <a:spLocks noGrp="1"/>
           </p:cNvSpPr>
@@ -1193,7 +1238,7 @@
         <p:spPr>
           <a:xfrm>
             <a:off x="3884760" y="8685360"/>
-            <a:ext cx="2971080" cy="457920"/>
+            <a:ext cx="2970360" cy="457200"/>
           </a:xfrm>
           <a:prstGeom prst="rect">
             <a:avLst/>
@@ -1237,7 +1282,7 @@
                 <a:tab algn="l" pos="0"/>
               </a:tabLst>
             </a:pPr>
-            <a:fld id="{8431ABB1-F906-47D0-BCF5-862DD629FBBD}" type="slidenum">
+            <a:fld id="{288EFCDB-003F-4722-8678-E11909230DA5}" type="slidenum">
               <a:rPr lang="en-US" sz="1200" b="0" u="none" strike="noStrike">
                 <a:solidFill>
                   <a:schemeClr val="dk1"/>
@@ -1247,7 +1292,7 @@
                 <a:latin typeface="+mn-lt"/>
                 <a:ea typeface="+mn-ea"/>
               </a:rPr>
-              <a:t>1</a:t>
+              <a:t>&lt;número&gt;</a:t>
             </a:fld>
             <a:endParaRPr lang="pt-BR" sz="1200" b="0" u="none" strike="noStrike">
               <a:solidFill>
@@ -1284,7 +1329,7 @@
       </p:grpSpPr>
       <p:sp>
         <p:nvSpPr>
-          <p:cNvPr id="244" name="PlaceHolder 1"/>
+          <p:cNvPr id="250" name="PlaceHolder 1"/>
           <p:cNvSpPr>
             <a:spLocks noGrp="1"/>
           </p:cNvSpPr>
@@ -1295,19 +1340,19 @@
         <p:spPr>
           <a:xfrm>
             <a:off x="685800" y="1143000"/>
-            <a:ext cx="5485680" cy="3085560"/>
-          </a:xfrm>
-          <a:prstGeom prst="rect">
-            <a:avLst/>
-          </a:prstGeom>
-          <a:ln w="0">
-            <a:noFill/>
-          </a:ln>
-        </p:spPr>
-      </p:sp>
-      <p:sp>
-        <p:nvSpPr>
-          <p:cNvPr id="245" name="PlaceHolder 2"/>
+            <a:ext cx="5484960" cy="3084840"/>
+          </a:xfrm>
+          <a:prstGeom prst="rect">
+            <a:avLst/>
+          </a:prstGeom>
+          <a:ln w="0">
+            <a:noFill/>
+          </a:ln>
+        </p:spPr>
+      </p:sp>
+      <p:sp>
+        <p:nvSpPr>
+          <p:cNvPr id="251" name="PlaceHolder 2"/>
           <p:cNvSpPr>
             <a:spLocks noGrp="1"/>
           </p:cNvSpPr>
@@ -1318,7 +1363,7 @@
         <p:spPr>
           <a:xfrm>
             <a:off x="685800" y="4400640"/>
-            <a:ext cx="5485680" cy="3599640"/>
+            <a:ext cx="5484960" cy="3598920"/>
           </a:xfrm>
           <a:prstGeom prst="rect">
             <a:avLst/>
@@ -1349,7 +1394,7 @@
       </p:sp>
       <p:sp>
         <p:nvSpPr>
-          <p:cNvPr id="246" name="PlaceHolder 3"/>
+          <p:cNvPr id="252" name="PlaceHolder 3"/>
           <p:cNvSpPr>
             <a:spLocks noGrp="1"/>
           </p:cNvSpPr>
@@ -1360,7 +1405,7 @@
         <p:spPr>
           <a:xfrm>
             <a:off x="3884760" y="8685360"/>
-            <a:ext cx="2971080" cy="457920"/>
+            <a:ext cx="2970360" cy="457200"/>
           </a:xfrm>
           <a:prstGeom prst="rect">
             <a:avLst/>
@@ -1404,7 +1449,7 @@
                 <a:tab algn="l" pos="0"/>
               </a:tabLst>
             </a:pPr>
-            <a:fld id="{9086CAFD-E72D-4DFC-B460-2E09771E8DD7}" type="slidenum">
+            <a:fld id="{8235EB55-3B31-4192-88CC-2251C3AD4287}" type="slidenum">
               <a:rPr lang="en-US" sz="1200" b="0" u="none" strike="noStrike">
                 <a:solidFill>
                   <a:schemeClr val="dk1"/>
@@ -1451,7 +1496,7 @@
       </p:grpSpPr>
       <p:sp>
         <p:nvSpPr>
-          <p:cNvPr id="247" name="PlaceHolder 1"/>
+          <p:cNvPr id="253" name="PlaceHolder 1"/>
           <p:cNvSpPr>
             <a:spLocks noGrp="1"/>
           </p:cNvSpPr>
@@ -1462,19 +1507,19 @@
         <p:spPr>
           <a:xfrm>
             <a:off x="685800" y="1143000"/>
-            <a:ext cx="5485680" cy="3085560"/>
-          </a:xfrm>
-          <a:prstGeom prst="rect">
-            <a:avLst/>
-          </a:prstGeom>
-          <a:ln w="0">
-            <a:noFill/>
-          </a:ln>
-        </p:spPr>
-      </p:sp>
-      <p:sp>
-        <p:nvSpPr>
-          <p:cNvPr id="248" name="PlaceHolder 2"/>
+            <a:ext cx="5484960" cy="3084840"/>
+          </a:xfrm>
+          <a:prstGeom prst="rect">
+            <a:avLst/>
+          </a:prstGeom>
+          <a:ln w="0">
+            <a:noFill/>
+          </a:ln>
+        </p:spPr>
+      </p:sp>
+      <p:sp>
+        <p:nvSpPr>
+          <p:cNvPr id="254" name="PlaceHolder 2"/>
           <p:cNvSpPr>
             <a:spLocks noGrp="1"/>
           </p:cNvSpPr>
@@ -1485,7 +1530,7 @@
         <p:spPr>
           <a:xfrm>
             <a:off x="685800" y="4400640"/>
-            <a:ext cx="5485680" cy="3599640"/>
+            <a:ext cx="5484960" cy="3598920"/>
           </a:xfrm>
           <a:prstGeom prst="rect">
             <a:avLst/>
@@ -1516,7 +1561,7 @@
       </p:sp>
       <p:sp>
         <p:nvSpPr>
-          <p:cNvPr id="249" name="PlaceHolder 3"/>
+          <p:cNvPr id="255" name="PlaceHolder 3"/>
           <p:cNvSpPr>
             <a:spLocks noGrp="1"/>
           </p:cNvSpPr>
@@ -1527,7 +1572,7 @@
         <p:spPr>
           <a:xfrm>
             <a:off x="3884760" y="8685360"/>
-            <a:ext cx="2971080" cy="457920"/>
+            <a:ext cx="2970360" cy="457200"/>
           </a:xfrm>
           <a:prstGeom prst="rect">
             <a:avLst/>
@@ -1571,7 +1616,7 @@
                 <a:tab algn="l" pos="0"/>
               </a:tabLst>
             </a:pPr>
-            <a:fld id="{DB3D706E-9125-4939-923A-4E618FA5F396}" type="slidenum">
+            <a:fld id="{341875C5-B263-47FA-A908-E9AC37479EF0}" type="slidenum">
               <a:rPr lang="en-US" sz="1200" b="0" u="none" strike="noStrike">
                 <a:solidFill>
                   <a:schemeClr val="dk1"/>
@@ -1618,7 +1663,7 @@
       </p:grpSpPr>
       <p:sp>
         <p:nvSpPr>
-          <p:cNvPr id="208" name="PlaceHolder 1"/>
+          <p:cNvPr id="214" name="PlaceHolder 1"/>
           <p:cNvSpPr>
             <a:spLocks noGrp="1"/>
           </p:cNvSpPr>
@@ -1629,19 +1674,19 @@
         <p:spPr>
           <a:xfrm>
             <a:off x="685800" y="1143000"/>
-            <a:ext cx="5485680" cy="3085560"/>
-          </a:xfrm>
-          <a:prstGeom prst="rect">
-            <a:avLst/>
-          </a:prstGeom>
-          <a:ln w="0">
-            <a:noFill/>
-          </a:ln>
-        </p:spPr>
-      </p:sp>
-      <p:sp>
-        <p:nvSpPr>
-          <p:cNvPr id="209" name="PlaceHolder 2"/>
+            <a:ext cx="5484960" cy="3084840"/>
+          </a:xfrm>
+          <a:prstGeom prst="rect">
+            <a:avLst/>
+          </a:prstGeom>
+          <a:ln w="0">
+            <a:noFill/>
+          </a:ln>
+        </p:spPr>
+      </p:sp>
+      <p:sp>
+        <p:nvSpPr>
+          <p:cNvPr id="215" name="PlaceHolder 2"/>
           <p:cNvSpPr>
             <a:spLocks noGrp="1"/>
           </p:cNvSpPr>
@@ -1652,7 +1697,7 @@
         <p:spPr>
           <a:xfrm>
             <a:off x="685800" y="4400640"/>
-            <a:ext cx="5485680" cy="3599640"/>
+            <a:ext cx="5484960" cy="3598920"/>
           </a:xfrm>
           <a:prstGeom prst="rect">
             <a:avLst/>
@@ -1683,7 +1728,7 @@
       </p:sp>
       <p:sp>
         <p:nvSpPr>
-          <p:cNvPr id="210" name="PlaceHolder 3"/>
+          <p:cNvPr id="216" name="PlaceHolder 3"/>
           <p:cNvSpPr>
             <a:spLocks noGrp="1"/>
           </p:cNvSpPr>
@@ -1694,7 +1739,7 @@
         <p:spPr>
           <a:xfrm>
             <a:off x="3884760" y="8685360"/>
-            <a:ext cx="2971080" cy="457920"/>
+            <a:ext cx="2970360" cy="457200"/>
           </a:xfrm>
           <a:prstGeom prst="rect">
             <a:avLst/>
@@ -1738,7 +1783,7 @@
                 <a:tab algn="l" pos="0"/>
               </a:tabLst>
             </a:pPr>
-            <a:fld id="{B4CAFFA8-8F55-433C-8B43-31567871A560}" type="slidenum">
+            <a:fld id="{6F03076A-EBCF-4C87-8E04-CB09A43F82AD}" type="slidenum">
               <a:rPr lang="en-US" sz="1200" b="0" u="none" strike="noStrike">
                 <a:solidFill>
                   <a:schemeClr val="dk1"/>
@@ -1785,7 +1830,7 @@
       </p:grpSpPr>
       <p:sp>
         <p:nvSpPr>
-          <p:cNvPr id="211" name="PlaceHolder 1"/>
+          <p:cNvPr id="217" name="PlaceHolder 1"/>
           <p:cNvSpPr>
             <a:spLocks noGrp="1"/>
           </p:cNvSpPr>
@@ -1796,19 +1841,19 @@
         <p:spPr>
           <a:xfrm>
             <a:off x="685800" y="1143000"/>
-            <a:ext cx="5485680" cy="3085560"/>
-          </a:xfrm>
-          <a:prstGeom prst="rect">
-            <a:avLst/>
-          </a:prstGeom>
-          <a:ln w="0">
-            <a:noFill/>
-          </a:ln>
-        </p:spPr>
-      </p:sp>
-      <p:sp>
-        <p:nvSpPr>
-          <p:cNvPr id="212" name="PlaceHolder 2"/>
+            <a:ext cx="5484960" cy="3084840"/>
+          </a:xfrm>
+          <a:prstGeom prst="rect">
+            <a:avLst/>
+          </a:prstGeom>
+          <a:ln w="0">
+            <a:noFill/>
+          </a:ln>
+        </p:spPr>
+      </p:sp>
+      <p:sp>
+        <p:nvSpPr>
+          <p:cNvPr id="218" name="PlaceHolder 2"/>
           <p:cNvSpPr>
             <a:spLocks noGrp="1"/>
           </p:cNvSpPr>
@@ -1819,7 +1864,7 @@
         <p:spPr>
           <a:xfrm>
             <a:off x="685800" y="4400640"/>
-            <a:ext cx="5485680" cy="3599640"/>
+            <a:ext cx="5484960" cy="3598920"/>
           </a:xfrm>
           <a:prstGeom prst="rect">
             <a:avLst/>
@@ -1850,7 +1895,7 @@
       </p:sp>
       <p:sp>
         <p:nvSpPr>
-          <p:cNvPr id="213" name="PlaceHolder 3"/>
+          <p:cNvPr id="219" name="PlaceHolder 3"/>
           <p:cNvSpPr>
             <a:spLocks noGrp="1"/>
           </p:cNvSpPr>
@@ -1861,7 +1906,7 @@
         <p:spPr>
           <a:xfrm>
             <a:off x="3884760" y="8685360"/>
-            <a:ext cx="2971080" cy="457920"/>
+            <a:ext cx="2970360" cy="457200"/>
           </a:xfrm>
           <a:prstGeom prst="rect">
             <a:avLst/>
@@ -1905,7 +1950,7 @@
                 <a:tab algn="l" pos="0"/>
               </a:tabLst>
             </a:pPr>
-            <a:fld id="{9D4FD056-AA30-4B4C-A64B-5452024C7995}" type="slidenum">
+            <a:fld id="{8BCCC23E-1D30-448C-AD2A-D8C489326894}" type="slidenum">
               <a:rPr lang="en-US" sz="1200" b="0" u="none" strike="noStrike">
                 <a:solidFill>
                   <a:schemeClr val="dk1"/>
@@ -1952,7 +1997,7 @@
       </p:grpSpPr>
       <p:sp>
         <p:nvSpPr>
-          <p:cNvPr id="214" name="PlaceHolder 1"/>
+          <p:cNvPr id="220" name="PlaceHolder 1"/>
           <p:cNvSpPr>
             <a:spLocks noGrp="1"/>
           </p:cNvSpPr>
@@ -1963,19 +2008,19 @@
         <p:spPr>
           <a:xfrm>
             <a:off x="685800" y="1143000"/>
-            <a:ext cx="5485680" cy="3085560"/>
-          </a:xfrm>
-          <a:prstGeom prst="rect">
-            <a:avLst/>
-          </a:prstGeom>
-          <a:ln w="0">
-            <a:noFill/>
-          </a:ln>
-        </p:spPr>
-      </p:sp>
-      <p:sp>
-        <p:nvSpPr>
-          <p:cNvPr id="215" name="PlaceHolder 2"/>
+            <a:ext cx="5484960" cy="3084840"/>
+          </a:xfrm>
+          <a:prstGeom prst="rect">
+            <a:avLst/>
+          </a:prstGeom>
+          <a:ln w="0">
+            <a:noFill/>
+          </a:ln>
+        </p:spPr>
+      </p:sp>
+      <p:sp>
+        <p:nvSpPr>
+          <p:cNvPr id="221" name="PlaceHolder 2"/>
           <p:cNvSpPr>
             <a:spLocks noGrp="1"/>
           </p:cNvSpPr>
@@ -1986,7 +2031,7 @@
         <p:spPr>
           <a:xfrm>
             <a:off x="685800" y="4400640"/>
-            <a:ext cx="5485680" cy="3599640"/>
+            <a:ext cx="5484960" cy="3598920"/>
           </a:xfrm>
           <a:prstGeom prst="rect">
             <a:avLst/>
@@ -2017,7 +2062,7 @@
       </p:sp>
       <p:sp>
         <p:nvSpPr>
-          <p:cNvPr id="216" name="PlaceHolder 3"/>
+          <p:cNvPr id="222" name="PlaceHolder 3"/>
           <p:cNvSpPr>
             <a:spLocks noGrp="1"/>
           </p:cNvSpPr>
@@ -2028,7 +2073,7 @@
         <p:spPr>
           <a:xfrm>
             <a:off x="3884760" y="8685360"/>
-            <a:ext cx="2971080" cy="457920"/>
+            <a:ext cx="2970360" cy="457200"/>
           </a:xfrm>
           <a:prstGeom prst="rect">
             <a:avLst/>
@@ -2072,7 +2117,7 @@
                 <a:tab algn="l" pos="0"/>
               </a:tabLst>
             </a:pPr>
-            <a:fld id="{5AC6B389-AF6B-4784-87B3-3FED1B87A019}" type="slidenum">
+            <a:fld id="{7632C0E2-AFB3-4FE5-ADC6-A64F24EE04AB}" type="slidenum">
               <a:rPr lang="en-US" sz="1200" b="0" u="none" strike="noStrike">
                 <a:solidFill>
                   <a:schemeClr val="dk1"/>
@@ -2119,7 +2164,7 @@
       </p:grpSpPr>
       <p:sp>
         <p:nvSpPr>
-          <p:cNvPr id="217" name="PlaceHolder 1"/>
+          <p:cNvPr id="223" name="PlaceHolder 1"/>
           <p:cNvSpPr>
             <a:spLocks noGrp="1"/>
           </p:cNvSpPr>
@@ -2130,19 +2175,19 @@
         <p:spPr>
           <a:xfrm>
             <a:off x="685800" y="1143000"/>
-            <a:ext cx="5485680" cy="3085560"/>
-          </a:xfrm>
-          <a:prstGeom prst="rect">
-            <a:avLst/>
-          </a:prstGeom>
-          <a:ln w="0">
-            <a:noFill/>
-          </a:ln>
-        </p:spPr>
-      </p:sp>
-      <p:sp>
-        <p:nvSpPr>
-          <p:cNvPr id="218" name="PlaceHolder 2"/>
+            <a:ext cx="5484960" cy="3084840"/>
+          </a:xfrm>
+          <a:prstGeom prst="rect">
+            <a:avLst/>
+          </a:prstGeom>
+          <a:ln w="0">
+            <a:noFill/>
+          </a:ln>
+        </p:spPr>
+      </p:sp>
+      <p:sp>
+        <p:nvSpPr>
+          <p:cNvPr id="224" name="PlaceHolder 2"/>
           <p:cNvSpPr>
             <a:spLocks noGrp="1"/>
           </p:cNvSpPr>
@@ -2153,7 +2198,7 @@
         <p:spPr>
           <a:xfrm>
             <a:off x="685800" y="4400640"/>
-            <a:ext cx="5485680" cy="3599640"/>
+            <a:ext cx="5484960" cy="3598920"/>
           </a:xfrm>
           <a:prstGeom prst="rect">
             <a:avLst/>
@@ -2184,7 +2229,7 @@
       </p:sp>
       <p:sp>
         <p:nvSpPr>
-          <p:cNvPr id="219" name="PlaceHolder 3"/>
+          <p:cNvPr id="225" name="PlaceHolder 3"/>
           <p:cNvSpPr>
             <a:spLocks noGrp="1"/>
           </p:cNvSpPr>
@@ -2195,7 +2240,7 @@
         <p:spPr>
           <a:xfrm>
             <a:off x="3884760" y="8685360"/>
-            <a:ext cx="2971080" cy="457920"/>
+            <a:ext cx="2970360" cy="457200"/>
           </a:xfrm>
           <a:prstGeom prst="rect">
             <a:avLst/>
@@ -2239,7 +2284,7 @@
                 <a:tab algn="l" pos="0"/>
               </a:tabLst>
             </a:pPr>
-            <a:fld id="{EB041FF1-6212-4F3B-8393-EF09938E0619}" type="slidenum">
+            <a:fld id="{11BADA18-6E25-4A9F-9276-F66D2E3829D8}" type="slidenum">
               <a:rPr lang="en-US" sz="1200" b="0" u="none" strike="noStrike">
                 <a:solidFill>
                   <a:schemeClr val="dk1"/>
@@ -2286,7 +2331,7 @@
       </p:grpSpPr>
       <p:sp>
         <p:nvSpPr>
-          <p:cNvPr id="220" name="PlaceHolder 1"/>
+          <p:cNvPr id="226" name="PlaceHolder 1"/>
           <p:cNvSpPr>
             <a:spLocks noGrp="1"/>
           </p:cNvSpPr>
@@ -2297,19 +2342,19 @@
         <p:spPr>
           <a:xfrm>
             <a:off x="685800" y="1143000"/>
-            <a:ext cx="5485680" cy="3085560"/>
-          </a:xfrm>
-          <a:prstGeom prst="rect">
-            <a:avLst/>
-          </a:prstGeom>
-          <a:ln w="0">
-            <a:noFill/>
-          </a:ln>
-        </p:spPr>
-      </p:sp>
-      <p:sp>
-        <p:nvSpPr>
-          <p:cNvPr id="221" name="PlaceHolder 2"/>
+            <a:ext cx="5484960" cy="3084840"/>
+          </a:xfrm>
+          <a:prstGeom prst="rect">
+            <a:avLst/>
+          </a:prstGeom>
+          <a:ln w="0">
+            <a:noFill/>
+          </a:ln>
+        </p:spPr>
+      </p:sp>
+      <p:sp>
+        <p:nvSpPr>
+          <p:cNvPr id="227" name="PlaceHolder 2"/>
           <p:cNvSpPr>
             <a:spLocks noGrp="1"/>
           </p:cNvSpPr>
@@ -2320,7 +2365,7 @@
         <p:spPr>
           <a:xfrm>
             <a:off x="685800" y="4400640"/>
-            <a:ext cx="5485680" cy="3599640"/>
+            <a:ext cx="5484960" cy="3598920"/>
           </a:xfrm>
           <a:prstGeom prst="rect">
             <a:avLst/>
@@ -2351,7 +2396,7 @@
       </p:sp>
       <p:sp>
         <p:nvSpPr>
-          <p:cNvPr id="222" name="PlaceHolder 3"/>
+          <p:cNvPr id="228" name="PlaceHolder 3"/>
           <p:cNvSpPr>
             <a:spLocks noGrp="1"/>
           </p:cNvSpPr>
@@ -2362,7 +2407,7 @@
         <p:spPr>
           <a:xfrm>
             <a:off x="3884760" y="8685360"/>
-            <a:ext cx="2971080" cy="457920"/>
+            <a:ext cx="2970360" cy="457200"/>
           </a:xfrm>
           <a:prstGeom prst="rect">
             <a:avLst/>
@@ -2406,7 +2451,7 @@
                 <a:tab algn="l" pos="0"/>
               </a:tabLst>
             </a:pPr>
-            <a:fld id="{F950ACF1-1860-47A8-BC3C-B05DF9E6BE76}" type="slidenum">
+            <a:fld id="{9BE9BB36-65AF-4AC3-91E1-04E27F21500B}" type="slidenum">
               <a:rPr lang="en-US" sz="1200" b="0" u="none" strike="noStrike">
                 <a:solidFill>
                   <a:schemeClr val="dk1"/>
@@ -2453,7 +2498,7 @@
       </p:grpSpPr>
       <p:sp>
         <p:nvSpPr>
-          <p:cNvPr id="223" name="PlaceHolder 1"/>
+          <p:cNvPr id="229" name="PlaceHolder 1"/>
           <p:cNvSpPr>
             <a:spLocks noGrp="1"/>
           </p:cNvSpPr>
@@ -2464,19 +2509,19 @@
         <p:spPr>
           <a:xfrm>
             <a:off x="685800" y="1143000"/>
-            <a:ext cx="5485680" cy="3085560"/>
-          </a:xfrm>
-          <a:prstGeom prst="rect">
-            <a:avLst/>
-          </a:prstGeom>
-          <a:ln w="0">
-            <a:noFill/>
-          </a:ln>
-        </p:spPr>
-      </p:sp>
-      <p:sp>
-        <p:nvSpPr>
-          <p:cNvPr id="224" name="PlaceHolder 2"/>
+            <a:ext cx="5484960" cy="3084840"/>
+          </a:xfrm>
+          <a:prstGeom prst="rect">
+            <a:avLst/>
+          </a:prstGeom>
+          <a:ln w="0">
+            <a:noFill/>
+          </a:ln>
+        </p:spPr>
+      </p:sp>
+      <p:sp>
+        <p:nvSpPr>
+          <p:cNvPr id="230" name="PlaceHolder 2"/>
           <p:cNvSpPr>
             <a:spLocks noGrp="1"/>
           </p:cNvSpPr>
@@ -2487,7 +2532,7 @@
         <p:spPr>
           <a:xfrm>
             <a:off x="685800" y="4400640"/>
-            <a:ext cx="5485680" cy="3599640"/>
+            <a:ext cx="5484960" cy="3598920"/>
           </a:xfrm>
           <a:prstGeom prst="rect">
             <a:avLst/>
@@ -2518,7 +2563,7 @@
       </p:sp>
       <p:sp>
         <p:nvSpPr>
-          <p:cNvPr id="225" name="PlaceHolder 3"/>
+          <p:cNvPr id="231" name="PlaceHolder 3"/>
           <p:cNvSpPr>
             <a:spLocks noGrp="1"/>
           </p:cNvSpPr>
@@ -2529,7 +2574,7 @@
         <p:spPr>
           <a:xfrm>
             <a:off x="3884760" y="8685360"/>
-            <a:ext cx="2971080" cy="457920"/>
+            <a:ext cx="2970360" cy="457200"/>
           </a:xfrm>
           <a:prstGeom prst="rect">
             <a:avLst/>
@@ -2573,7 +2618,7 @@
                 <a:tab algn="l" pos="0"/>
               </a:tabLst>
             </a:pPr>
-            <a:fld id="{7BAFEBEF-6DCF-4CFF-9E58-CC1E473AEE92}" type="slidenum">
+            <a:fld id="{216E7F79-048A-4712-B19C-853392C3D048}" type="slidenum">
               <a:rPr lang="en-US" sz="1200" b="0" u="none" strike="noStrike">
                 <a:solidFill>
                   <a:schemeClr val="dk1"/>
@@ -2620,7 +2665,7 @@
       </p:grpSpPr>
       <p:sp>
         <p:nvSpPr>
-          <p:cNvPr id="226" name="PlaceHolder 1"/>
+          <p:cNvPr id="232" name="PlaceHolder 1"/>
           <p:cNvSpPr>
             <a:spLocks noGrp="1"/>
           </p:cNvSpPr>
@@ -2631,19 +2676,19 @@
         <p:spPr>
           <a:xfrm>
             <a:off x="685800" y="1143000"/>
-            <a:ext cx="5485680" cy="3085560"/>
-          </a:xfrm>
-          <a:prstGeom prst="rect">
-            <a:avLst/>
-          </a:prstGeom>
-          <a:ln w="0">
-            <a:noFill/>
-          </a:ln>
-        </p:spPr>
-      </p:sp>
-      <p:sp>
-        <p:nvSpPr>
-          <p:cNvPr id="227" name="PlaceHolder 2"/>
+            <a:ext cx="5484960" cy="3084840"/>
+          </a:xfrm>
+          <a:prstGeom prst="rect">
+            <a:avLst/>
+          </a:prstGeom>
+          <a:ln w="0">
+            <a:noFill/>
+          </a:ln>
+        </p:spPr>
+      </p:sp>
+      <p:sp>
+        <p:nvSpPr>
+          <p:cNvPr id="233" name="PlaceHolder 2"/>
           <p:cNvSpPr>
             <a:spLocks noGrp="1"/>
           </p:cNvSpPr>
@@ -2654,7 +2699,7 @@
         <p:spPr>
           <a:xfrm>
             <a:off x="685800" y="4400640"/>
-            <a:ext cx="5485680" cy="3599640"/>
+            <a:ext cx="5484960" cy="3598920"/>
           </a:xfrm>
           <a:prstGeom prst="rect">
             <a:avLst/>
@@ -2685,7 +2730,7 @@
       </p:sp>
       <p:sp>
         <p:nvSpPr>
-          <p:cNvPr id="228" name="PlaceHolder 3"/>
+          <p:cNvPr id="234" name="PlaceHolder 3"/>
           <p:cNvSpPr>
             <a:spLocks noGrp="1"/>
           </p:cNvSpPr>
@@ -2696,7 +2741,7 @@
         <p:spPr>
           <a:xfrm>
             <a:off x="3884760" y="8685360"/>
-            <a:ext cx="2971080" cy="457920"/>
+            <a:ext cx="2970360" cy="457200"/>
           </a:xfrm>
           <a:prstGeom prst="rect">
             <a:avLst/>
@@ -2740,7 +2785,7 @@
                 <a:tab algn="l" pos="0"/>
               </a:tabLst>
             </a:pPr>
-            <a:fld id="{67847B66-701E-41FC-A750-20ADE87EA4EA}" type="slidenum">
+            <a:fld id="{057B4610-6DC0-446A-9397-91B914FAB75C}" type="slidenum">
               <a:rPr lang="en-US" sz="1200" b="0" u="none" strike="noStrike">
                 <a:solidFill>
                   <a:schemeClr val="dk1"/>
@@ -2787,7 +2832,7 @@
       </p:grpSpPr>
       <p:sp>
         <p:nvSpPr>
-          <p:cNvPr id="229" name="PlaceHolder 1"/>
+          <p:cNvPr id="235" name="PlaceHolder 1"/>
           <p:cNvSpPr>
             <a:spLocks noGrp="1"/>
           </p:cNvSpPr>
@@ -2798,19 +2843,19 @@
         <p:spPr>
           <a:xfrm>
             <a:off x="685800" y="1143000"/>
-            <a:ext cx="5485680" cy="3085560"/>
-          </a:xfrm>
-          <a:prstGeom prst="rect">
-            <a:avLst/>
-          </a:prstGeom>
-          <a:ln w="0">
-            <a:noFill/>
-          </a:ln>
-        </p:spPr>
-      </p:sp>
-      <p:sp>
-        <p:nvSpPr>
-          <p:cNvPr id="230" name="PlaceHolder 2"/>
+            <a:ext cx="5484960" cy="3084840"/>
+          </a:xfrm>
+          <a:prstGeom prst="rect">
+            <a:avLst/>
+          </a:prstGeom>
+          <a:ln w="0">
+            <a:noFill/>
+          </a:ln>
+        </p:spPr>
+      </p:sp>
+      <p:sp>
+        <p:nvSpPr>
+          <p:cNvPr id="236" name="PlaceHolder 2"/>
           <p:cNvSpPr>
             <a:spLocks noGrp="1"/>
           </p:cNvSpPr>
@@ -2821,7 +2866,7 @@
         <p:spPr>
           <a:xfrm>
             <a:off x="685800" y="4400640"/>
-            <a:ext cx="5485680" cy="3599640"/>
+            <a:ext cx="5484960" cy="3598920"/>
           </a:xfrm>
           <a:prstGeom prst="rect">
             <a:avLst/>
@@ -2852,7 +2897,7 @@
       </p:sp>
       <p:sp>
         <p:nvSpPr>
-          <p:cNvPr id="231" name="PlaceHolder 3"/>
+          <p:cNvPr id="237" name="PlaceHolder 3"/>
           <p:cNvSpPr>
             <a:spLocks noGrp="1"/>
           </p:cNvSpPr>
@@ -2863,7 +2908,7 @@
         <p:spPr>
           <a:xfrm>
             <a:off x="3884760" y="8685360"/>
-            <a:ext cx="2971080" cy="457920"/>
+            <a:ext cx="2970360" cy="457200"/>
           </a:xfrm>
           <a:prstGeom prst="rect">
             <a:avLst/>
@@ -2907,7 +2952,7 @@
                 <a:tab algn="l" pos="0"/>
               </a:tabLst>
             </a:pPr>
-            <a:fld id="{CB4383DA-57AC-4E9F-8C72-916B1E72B2DA}" type="slidenum">
+            <a:fld id="{D9669D3C-20C8-4D5A-BAF1-05F8A1B9ABD5}" type="slidenum">
               <a:rPr lang="en-US" sz="1200" b="0" u="none" strike="noStrike">
                 <a:solidFill>
                   <a:schemeClr val="dk1"/>
@@ -2936,7 +2981,7 @@
 </file>
 
 <file path=ppt/slideLayouts/slideLayout1.xml><?xml version="1.0" encoding="utf-8"?>
-<p:sldLayout xmlns:a="http://schemas.openxmlformats.org/drawingml/2006/main" xmlns:p="http://schemas.openxmlformats.org/presentationml/2006/main" xmlns:r="http://schemas.openxmlformats.org/officeDocument/2006/relationships" xmlns:p14="http://schemas.microsoft.com/office/powerpoint/2010/main" xmlns:p15="http://schemas.microsoft.com/office/powerpoint/2012/main" xmlns:mc="http://schemas.openxmlformats.org/markup-compatibility/2006" type="blank" preserve="1">
+<p:sldLayout xmlns:a="http://schemas.openxmlformats.org/drawingml/2006/main" xmlns:p="http://schemas.openxmlformats.org/presentationml/2006/main" xmlns:r="http://schemas.openxmlformats.org/officeDocument/2006/relationships" xmlns:p14="http://schemas.microsoft.com/office/powerpoint/2010/main" xmlns:p15="http://schemas.microsoft.com/office/powerpoint/2012/main" xmlns:mc="http://schemas.openxmlformats.org/markup-compatibility/2006" type="title" preserve="1">
   <p:cSld name="DEFAULT">
     <p:bg>
       <p:bgPr>
@@ -2971,8 +3016,8 @@
         </p:nvSpPr>
         <p:spPr>
           <a:xfrm>
-            <a:off x="457200" y="205200"/>
-            <a:ext cx="8229240" cy="858600"/>
+            <a:off x="457200" y="496800"/>
+            <a:ext cx="8228520" cy="274680"/>
           </a:xfrm>
           <a:prstGeom prst="rect">
             <a:avLst/>
@@ -2984,14 +3029,14 @@
         </p:spPr>
         <p:txBody>
           <a:bodyPr lIns="0" rIns="0" tIns="0" bIns="0" anchor="ctr">
-            <a:noAutofit/>
-          </a:bodyPr>
-          <a:p>
-            <a:pPr indent="0" algn="ctr">
+            <a:spAutoFit/>
+          </a:bodyPr>
+          <a:p>
+            <a:pPr indent="0">
               <a:buNone/>
             </a:pPr>
             <a:r>
-              <a:rPr lang="pt-BR" sz="4400" b="0" u="none" strike="noStrike">
+              <a:rPr lang="pt-BR" sz="1800" b="0" u="none" strike="noStrike">
                 <a:solidFill>
                   <a:srgbClr val="000000"/>
                 </a:solidFill>
@@ -3001,260 +3046,7 @@
               </a:rPr>
               <a:t>Clique para editar o formato do texto do título</a:t>
             </a:r>
-            <a:endParaRPr lang="pt-BR" sz="4400" b="0" u="none" strike="noStrike">
-              <a:solidFill>
-                <a:srgbClr val="000000"/>
-              </a:solidFill>
-              <a:effectLst/>
-              <a:uFillTx/>
-              <a:latin typeface="Arial"/>
-            </a:endParaRPr>
-          </a:p>
-        </p:txBody>
-      </p:sp>
-      <p:sp>
-        <p:nvSpPr>
-          <p:cNvPr id="3" name="PlaceHolder 2"/>
-          <p:cNvSpPr>
-            <a:spLocks noGrp="1"/>
-          </p:cNvSpPr>
-          <p:nvPr>
-            <p:ph type="body"/>
-          </p:nvPr>
-        </p:nvSpPr>
-        <p:spPr>
-          <a:xfrm>
-            <a:off x="457200" y="1203480"/>
-            <a:ext cx="8229240" cy="2982960"/>
-          </a:xfrm>
-          <a:prstGeom prst="rect">
-            <a:avLst/>
-          </a:prstGeom>
-          <a:noFill/>
-          <a:ln w="0">
-            <a:noFill/>
-          </a:ln>
-        </p:spPr>
-        <p:txBody>
-          <a:bodyPr lIns="0" rIns="0" tIns="0" bIns="0" anchor="t">
-            <a:normAutofit lnSpcReduction="9999"/>
-          </a:bodyPr>
-          <a:p>
-            <a:pPr marL="432000" indent="-324000">
-              <a:spcBef>
-                <a:spcPts val="1417"/>
-              </a:spcBef>
-              <a:buClr>
-                <a:srgbClr val="000000"/>
-              </a:buClr>
-              <a:buSzPct val="45000"/>
-              <a:buFont typeface="Wingdings" charset="2"/>
-              <a:buChar char=""/>
-            </a:pPr>
-            <a:r>
-              <a:rPr lang="pt-BR" sz="3200" b="0" u="none" strike="noStrike">
-                <a:solidFill>
-                  <a:srgbClr val="000000"/>
-                </a:solidFill>
-                <a:effectLst/>
-                <a:uFillTx/>
-                <a:latin typeface="Arial"/>
-              </a:rPr>
-              <a:t>Clique para editar o formato de texto dos tópicos</a:t>
-            </a:r>
-            <a:endParaRPr lang="pt-BR" sz="3200" b="0" u="none" strike="noStrike">
-              <a:solidFill>
-                <a:srgbClr val="000000"/>
-              </a:solidFill>
-              <a:effectLst/>
-              <a:uFillTx/>
-              <a:latin typeface="Arial"/>
-            </a:endParaRPr>
-          </a:p>
-          <a:p>
-            <a:pPr marL="864000" lvl="1" indent="-324000">
-              <a:spcBef>
-                <a:spcPts val="1134"/>
-              </a:spcBef>
-              <a:buClr>
-                <a:srgbClr val="000000"/>
-              </a:buClr>
-              <a:buSzPct val="75000"/>
-              <a:buFont typeface="Symbol" charset="2"/>
-              <a:buChar char=""/>
-            </a:pPr>
-            <a:r>
-              <a:rPr lang="pt-BR" sz="2800" b="0" u="none" strike="noStrike">
-                <a:solidFill>
-                  <a:srgbClr val="000000"/>
-                </a:solidFill>
-                <a:effectLst/>
-                <a:uFillTx/>
-                <a:latin typeface="Arial"/>
-              </a:rPr>
-              <a:t>2.º nível de tópicos</a:t>
-            </a:r>
-            <a:endParaRPr lang="pt-BR" sz="2800" b="0" u="none" strike="noStrike">
-              <a:solidFill>
-                <a:srgbClr val="000000"/>
-              </a:solidFill>
-              <a:effectLst/>
-              <a:uFillTx/>
-              <a:latin typeface="Arial"/>
-            </a:endParaRPr>
-          </a:p>
-          <a:p>
-            <a:pPr marL="1296000" lvl="2" indent="-288000">
-              <a:spcBef>
-                <a:spcPts val="850"/>
-              </a:spcBef>
-              <a:buClr>
-                <a:srgbClr val="000000"/>
-              </a:buClr>
-              <a:buSzPct val="45000"/>
-              <a:buFont typeface="Wingdings" charset="2"/>
-              <a:buChar char=""/>
-            </a:pPr>
-            <a:r>
-              <a:rPr lang="pt-BR" sz="2400" b="0" u="none" strike="noStrike">
-                <a:solidFill>
-                  <a:srgbClr val="000000"/>
-                </a:solidFill>
-                <a:effectLst/>
-                <a:uFillTx/>
-                <a:latin typeface="Arial"/>
-              </a:rPr>
-              <a:t>3.º nível de tópicos</a:t>
-            </a:r>
-            <a:endParaRPr lang="pt-BR" sz="2400" b="0" u="none" strike="noStrike">
-              <a:solidFill>
-                <a:srgbClr val="000000"/>
-              </a:solidFill>
-              <a:effectLst/>
-              <a:uFillTx/>
-              <a:latin typeface="Arial"/>
-            </a:endParaRPr>
-          </a:p>
-          <a:p>
-            <a:pPr marL="1728000" lvl="3" indent="-216000">
-              <a:spcBef>
-                <a:spcPts val="567"/>
-              </a:spcBef>
-              <a:buClr>
-                <a:srgbClr val="000000"/>
-              </a:buClr>
-              <a:buSzPct val="75000"/>
-              <a:buFont typeface="Symbol" charset="2"/>
-              <a:buChar char=""/>
-            </a:pPr>
-            <a:r>
-              <a:rPr lang="pt-BR" sz="2000" b="0" u="none" strike="noStrike">
-                <a:solidFill>
-                  <a:srgbClr val="000000"/>
-                </a:solidFill>
-                <a:effectLst/>
-                <a:uFillTx/>
-                <a:latin typeface="Arial"/>
-              </a:rPr>
-              <a:t>4.º nível de tópicos</a:t>
-            </a:r>
-            <a:endParaRPr lang="pt-BR" sz="2000" b="0" u="none" strike="noStrike">
-              <a:solidFill>
-                <a:srgbClr val="000000"/>
-              </a:solidFill>
-              <a:effectLst/>
-              <a:uFillTx/>
-              <a:latin typeface="Arial"/>
-            </a:endParaRPr>
-          </a:p>
-          <a:p>
-            <a:pPr marL="2160000" lvl="4" indent="-216000">
-              <a:spcBef>
-                <a:spcPts val="283"/>
-              </a:spcBef>
-              <a:buClr>
-                <a:srgbClr val="000000"/>
-              </a:buClr>
-              <a:buSzPct val="45000"/>
-              <a:buFont typeface="Wingdings" charset="2"/>
-              <a:buChar char=""/>
-            </a:pPr>
-            <a:r>
-              <a:rPr lang="pt-BR" sz="2000" b="0" u="none" strike="noStrike">
-                <a:solidFill>
-                  <a:srgbClr val="000000"/>
-                </a:solidFill>
-                <a:effectLst/>
-                <a:uFillTx/>
-                <a:latin typeface="Arial"/>
-              </a:rPr>
-              <a:t>5.º nível de tópicos</a:t>
-            </a:r>
-            <a:endParaRPr lang="pt-BR" sz="2000" b="0" u="none" strike="noStrike">
-              <a:solidFill>
-                <a:srgbClr val="000000"/>
-              </a:solidFill>
-              <a:effectLst/>
-              <a:uFillTx/>
-              <a:latin typeface="Arial"/>
-            </a:endParaRPr>
-          </a:p>
-          <a:p>
-            <a:pPr marL="2592000" lvl="5" indent="-216000">
-              <a:spcBef>
-                <a:spcPts val="283"/>
-              </a:spcBef>
-              <a:buClr>
-                <a:srgbClr val="000000"/>
-              </a:buClr>
-              <a:buSzPct val="45000"/>
-              <a:buFont typeface="Wingdings" charset="2"/>
-              <a:buChar char=""/>
-            </a:pPr>
-            <a:r>
-              <a:rPr lang="pt-BR" sz="2000" b="0" u="none" strike="noStrike">
-                <a:solidFill>
-                  <a:srgbClr val="000000"/>
-                </a:solidFill>
-                <a:effectLst/>
-                <a:uFillTx/>
-                <a:latin typeface="Arial"/>
-              </a:rPr>
-              <a:t>6.º nível de tópicos</a:t>
-            </a:r>
-            <a:endParaRPr lang="pt-BR" sz="2000" b="0" u="none" strike="noStrike">
-              <a:solidFill>
-                <a:srgbClr val="000000"/>
-              </a:solidFill>
-              <a:effectLst/>
-              <a:uFillTx/>
-              <a:latin typeface="Arial"/>
-            </a:endParaRPr>
-          </a:p>
-          <a:p>
-            <a:pPr marL="3024000" lvl="6" indent="-216000">
-              <a:spcBef>
-                <a:spcPts val="283"/>
-              </a:spcBef>
-              <a:buClr>
-                <a:srgbClr val="000000"/>
-              </a:buClr>
-              <a:buSzPct val="45000"/>
-              <a:buFont typeface="Wingdings" charset="2"/>
-              <a:buChar char=""/>
-            </a:pPr>
-            <a:r>
-              <a:rPr lang="pt-BR" sz="2000" b="0" u="none" strike="noStrike">
-                <a:solidFill>
-                  <a:srgbClr val="000000"/>
-                </a:solidFill>
-                <a:effectLst/>
-                <a:uFillTx/>
-                <a:latin typeface="Arial"/>
-              </a:rPr>
-              <a:t>7.º nível de tópicos</a:t>
-            </a:r>
-            <a:endParaRPr lang="pt-BR" sz="2000" b="0" u="none" strike="noStrike">
+            <a:endParaRPr lang="pt-BR" sz="1800" b="0" u="none" strike="noStrike">
               <a:solidFill>
                 <a:srgbClr val="000000"/>
               </a:solidFill>
@@ -3296,7 +3088,7 @@
       </p:grpSpPr>
       <p:sp>
         <p:nvSpPr>
-          <p:cNvPr id="4" name="PlaceHolder 1"/>
+          <p:cNvPr id="3" name="PlaceHolder 1"/>
           <p:cNvSpPr>
             <a:spLocks noGrp="1"/>
           </p:cNvSpPr>
@@ -3306,8 +3098,8 @@
         </p:nvSpPr>
         <p:spPr>
           <a:xfrm>
-            <a:off x="457200" y="496800"/>
-            <a:ext cx="8228880" cy="274680"/>
+            <a:off x="457200" y="205200"/>
+            <a:ext cx="8229240" cy="858600"/>
           </a:xfrm>
           <a:prstGeom prst="rect">
             <a:avLst/>
@@ -3319,14 +3111,14 @@
         </p:spPr>
         <p:txBody>
           <a:bodyPr lIns="0" rIns="0" tIns="0" bIns="0" anchor="ctr">
-            <a:spAutoFit/>
-          </a:bodyPr>
-          <a:p>
-            <a:pPr indent="0">
+            <a:noAutofit/>
+          </a:bodyPr>
+          <a:p>
+            <a:pPr indent="0" algn="ctr">
               <a:buNone/>
             </a:pPr>
             <a:r>
-              <a:rPr lang="pt-BR" sz="1800" b="0" u="none" strike="noStrike">
+              <a:rPr lang="pt-BR" sz="4400" b="0" u="none" strike="noStrike">
                 <a:solidFill>
                   <a:srgbClr val="000000"/>
                 </a:solidFill>
@@ -3334,10 +3126,10 @@
                 <a:uFillTx/>
                 <a:latin typeface="Arial"/>
               </a:rPr>
-              <a:t>Clique para editar o formato </a:t>
-            </a:r>
-            <a:r>
-              <a:rPr lang="pt-BR" sz="1800" b="0" u="none" strike="noStrike">
+              <a:t>Clique para </a:t>
+            </a:r>
+            <a:r>
+              <a:rPr lang="pt-BR" sz="4400" b="0" u="none" strike="noStrike">
                 <a:solidFill>
                   <a:srgbClr val="000000"/>
                 </a:solidFill>
@@ -3345,9 +3137,31 @@
                 <a:uFillTx/>
                 <a:latin typeface="Arial"/>
               </a:rPr>
-              <a:t>do texto do título</a:t>
-            </a:r>
-            <a:endParaRPr lang="pt-BR" sz="1800" b="0" u="none" strike="noStrike">
+              <a:t>editar o </a:t>
+            </a:r>
+            <a:r>
+              <a:rPr lang="pt-BR" sz="4400" b="0" u="none" strike="noStrike">
+                <a:solidFill>
+                  <a:srgbClr val="000000"/>
+                </a:solidFill>
+                <a:effectLst/>
+                <a:uFillTx/>
+                <a:latin typeface="Arial"/>
+              </a:rPr>
+              <a:t>formato do </a:t>
+            </a:r>
+            <a:r>
+              <a:rPr lang="pt-BR" sz="4400" b="0" u="none" strike="noStrike">
+                <a:solidFill>
+                  <a:srgbClr val="000000"/>
+                </a:solidFill>
+                <a:effectLst/>
+                <a:uFillTx/>
+                <a:latin typeface="Arial"/>
+              </a:rPr>
+              <a:t>texto do título</a:t>
+            </a:r>
+            <a:endParaRPr lang="pt-BR" sz="4400" b="0" u="none" strike="noStrike">
               <a:solidFill>
                 <a:srgbClr val="000000"/>
               </a:solidFill>
@@ -3360,7 +3174,7 @@
       </p:sp>
       <p:sp>
         <p:nvSpPr>
-          <p:cNvPr id="5" name="PlaceHolder 2"/>
+          <p:cNvPr id="4" name="PlaceHolder 2"/>
           <p:cNvSpPr>
             <a:spLocks noGrp="1"/>
           </p:cNvSpPr>
@@ -3617,6 +3431,480 @@
 </file>
 
 <file path=ppt/slideLayouts/slideLayout3.xml><?xml version="1.0" encoding="utf-8"?>
+<p:sldLayout xmlns:a="http://schemas.openxmlformats.org/drawingml/2006/main" xmlns:p="http://schemas.openxmlformats.org/presentationml/2006/main" xmlns:r="http://schemas.openxmlformats.org/officeDocument/2006/relationships" xmlns:p14="http://schemas.microsoft.com/office/powerpoint/2010/main" xmlns:p15="http://schemas.microsoft.com/office/powerpoint/2012/main" xmlns:mc="http://schemas.openxmlformats.org/markup-compatibility/2006" type="blank" preserve="1">
+  <p:cSld name="Padrão">
+    <p:bg>
+      <p:bgPr>
+        <a:solidFill>
+          <a:srgbClr val="ffffff"/>
+        </a:solidFill>
+      </p:bgPr>
+    </p:bg>
+    <p:spTree>
+      <p:nvGrpSpPr>
+        <p:cNvPr id="1" name=""/>
+        <p:cNvGrpSpPr/>
+        <p:nvPr/>
+      </p:nvGrpSpPr>
+      <p:grpSpPr>
+        <a:xfrm>
+          <a:off x="0" y="0"/>
+          <a:ext cx="0" cy="0"/>
+          <a:chOff x="0" y="0"/>
+          <a:chExt cx="0" cy="0"/>
+        </a:xfrm>
+      </p:grpSpPr>
+      <p:sp>
+        <p:nvSpPr>
+          <p:cNvPr id="5" name="PlaceHolder 1"/>
+          <p:cNvSpPr>
+            <a:spLocks noGrp="1"/>
+          </p:cNvSpPr>
+          <p:nvPr>
+            <p:ph type="title"/>
+          </p:nvPr>
+        </p:nvSpPr>
+        <p:spPr>
+          <a:xfrm>
+            <a:off x="457200" y="205200"/>
+            <a:ext cx="8229240" cy="858600"/>
+          </a:xfrm>
+          <a:prstGeom prst="rect">
+            <a:avLst/>
+          </a:prstGeom>
+          <a:noFill/>
+          <a:ln w="0">
+            <a:noFill/>
+          </a:ln>
+        </p:spPr>
+        <p:txBody>
+          <a:bodyPr lIns="0" rIns="0" tIns="0" bIns="0" anchor="ctr">
+            <a:noAutofit/>
+          </a:bodyPr>
+          <a:p>
+            <a:pPr indent="0" algn="ctr">
+              <a:buNone/>
+            </a:pPr>
+            <a:r>
+              <a:rPr lang="pt-BR" sz="4400" b="0" u="none" strike="noStrike">
+                <a:solidFill>
+                  <a:srgbClr val="000000"/>
+                </a:solidFill>
+                <a:effectLst/>
+                <a:uFillTx/>
+                <a:latin typeface="Arial"/>
+              </a:rPr>
+              <a:t>Clique para </a:t>
+            </a:r>
+            <a:r>
+              <a:rPr lang="pt-BR" sz="4400" b="0" u="none" strike="noStrike">
+                <a:solidFill>
+                  <a:srgbClr val="000000"/>
+                </a:solidFill>
+                <a:effectLst/>
+                <a:uFillTx/>
+                <a:latin typeface="Arial"/>
+              </a:rPr>
+              <a:t>editar o </a:t>
+            </a:r>
+            <a:r>
+              <a:rPr lang="pt-BR" sz="4400" b="0" u="none" strike="noStrike">
+                <a:solidFill>
+                  <a:srgbClr val="000000"/>
+                </a:solidFill>
+                <a:effectLst/>
+                <a:uFillTx/>
+                <a:latin typeface="Arial"/>
+              </a:rPr>
+              <a:t>formato do </a:t>
+            </a:r>
+            <a:r>
+              <a:rPr lang="pt-BR" sz="4400" b="0" u="none" strike="noStrike">
+                <a:solidFill>
+                  <a:srgbClr val="000000"/>
+                </a:solidFill>
+                <a:effectLst/>
+                <a:uFillTx/>
+                <a:latin typeface="Arial"/>
+              </a:rPr>
+              <a:t>texto do título</a:t>
+            </a:r>
+            <a:endParaRPr lang="pt-BR" sz="4400" b="0" u="none" strike="noStrike">
+              <a:solidFill>
+                <a:srgbClr val="000000"/>
+              </a:solidFill>
+              <a:effectLst/>
+              <a:uFillTx/>
+              <a:latin typeface="Arial"/>
+            </a:endParaRPr>
+          </a:p>
+        </p:txBody>
+      </p:sp>
+      <p:sp>
+        <p:nvSpPr>
+          <p:cNvPr id="6" name="PlaceHolder 2"/>
+          <p:cNvSpPr>
+            <a:spLocks noGrp="1"/>
+          </p:cNvSpPr>
+          <p:nvPr>
+            <p:ph type="body"/>
+          </p:nvPr>
+        </p:nvSpPr>
+        <p:spPr>
+          <a:xfrm>
+            <a:off x="457200" y="1203480"/>
+            <a:ext cx="8229240" cy="2982960"/>
+          </a:xfrm>
+          <a:prstGeom prst="rect">
+            <a:avLst/>
+          </a:prstGeom>
+          <a:noFill/>
+          <a:ln w="0">
+            <a:noFill/>
+          </a:ln>
+        </p:spPr>
+        <p:txBody>
+          <a:bodyPr lIns="0" rIns="0" tIns="0" bIns="0" anchor="t">
+            <a:normAutofit lnSpcReduction="9999"/>
+          </a:bodyPr>
+          <a:p>
+            <a:pPr marL="432000" indent="-324000">
+              <a:spcBef>
+                <a:spcPts val="1417"/>
+              </a:spcBef>
+              <a:buClr>
+                <a:srgbClr val="000000"/>
+              </a:buClr>
+              <a:buSzPct val="45000"/>
+              <a:buFont typeface="Wingdings" charset="2"/>
+              <a:buChar char=""/>
+            </a:pPr>
+            <a:r>
+              <a:rPr lang="pt-BR" sz="3200" b="0" u="none" strike="noStrike">
+                <a:solidFill>
+                  <a:srgbClr val="000000"/>
+                </a:solidFill>
+                <a:effectLst/>
+                <a:uFillTx/>
+                <a:latin typeface="Arial"/>
+              </a:rPr>
+              <a:t>Clique para editar o formato de texto dos tópicos</a:t>
+            </a:r>
+            <a:endParaRPr lang="pt-BR" sz="3200" b="0" u="none" strike="noStrike">
+              <a:solidFill>
+                <a:srgbClr val="000000"/>
+              </a:solidFill>
+              <a:effectLst/>
+              <a:uFillTx/>
+              <a:latin typeface="Arial"/>
+            </a:endParaRPr>
+          </a:p>
+          <a:p>
+            <a:pPr marL="864000" lvl="1" indent="-324000">
+              <a:spcBef>
+                <a:spcPts val="1134"/>
+              </a:spcBef>
+              <a:buClr>
+                <a:srgbClr val="000000"/>
+              </a:buClr>
+              <a:buSzPct val="75000"/>
+              <a:buFont typeface="Symbol" charset="2"/>
+              <a:buChar char=""/>
+            </a:pPr>
+            <a:r>
+              <a:rPr lang="pt-BR" sz="2800" b="0" u="none" strike="noStrike">
+                <a:solidFill>
+                  <a:srgbClr val="000000"/>
+                </a:solidFill>
+                <a:effectLst/>
+                <a:uFillTx/>
+                <a:latin typeface="Arial"/>
+              </a:rPr>
+              <a:t>2.º nível de tópicos</a:t>
+            </a:r>
+            <a:endParaRPr lang="pt-BR" sz="2800" b="0" u="none" strike="noStrike">
+              <a:solidFill>
+                <a:srgbClr val="000000"/>
+              </a:solidFill>
+              <a:effectLst/>
+              <a:uFillTx/>
+              <a:latin typeface="Arial"/>
+            </a:endParaRPr>
+          </a:p>
+          <a:p>
+            <a:pPr marL="1296000" lvl="2" indent="-288000">
+              <a:spcBef>
+                <a:spcPts val="850"/>
+              </a:spcBef>
+              <a:buClr>
+                <a:srgbClr val="000000"/>
+              </a:buClr>
+              <a:buSzPct val="45000"/>
+              <a:buFont typeface="Wingdings" charset="2"/>
+              <a:buChar char=""/>
+            </a:pPr>
+            <a:r>
+              <a:rPr lang="pt-BR" sz="2400" b="0" u="none" strike="noStrike">
+                <a:solidFill>
+                  <a:srgbClr val="000000"/>
+                </a:solidFill>
+                <a:effectLst/>
+                <a:uFillTx/>
+                <a:latin typeface="Arial"/>
+              </a:rPr>
+              <a:t>3.º nível de tópicos</a:t>
+            </a:r>
+            <a:endParaRPr lang="pt-BR" sz="2400" b="0" u="none" strike="noStrike">
+              <a:solidFill>
+                <a:srgbClr val="000000"/>
+              </a:solidFill>
+              <a:effectLst/>
+              <a:uFillTx/>
+              <a:latin typeface="Arial"/>
+            </a:endParaRPr>
+          </a:p>
+          <a:p>
+            <a:pPr marL="1728000" lvl="3" indent="-216000">
+              <a:spcBef>
+                <a:spcPts val="567"/>
+              </a:spcBef>
+              <a:buClr>
+                <a:srgbClr val="000000"/>
+              </a:buClr>
+              <a:buSzPct val="75000"/>
+              <a:buFont typeface="Symbol" charset="2"/>
+              <a:buChar char=""/>
+            </a:pPr>
+            <a:r>
+              <a:rPr lang="pt-BR" sz="2000" b="0" u="none" strike="noStrike">
+                <a:solidFill>
+                  <a:srgbClr val="000000"/>
+                </a:solidFill>
+                <a:effectLst/>
+                <a:uFillTx/>
+                <a:latin typeface="Arial"/>
+              </a:rPr>
+              <a:t>4.º nível de tópicos</a:t>
+            </a:r>
+            <a:endParaRPr lang="pt-BR" sz="2000" b="0" u="none" strike="noStrike">
+              <a:solidFill>
+                <a:srgbClr val="000000"/>
+              </a:solidFill>
+              <a:effectLst/>
+              <a:uFillTx/>
+              <a:latin typeface="Arial"/>
+            </a:endParaRPr>
+          </a:p>
+          <a:p>
+            <a:pPr marL="2160000" lvl="4" indent="-216000">
+              <a:spcBef>
+                <a:spcPts val="283"/>
+              </a:spcBef>
+              <a:buClr>
+                <a:srgbClr val="000000"/>
+              </a:buClr>
+              <a:buSzPct val="45000"/>
+              <a:buFont typeface="Wingdings" charset="2"/>
+              <a:buChar char=""/>
+            </a:pPr>
+            <a:r>
+              <a:rPr lang="pt-BR" sz="2000" b="0" u="none" strike="noStrike">
+                <a:solidFill>
+                  <a:srgbClr val="000000"/>
+                </a:solidFill>
+                <a:effectLst/>
+                <a:uFillTx/>
+                <a:latin typeface="Arial"/>
+              </a:rPr>
+              <a:t>5.º nível de tópicos</a:t>
+            </a:r>
+            <a:endParaRPr lang="pt-BR" sz="2000" b="0" u="none" strike="noStrike">
+              <a:solidFill>
+                <a:srgbClr val="000000"/>
+              </a:solidFill>
+              <a:effectLst/>
+              <a:uFillTx/>
+              <a:latin typeface="Arial"/>
+            </a:endParaRPr>
+          </a:p>
+          <a:p>
+            <a:pPr marL="2592000" lvl="5" indent="-216000">
+              <a:spcBef>
+                <a:spcPts val="283"/>
+              </a:spcBef>
+              <a:buClr>
+                <a:srgbClr val="000000"/>
+              </a:buClr>
+              <a:buSzPct val="45000"/>
+              <a:buFont typeface="Wingdings" charset="2"/>
+              <a:buChar char=""/>
+            </a:pPr>
+            <a:r>
+              <a:rPr lang="pt-BR" sz="2000" b="0" u="none" strike="noStrike">
+                <a:solidFill>
+                  <a:srgbClr val="000000"/>
+                </a:solidFill>
+                <a:effectLst/>
+                <a:uFillTx/>
+                <a:latin typeface="Arial"/>
+              </a:rPr>
+              <a:t>6.º nível de tópicos</a:t>
+            </a:r>
+            <a:endParaRPr lang="pt-BR" sz="2000" b="0" u="none" strike="noStrike">
+              <a:solidFill>
+                <a:srgbClr val="000000"/>
+              </a:solidFill>
+              <a:effectLst/>
+              <a:uFillTx/>
+              <a:latin typeface="Arial"/>
+            </a:endParaRPr>
+          </a:p>
+          <a:p>
+            <a:pPr marL="3024000" lvl="6" indent="-216000">
+              <a:spcBef>
+                <a:spcPts val="283"/>
+              </a:spcBef>
+              <a:buClr>
+                <a:srgbClr val="000000"/>
+              </a:buClr>
+              <a:buSzPct val="45000"/>
+              <a:buFont typeface="Wingdings" charset="2"/>
+              <a:buChar char=""/>
+            </a:pPr>
+            <a:r>
+              <a:rPr lang="pt-BR" sz="2000" b="0" u="none" strike="noStrike">
+                <a:solidFill>
+                  <a:srgbClr val="000000"/>
+                </a:solidFill>
+                <a:effectLst/>
+                <a:uFillTx/>
+                <a:latin typeface="Arial"/>
+              </a:rPr>
+              <a:t>7.º nível de tópicos</a:t>
+            </a:r>
+            <a:endParaRPr lang="pt-BR" sz="2000" b="0" u="none" strike="noStrike">
+              <a:solidFill>
+                <a:srgbClr val="000000"/>
+              </a:solidFill>
+              <a:effectLst/>
+              <a:uFillTx/>
+              <a:latin typeface="Arial"/>
+            </a:endParaRPr>
+          </a:p>
+        </p:txBody>
+      </p:sp>
+    </p:spTree>
+  </p:cSld>
+</p:sldLayout>
+</file>
+
+<file path=ppt/slideLayouts/slideLayout4.xml><?xml version="1.0" encoding="utf-8"?>
+<p:sldLayout xmlns:a="http://schemas.openxmlformats.org/drawingml/2006/main" xmlns:p="http://schemas.openxmlformats.org/presentationml/2006/main" xmlns:r="http://schemas.openxmlformats.org/officeDocument/2006/relationships" xmlns:p14="http://schemas.microsoft.com/office/powerpoint/2010/main" xmlns:p15="http://schemas.microsoft.com/office/powerpoint/2012/main" xmlns:mc="http://schemas.openxmlformats.org/markup-compatibility/2006" type="title" preserve="1">
+  <p:cSld name="Padrão 1">
+    <p:spTree>
+      <p:nvGrpSpPr>
+        <p:cNvPr id="1" name=""/>
+        <p:cNvGrpSpPr/>
+        <p:nvPr/>
+      </p:nvGrpSpPr>
+      <p:grpSpPr>
+        <a:xfrm>
+          <a:off x="0" y="0"/>
+          <a:ext cx="0" cy="0"/>
+          <a:chOff x="0" y="0"/>
+          <a:chExt cx="0" cy="0"/>
+        </a:xfrm>
+      </p:grpSpPr>
+      <p:sp>
+        <p:nvSpPr>
+          <p:cNvPr id="9" name="PlaceHolder 1"/>
+          <p:cNvSpPr>
+            <a:spLocks noGrp="1"/>
+          </p:cNvSpPr>
+          <p:nvPr>
+            <p:ph type="title"/>
+          </p:nvPr>
+        </p:nvSpPr>
+        <p:spPr>
+          <a:xfrm>
+            <a:off x="457200" y="205200"/>
+            <a:ext cx="8229240" cy="858600"/>
+          </a:xfrm>
+          <a:prstGeom prst="rect">
+            <a:avLst/>
+          </a:prstGeom>
+          <a:noFill/>
+          <a:ln w="0">
+            <a:noFill/>
+          </a:ln>
+        </p:spPr>
+        <p:txBody>
+          <a:bodyPr lIns="0" rIns="0" tIns="0" bIns="0" anchor="ctr">
+            <a:spAutoFit/>
+          </a:bodyPr>
+          <a:p>
+            <a:pPr indent="0" algn="ctr">
+              <a:buNone/>
+            </a:pPr>
+            <a:endParaRPr lang="pt-BR" sz="4400" b="0" u="none" strike="noStrike">
+              <a:solidFill>
+                <a:srgbClr val="000000"/>
+              </a:solidFill>
+              <a:effectLst/>
+              <a:uFillTx/>
+              <a:latin typeface="Arial"/>
+            </a:endParaRPr>
+          </a:p>
+        </p:txBody>
+      </p:sp>
+      <p:sp>
+        <p:nvSpPr>
+          <p:cNvPr id="10" name="PlaceHolder 2"/>
+          <p:cNvSpPr>
+            <a:spLocks noGrp="1"/>
+          </p:cNvSpPr>
+          <p:nvPr>
+            <p:ph type="subTitle"/>
+          </p:nvPr>
+        </p:nvSpPr>
+        <p:spPr>
+          <a:xfrm>
+            <a:off x="457200" y="1203480"/>
+            <a:ext cx="8229240" cy="2982960"/>
+          </a:xfrm>
+          <a:prstGeom prst="rect">
+            <a:avLst/>
+          </a:prstGeom>
+          <a:noFill/>
+          <a:ln w="0">
+            <a:noFill/>
+          </a:ln>
+        </p:spPr>
+        <p:txBody>
+          <a:bodyPr lIns="0" rIns="0" tIns="0" bIns="0" anchor="ctr">
+            <a:spAutoFit/>
+          </a:bodyPr>
+          <a:p>
+            <a:pPr indent="0" algn="ctr">
+              <a:buNone/>
+            </a:pPr>
+            <a:endParaRPr lang="pt-BR" sz="3200" b="0" u="none" strike="noStrike">
+              <a:solidFill>
+                <a:srgbClr val="000000"/>
+              </a:solidFill>
+              <a:effectLst/>
+              <a:uFillTx/>
+              <a:latin typeface="Arial"/>
+            </a:endParaRPr>
+          </a:p>
+        </p:txBody>
+      </p:sp>
+    </p:spTree>
+  </p:cSld>
+</p:sldLayout>
+</file>
+
+<file path=ppt/slideLayouts/slideLayout5.xml><?xml version="1.0" encoding="utf-8"?>
 <p:sldLayout xmlns:a="http://schemas.openxmlformats.org/drawingml/2006/main" xmlns:p="http://schemas.openxmlformats.org/presentationml/2006/main" xmlns:r="http://schemas.openxmlformats.org/officeDocument/2006/relationships" xmlns:p14="http://schemas.microsoft.com/office/powerpoint/2010/main" xmlns:p15="http://schemas.microsoft.com/office/powerpoint/2012/main" xmlns:mc="http://schemas.openxmlformats.org/markup-compatibility/2006" type="blank" preserve="1">
   <p:cSld name="1_DEFAULT">
     <p:spTree>
@@ -3661,6 +3949,7 @@
   <p:sldLayoutIdLst>
     <p:sldLayoutId id="2147483649" r:id="rId2"/>
     <p:sldLayoutId id="2147483650" r:id="rId3"/>
+    <p:sldLayoutId id="2147483651" r:id="rId4"/>
   </p:sldLayoutIdLst>
 </p:sldMaster>
 </file>
@@ -3691,7 +3980,7 @@
       </p:grpSpPr>
       <p:sp>
         <p:nvSpPr>
-          <p:cNvPr id="6" name="PlaceHolder 1"/>
+          <p:cNvPr id="7" name="PlaceHolder 1"/>
           <p:cNvSpPr>
             <a:spLocks noGrp="1"/>
           </p:cNvSpPr>
@@ -3701,8 +3990,8 @@
         </p:nvSpPr>
         <p:spPr>
           <a:xfrm>
-            <a:off x="457200" y="205200"/>
-            <a:ext cx="8229240" cy="858600"/>
+            <a:off x="457200" y="496800"/>
+            <a:ext cx="8228520" cy="274680"/>
           </a:xfrm>
           <a:prstGeom prst="rect">
             <a:avLst/>
@@ -3714,14 +4003,14 @@
         </p:spPr>
         <p:txBody>
           <a:bodyPr lIns="0" rIns="0" tIns="0" bIns="0" anchor="ctr">
-            <a:noAutofit/>
-          </a:bodyPr>
-          <a:p>
-            <a:pPr indent="0" algn="ctr">
+            <a:spAutoFit/>
+          </a:bodyPr>
+          <a:p>
+            <a:pPr indent="0">
               <a:buNone/>
             </a:pPr>
             <a:r>
-              <a:rPr lang="pt-BR" sz="4400" b="0" u="none" strike="noStrike">
+              <a:rPr lang="pt-BR" sz="1800" b="0" u="none" strike="noStrike">
                 <a:solidFill>
                   <a:srgbClr val="000000"/>
                 </a:solidFill>
@@ -3729,20 +4018,9 @@
                 <a:uFillTx/>
                 <a:latin typeface="Arial"/>
               </a:rPr>
-              <a:t>Clique para editar o formato do </a:t>
-            </a:r>
-            <a:r>
-              <a:rPr lang="pt-BR" sz="4400" b="0" u="none" strike="noStrike">
-                <a:solidFill>
-                  <a:srgbClr val="000000"/>
-                </a:solidFill>
-                <a:effectLst/>
-                <a:uFillTx/>
-                <a:latin typeface="Arial"/>
-              </a:rPr>
-              <a:t>texto do título</a:t>
-            </a:r>
-            <a:endParaRPr lang="pt-BR" sz="4400" b="0" u="none" strike="noStrike">
+              <a:t>Clique para editar o formato do texto do título</a:t>
+            </a:r>
+            <a:endParaRPr lang="pt-BR" sz="1800" b="0" u="none" strike="noStrike">
               <a:solidFill>
                 <a:srgbClr val="000000"/>
               </a:solidFill>
@@ -3755,7 +4033,7 @@
       </p:sp>
       <p:sp>
         <p:nvSpPr>
-          <p:cNvPr id="7" name="PlaceHolder 2"/>
+          <p:cNvPr id="8" name="PlaceHolder 2"/>
           <p:cNvSpPr>
             <a:spLocks noGrp="1"/>
           </p:cNvSpPr>
@@ -4010,7 +4288,522 @@
   </p:cSld>
   <p:clrMap bg1="lt1" tx1="dk1" bg2="lt2" tx2="dk2" accent1="accent1" accent2="accent2" accent3="accent3" accent4="accent4" accent5="accent5" accent6="accent6" hlink="hlink" folHlink="folHlink"/>
   <p:sldLayoutIdLst>
-    <p:sldLayoutId id="2147483652" r:id="rId2"/>
+    <p:sldLayoutId id="2147483653" r:id="rId2"/>
+  </p:sldLayoutIdLst>
+</p:sldMaster>
+</file>
+
+<file path=ppt/slideMasters/slideMaster4.xml><?xml version="1.0" encoding="utf-8"?>
+<p:sldMaster xmlns:a="http://schemas.openxmlformats.org/drawingml/2006/main" xmlns:p="http://schemas.openxmlformats.org/presentationml/2006/main" xmlns:r="http://schemas.openxmlformats.org/officeDocument/2006/relationships" xmlns:p14="http://schemas.microsoft.com/office/powerpoint/2010/main" xmlns:p15="http://schemas.microsoft.com/office/powerpoint/2012/main" xmlns:mc="http://schemas.openxmlformats.org/markup-compatibility/2006">
+  <p:cSld>
+    <p:bg>
+      <p:bgPr>
+        <a:solidFill>
+          <a:srgbClr val="ffffff"/>
+        </a:solidFill>
+      </p:bgPr>
+    </p:bg>
+    <p:spTree>
+      <p:nvGrpSpPr>
+        <p:cNvPr id="1" name=""/>
+        <p:cNvGrpSpPr/>
+        <p:nvPr/>
+      </p:nvGrpSpPr>
+      <p:grpSpPr>
+        <a:xfrm>
+          <a:off x="0" y="0"/>
+          <a:ext cx="0" cy="0"/>
+          <a:chOff x="0" y="0"/>
+          <a:chExt cx="0" cy="0"/>
+        </a:xfrm>
+      </p:grpSpPr>
+      <p:sp>
+        <p:nvSpPr>
+          <p:cNvPr id="11" name="PlaceHolder 1"/>
+          <p:cNvSpPr>
+            <a:spLocks noGrp="1"/>
+          </p:cNvSpPr>
+          <p:nvPr>
+            <p:ph type="title"/>
+          </p:nvPr>
+        </p:nvSpPr>
+        <p:spPr>
+          <a:xfrm>
+            <a:off x="457200" y="205200"/>
+            <a:ext cx="8229240" cy="858600"/>
+          </a:xfrm>
+          <a:prstGeom prst="rect">
+            <a:avLst/>
+          </a:prstGeom>
+          <a:noFill/>
+          <a:ln w="0">
+            <a:noFill/>
+          </a:ln>
+        </p:spPr>
+        <p:txBody>
+          <a:bodyPr lIns="0" rIns="0" tIns="0" bIns="0" anchor="ctr">
+            <a:noAutofit/>
+          </a:bodyPr>
+          <a:p>
+            <a:pPr indent="0" algn="ctr">
+              <a:buNone/>
+            </a:pPr>
+            <a:r>
+              <a:rPr lang="pt-BR" sz="4400" b="0" u="none" strike="noStrike">
+                <a:solidFill>
+                  <a:srgbClr val="000000"/>
+                </a:solidFill>
+                <a:effectLst/>
+                <a:uFillTx/>
+                <a:latin typeface="Arial"/>
+              </a:rPr>
+              <a:t>Cli</a:t>
+            </a:r>
+            <a:r>
+              <a:rPr lang="pt-BR" sz="4400" b="0" u="none" strike="noStrike">
+                <a:solidFill>
+                  <a:srgbClr val="000000"/>
+                </a:solidFill>
+                <a:effectLst/>
+                <a:uFillTx/>
+                <a:latin typeface="Arial"/>
+              </a:rPr>
+              <a:t>qu</a:t>
+            </a:r>
+            <a:r>
+              <a:rPr lang="pt-BR" sz="4400" b="0" u="none" strike="noStrike">
+                <a:solidFill>
+                  <a:srgbClr val="000000"/>
+                </a:solidFill>
+                <a:effectLst/>
+                <a:uFillTx/>
+                <a:latin typeface="Arial"/>
+              </a:rPr>
+              <a:t>e </a:t>
+            </a:r>
+            <a:r>
+              <a:rPr lang="pt-BR" sz="4400" b="0" u="none" strike="noStrike">
+                <a:solidFill>
+                  <a:srgbClr val="000000"/>
+                </a:solidFill>
+                <a:effectLst/>
+                <a:uFillTx/>
+                <a:latin typeface="Arial"/>
+              </a:rPr>
+              <a:t>par</a:t>
+            </a:r>
+            <a:r>
+              <a:rPr lang="pt-BR" sz="4400" b="0" u="none" strike="noStrike">
+                <a:solidFill>
+                  <a:srgbClr val="000000"/>
+                </a:solidFill>
+                <a:effectLst/>
+                <a:uFillTx/>
+                <a:latin typeface="Arial"/>
+              </a:rPr>
+              <a:t>a </a:t>
+            </a:r>
+            <a:r>
+              <a:rPr lang="pt-BR" sz="4400" b="0" u="none" strike="noStrike">
+                <a:solidFill>
+                  <a:srgbClr val="000000"/>
+                </a:solidFill>
+                <a:effectLst/>
+                <a:uFillTx/>
+                <a:latin typeface="Arial"/>
+              </a:rPr>
+              <a:t>edi</a:t>
+            </a:r>
+            <a:r>
+              <a:rPr lang="pt-BR" sz="4400" b="0" u="none" strike="noStrike">
+                <a:solidFill>
+                  <a:srgbClr val="000000"/>
+                </a:solidFill>
+                <a:effectLst/>
+                <a:uFillTx/>
+                <a:latin typeface="Arial"/>
+              </a:rPr>
+              <a:t>tar </a:t>
+            </a:r>
+            <a:r>
+              <a:rPr lang="pt-BR" sz="4400" b="0" u="none" strike="noStrike">
+                <a:solidFill>
+                  <a:srgbClr val="000000"/>
+                </a:solidFill>
+                <a:effectLst/>
+                <a:uFillTx/>
+                <a:latin typeface="Arial"/>
+              </a:rPr>
+              <a:t>o </a:t>
+            </a:r>
+            <a:r>
+              <a:rPr lang="pt-BR" sz="4400" b="0" u="none" strike="noStrike">
+                <a:solidFill>
+                  <a:srgbClr val="000000"/>
+                </a:solidFill>
+                <a:effectLst/>
+                <a:uFillTx/>
+                <a:latin typeface="Arial"/>
+              </a:rPr>
+              <a:t>for</a:t>
+            </a:r>
+            <a:r>
+              <a:rPr lang="pt-BR" sz="4400" b="0" u="none" strike="noStrike">
+                <a:solidFill>
+                  <a:srgbClr val="000000"/>
+                </a:solidFill>
+                <a:effectLst/>
+                <a:uFillTx/>
+                <a:latin typeface="Arial"/>
+              </a:rPr>
+              <a:t>ma</a:t>
+            </a:r>
+            <a:r>
+              <a:rPr lang="pt-BR" sz="4400" b="0" u="none" strike="noStrike">
+                <a:solidFill>
+                  <a:srgbClr val="000000"/>
+                </a:solidFill>
+                <a:effectLst/>
+                <a:uFillTx/>
+                <a:latin typeface="Arial"/>
+              </a:rPr>
+              <a:t>to </a:t>
+            </a:r>
+            <a:r>
+              <a:rPr lang="pt-BR" sz="4400" b="0" u="none" strike="noStrike">
+                <a:solidFill>
+                  <a:srgbClr val="000000"/>
+                </a:solidFill>
+                <a:effectLst/>
+                <a:uFillTx/>
+                <a:latin typeface="Arial"/>
+              </a:rPr>
+              <a:t>do </a:t>
+            </a:r>
+            <a:r>
+              <a:rPr lang="pt-BR" sz="4400" b="0" u="none" strike="noStrike">
+                <a:solidFill>
+                  <a:srgbClr val="000000"/>
+                </a:solidFill>
+                <a:effectLst/>
+                <a:uFillTx/>
+                <a:latin typeface="Arial"/>
+              </a:rPr>
+              <a:t>tex</a:t>
+            </a:r>
+            <a:r>
+              <a:rPr lang="pt-BR" sz="4400" b="0" u="none" strike="noStrike">
+                <a:solidFill>
+                  <a:srgbClr val="000000"/>
+                </a:solidFill>
+                <a:effectLst/>
+                <a:uFillTx/>
+                <a:latin typeface="Arial"/>
+              </a:rPr>
+              <a:t>to </a:t>
+            </a:r>
+            <a:r>
+              <a:rPr lang="pt-BR" sz="4400" b="0" u="none" strike="noStrike">
+                <a:solidFill>
+                  <a:srgbClr val="000000"/>
+                </a:solidFill>
+                <a:effectLst/>
+                <a:uFillTx/>
+                <a:latin typeface="Arial"/>
+              </a:rPr>
+              <a:t>do </a:t>
+            </a:r>
+            <a:r>
+              <a:rPr lang="pt-BR" sz="4400" b="0" u="none" strike="noStrike">
+                <a:solidFill>
+                  <a:srgbClr val="000000"/>
+                </a:solidFill>
+                <a:effectLst/>
+                <a:uFillTx/>
+                <a:latin typeface="Arial"/>
+              </a:rPr>
+              <a:t>títu</a:t>
+            </a:r>
+            <a:r>
+              <a:rPr lang="pt-BR" sz="4400" b="0" u="none" strike="noStrike">
+                <a:solidFill>
+                  <a:srgbClr val="000000"/>
+                </a:solidFill>
+                <a:effectLst/>
+                <a:uFillTx/>
+                <a:latin typeface="Arial"/>
+              </a:rPr>
+              <a:t>lo</a:t>
+            </a:r>
+            <a:endParaRPr lang="pt-BR" sz="4400" b="0" u="none" strike="noStrike">
+              <a:solidFill>
+                <a:srgbClr val="000000"/>
+              </a:solidFill>
+              <a:effectLst/>
+              <a:uFillTx/>
+              <a:latin typeface="Arial"/>
+            </a:endParaRPr>
+          </a:p>
+        </p:txBody>
+      </p:sp>
+      <p:sp>
+        <p:nvSpPr>
+          <p:cNvPr id="12" name="PlaceHolder 2"/>
+          <p:cNvSpPr>
+            <a:spLocks noGrp="1"/>
+          </p:cNvSpPr>
+          <p:nvPr>
+            <p:ph type="body"/>
+          </p:nvPr>
+        </p:nvSpPr>
+        <p:spPr>
+          <a:xfrm>
+            <a:off x="457200" y="1203480"/>
+            <a:ext cx="8229240" cy="2982960"/>
+          </a:xfrm>
+          <a:prstGeom prst="rect">
+            <a:avLst/>
+          </a:prstGeom>
+          <a:noFill/>
+          <a:ln w="0">
+            <a:noFill/>
+          </a:ln>
+        </p:spPr>
+        <p:txBody>
+          <a:bodyPr lIns="0" rIns="0" tIns="0" bIns="0" anchor="t">
+            <a:normAutofit lnSpcReduction="9999"/>
+          </a:bodyPr>
+          <a:p>
+            <a:pPr marL="432000" indent="-324000">
+              <a:spcBef>
+                <a:spcPts val="1417"/>
+              </a:spcBef>
+              <a:buClr>
+                <a:srgbClr val="000000"/>
+              </a:buClr>
+              <a:buSzPct val="45000"/>
+              <a:buFont typeface="Wingdings" charset="2"/>
+              <a:buChar char=""/>
+            </a:pPr>
+            <a:r>
+              <a:rPr lang="pt-BR" sz="3200" b="0" u="none" strike="noStrike">
+                <a:solidFill>
+                  <a:srgbClr val="000000"/>
+                </a:solidFill>
+                <a:effectLst/>
+                <a:uFillTx/>
+                <a:latin typeface="Arial"/>
+              </a:rPr>
+              <a:t>Clique para editar o formato de texto dos tópicos</a:t>
+            </a:r>
+            <a:endParaRPr lang="pt-BR" sz="3200" b="0" u="none" strike="noStrike">
+              <a:solidFill>
+                <a:srgbClr val="000000"/>
+              </a:solidFill>
+              <a:effectLst/>
+              <a:uFillTx/>
+              <a:latin typeface="Arial"/>
+            </a:endParaRPr>
+          </a:p>
+          <a:p>
+            <a:pPr marL="864000" lvl="1" indent="-324000">
+              <a:spcBef>
+                <a:spcPts val="1134"/>
+              </a:spcBef>
+              <a:buClr>
+                <a:srgbClr val="000000"/>
+              </a:buClr>
+              <a:buSzPct val="75000"/>
+              <a:buFont typeface="Symbol" charset="2"/>
+              <a:buChar char=""/>
+            </a:pPr>
+            <a:r>
+              <a:rPr lang="pt-BR" sz="2800" b="0" u="none" strike="noStrike">
+                <a:solidFill>
+                  <a:srgbClr val="000000"/>
+                </a:solidFill>
+                <a:effectLst/>
+                <a:uFillTx/>
+                <a:latin typeface="Arial"/>
+              </a:rPr>
+              <a:t>2.º nível de tópicos</a:t>
+            </a:r>
+            <a:endParaRPr lang="pt-BR" sz="2800" b="0" u="none" strike="noStrike">
+              <a:solidFill>
+                <a:srgbClr val="000000"/>
+              </a:solidFill>
+              <a:effectLst/>
+              <a:uFillTx/>
+              <a:latin typeface="Arial"/>
+            </a:endParaRPr>
+          </a:p>
+          <a:p>
+            <a:pPr marL="1296000" lvl="2" indent="-288000">
+              <a:spcBef>
+                <a:spcPts val="850"/>
+              </a:spcBef>
+              <a:buClr>
+                <a:srgbClr val="000000"/>
+              </a:buClr>
+              <a:buSzPct val="45000"/>
+              <a:buFont typeface="Wingdings" charset="2"/>
+              <a:buChar char=""/>
+            </a:pPr>
+            <a:r>
+              <a:rPr lang="pt-BR" sz="2400" b="0" u="none" strike="noStrike">
+                <a:solidFill>
+                  <a:srgbClr val="000000"/>
+                </a:solidFill>
+                <a:effectLst/>
+                <a:uFillTx/>
+                <a:latin typeface="Arial"/>
+              </a:rPr>
+              <a:t>3.º nível de tópicos</a:t>
+            </a:r>
+            <a:endParaRPr lang="pt-BR" sz="2400" b="0" u="none" strike="noStrike">
+              <a:solidFill>
+                <a:srgbClr val="000000"/>
+              </a:solidFill>
+              <a:effectLst/>
+              <a:uFillTx/>
+              <a:latin typeface="Arial"/>
+            </a:endParaRPr>
+          </a:p>
+          <a:p>
+            <a:pPr marL="1728000" lvl="3" indent="-216000">
+              <a:spcBef>
+                <a:spcPts val="567"/>
+              </a:spcBef>
+              <a:buClr>
+                <a:srgbClr val="000000"/>
+              </a:buClr>
+              <a:buSzPct val="75000"/>
+              <a:buFont typeface="Symbol" charset="2"/>
+              <a:buChar char=""/>
+            </a:pPr>
+            <a:r>
+              <a:rPr lang="pt-BR" sz="2000" b="0" u="none" strike="noStrike">
+                <a:solidFill>
+                  <a:srgbClr val="000000"/>
+                </a:solidFill>
+                <a:effectLst/>
+                <a:uFillTx/>
+                <a:latin typeface="Arial"/>
+              </a:rPr>
+              <a:t>4.º nível de tópicos</a:t>
+            </a:r>
+            <a:endParaRPr lang="pt-BR" sz="2000" b="0" u="none" strike="noStrike">
+              <a:solidFill>
+                <a:srgbClr val="000000"/>
+              </a:solidFill>
+              <a:effectLst/>
+              <a:uFillTx/>
+              <a:latin typeface="Arial"/>
+            </a:endParaRPr>
+          </a:p>
+          <a:p>
+            <a:pPr marL="2160000" lvl="4" indent="-216000">
+              <a:spcBef>
+                <a:spcPts val="283"/>
+              </a:spcBef>
+              <a:buClr>
+                <a:srgbClr val="000000"/>
+              </a:buClr>
+              <a:buSzPct val="45000"/>
+              <a:buFont typeface="Wingdings" charset="2"/>
+              <a:buChar char=""/>
+            </a:pPr>
+            <a:r>
+              <a:rPr lang="pt-BR" sz="2000" b="0" u="none" strike="noStrike">
+                <a:solidFill>
+                  <a:srgbClr val="000000"/>
+                </a:solidFill>
+                <a:effectLst/>
+                <a:uFillTx/>
+                <a:latin typeface="Arial"/>
+              </a:rPr>
+              <a:t>5.º nível de tópicos</a:t>
+            </a:r>
+            <a:endParaRPr lang="pt-BR" sz="2000" b="0" u="none" strike="noStrike">
+              <a:solidFill>
+                <a:srgbClr val="000000"/>
+              </a:solidFill>
+              <a:effectLst/>
+              <a:uFillTx/>
+              <a:latin typeface="Arial"/>
+            </a:endParaRPr>
+          </a:p>
+          <a:p>
+            <a:pPr marL="2592000" lvl="5" indent="-216000">
+              <a:spcBef>
+                <a:spcPts val="283"/>
+              </a:spcBef>
+              <a:buClr>
+                <a:srgbClr val="000000"/>
+              </a:buClr>
+              <a:buSzPct val="45000"/>
+              <a:buFont typeface="Wingdings" charset="2"/>
+              <a:buChar char=""/>
+            </a:pPr>
+            <a:r>
+              <a:rPr lang="pt-BR" sz="2000" b="0" u="none" strike="noStrike">
+                <a:solidFill>
+                  <a:srgbClr val="000000"/>
+                </a:solidFill>
+                <a:effectLst/>
+                <a:uFillTx/>
+                <a:latin typeface="Arial"/>
+              </a:rPr>
+              <a:t>6.º nível de tópicos</a:t>
+            </a:r>
+            <a:endParaRPr lang="pt-BR" sz="2000" b="0" u="none" strike="noStrike">
+              <a:solidFill>
+                <a:srgbClr val="000000"/>
+              </a:solidFill>
+              <a:effectLst/>
+              <a:uFillTx/>
+              <a:latin typeface="Arial"/>
+            </a:endParaRPr>
+          </a:p>
+          <a:p>
+            <a:pPr marL="3024000" lvl="6" indent="-216000">
+              <a:spcBef>
+                <a:spcPts val="283"/>
+              </a:spcBef>
+              <a:buClr>
+                <a:srgbClr val="000000"/>
+              </a:buClr>
+              <a:buSzPct val="45000"/>
+              <a:buFont typeface="Wingdings" charset="2"/>
+              <a:buChar char=""/>
+            </a:pPr>
+            <a:r>
+              <a:rPr lang="pt-BR" sz="2000" b="0" u="none" strike="noStrike">
+                <a:solidFill>
+                  <a:srgbClr val="000000"/>
+                </a:solidFill>
+                <a:effectLst/>
+                <a:uFillTx/>
+                <a:latin typeface="Arial"/>
+              </a:rPr>
+              <a:t>7.º nível de tópicos</a:t>
+            </a:r>
+            <a:endParaRPr lang="pt-BR" sz="2000" b="0" u="none" strike="noStrike">
+              <a:solidFill>
+                <a:srgbClr val="000000"/>
+              </a:solidFill>
+              <a:effectLst/>
+              <a:uFillTx/>
+              <a:latin typeface="Arial"/>
+            </a:endParaRPr>
+          </a:p>
+        </p:txBody>
+      </p:sp>
+    </p:spTree>
+  </p:cSld>
+  <p:clrMap bg1="lt1" tx1="dk1" bg2="lt2" tx2="dk2" accent1="accent1" accent2="accent2" accent3="accent3" accent4="accent4" accent5="accent5" accent6="accent6" hlink="hlink" folHlink="folHlink"/>
+  <p:sldLayoutIdLst>
+    <p:sldLayoutId id="2147483655" r:id="rId2"/>
   </p:sldLayoutIdLst>
 </p:sldMaster>
 </file>
@@ -4041,14 +4834,14 @@
       </p:grpSpPr>
       <p:sp>
         <p:nvSpPr>
-          <p:cNvPr id="14" name="Shape 0"/>
+          <p:cNvPr id="19" name="Shape 0"/>
           <p:cNvSpPr/>
           <p:nvPr/>
         </p:nvSpPr>
         <p:spPr>
           <a:xfrm>
             <a:off x="0" y="0"/>
-            <a:ext cx="163800" cy="5142960"/>
+            <a:ext cx="163080" cy="5142240"/>
           </a:xfrm>
           <a:prstGeom prst="rect">
             <a:avLst/>
@@ -4090,14 +4883,14 @@
       </p:sp>
       <p:sp>
         <p:nvSpPr>
-          <p:cNvPr id="15" name="Shape 1"/>
+          <p:cNvPr id="20" name="Shape 1"/>
           <p:cNvSpPr/>
           <p:nvPr/>
         </p:nvSpPr>
         <p:spPr>
           <a:xfrm>
             <a:off x="6400800" y="-1097280"/>
-            <a:ext cx="4571280" cy="4571280"/>
+            <a:ext cx="4570560" cy="4570560"/>
           </a:xfrm>
           <a:prstGeom prst="ellipse">
             <a:avLst/>
@@ -4142,14 +4935,14 @@
       </p:sp>
       <p:sp>
         <p:nvSpPr>
-          <p:cNvPr id="16" name="Shape 2"/>
+          <p:cNvPr id="21" name="Shape 2"/>
           <p:cNvSpPr/>
           <p:nvPr/>
         </p:nvSpPr>
         <p:spPr>
           <a:xfrm>
             <a:off x="320040" y="255960"/>
-            <a:ext cx="2102400" cy="438120"/>
+            <a:ext cx="2101680" cy="437400"/>
           </a:xfrm>
           <a:prstGeom prst="rect">
             <a:avLst/>
@@ -4198,14 +4991,14 @@
       </p:sp>
       <p:sp>
         <p:nvSpPr>
-          <p:cNvPr id="17" name="Text 3"/>
+          <p:cNvPr id="22" name="Text 3"/>
           <p:cNvSpPr/>
           <p:nvPr/>
         </p:nvSpPr>
         <p:spPr>
           <a:xfrm>
             <a:off x="320040" y="255960"/>
-            <a:ext cx="2102400" cy="438120"/>
+            <a:ext cx="2101680" cy="437400"/>
           </a:xfrm>
           <a:prstGeom prst="rect">
             <a:avLst/>
@@ -4259,14 +5052,14 @@
       </p:sp>
       <p:sp>
         <p:nvSpPr>
-          <p:cNvPr id="18" name="Text 4"/>
+          <p:cNvPr id="23" name="Text 4"/>
           <p:cNvSpPr/>
           <p:nvPr/>
         </p:nvSpPr>
         <p:spPr>
           <a:xfrm>
             <a:off x="320040" y="1005840"/>
-            <a:ext cx="8228880" cy="1142280"/>
+            <a:ext cx="8228160" cy="1141560"/>
           </a:xfrm>
           <a:prstGeom prst="rect">
             <a:avLst/>
@@ -4320,14 +5113,14 @@
       </p:sp>
       <p:sp>
         <p:nvSpPr>
-          <p:cNvPr id="19" name="Text 5"/>
+          <p:cNvPr id="24" name="Text 5"/>
           <p:cNvSpPr/>
           <p:nvPr/>
         </p:nvSpPr>
         <p:spPr>
           <a:xfrm>
             <a:off x="320040" y="2148840"/>
-            <a:ext cx="8228880" cy="593640"/>
+            <a:ext cx="8228160" cy="592920"/>
           </a:xfrm>
           <a:prstGeom prst="rect">
             <a:avLst/>
@@ -4381,14 +5174,14 @@
       </p:sp>
       <p:sp>
         <p:nvSpPr>
-          <p:cNvPr id="20" name="Text 6"/>
+          <p:cNvPr id="25" name="Text 6"/>
           <p:cNvSpPr/>
           <p:nvPr/>
         </p:nvSpPr>
         <p:spPr>
           <a:xfrm>
             <a:off x="320040" y="2743200"/>
-            <a:ext cx="8228880" cy="365040"/>
+            <a:ext cx="8228160" cy="364320"/>
           </a:xfrm>
           <a:prstGeom prst="rect">
             <a:avLst/>
@@ -4442,14 +5235,14 @@
       </p:sp>
       <p:sp>
         <p:nvSpPr>
-          <p:cNvPr id="21" name="Shape 7"/>
+          <p:cNvPr id="26" name="Shape 7"/>
           <p:cNvSpPr/>
           <p:nvPr/>
         </p:nvSpPr>
         <p:spPr>
           <a:xfrm>
             <a:off x="320040" y="3246120"/>
-            <a:ext cx="5668560" cy="621000"/>
+            <a:ext cx="5667840" cy="620280"/>
           </a:xfrm>
           <a:prstGeom prst="rect">
             <a:avLst/>
@@ -4498,14 +5291,14 @@
       </p:sp>
       <p:sp>
         <p:nvSpPr>
-          <p:cNvPr id="22" name="Text 8"/>
+          <p:cNvPr id="27" name="Text 8"/>
           <p:cNvSpPr/>
           <p:nvPr/>
         </p:nvSpPr>
         <p:spPr>
           <a:xfrm>
             <a:off x="320040" y="3246120"/>
-            <a:ext cx="5668560" cy="621000"/>
+            <a:ext cx="5667840" cy="620280"/>
           </a:xfrm>
           <a:prstGeom prst="rect">
             <a:avLst/>
@@ -4559,14 +5352,14 @@
       </p:sp>
       <p:sp>
         <p:nvSpPr>
-          <p:cNvPr id="23" name="Text 9"/>
+          <p:cNvPr id="28" name="Text 9"/>
           <p:cNvSpPr/>
           <p:nvPr/>
         </p:nvSpPr>
         <p:spPr>
           <a:xfrm>
             <a:off x="320040" y="4773240"/>
-            <a:ext cx="8228880" cy="255240"/>
+            <a:ext cx="8228160" cy="254520"/>
           </a:xfrm>
           <a:prstGeom prst="rect">
             <a:avLst/>
@@ -4605,9 +5398,190 @@
                 <a:latin typeface="Cantarell"/>
                 <a:ea typeface="Cantarell"/>
               </a:rPr>
-              <a:t>Análise de Algoritmos  ·  Apresentação em Dupla</a:t>
+              <a:t>Análise de Algoritmos  </a:t>
             </a:r>
             <a:endParaRPr lang="pt-BR" sz="1000" b="0" u="none" strike="noStrike">
+              <a:solidFill>
+                <a:srgbClr val="ffffff"/>
+              </a:solidFill>
+              <a:effectLst/>
+              <a:uFillTx/>
+              <a:latin typeface="Arial"/>
+            </a:endParaRPr>
+          </a:p>
+        </p:txBody>
+      </p:sp>
+      <p:sp>
+        <p:nvSpPr>
+          <p:cNvPr id="29" name="Text 2"/>
+          <p:cNvSpPr/>
+          <p:nvPr/>
+        </p:nvSpPr>
+        <p:spPr>
+          <a:xfrm>
+            <a:off x="320040" y="3960000"/>
+            <a:ext cx="8228160" cy="659520"/>
+          </a:xfrm>
+          <a:prstGeom prst="rect">
+            <a:avLst/>
+          </a:prstGeom>
+          <a:noFill/>
+          <a:ln w="0">
+            <a:noFill/>
+          </a:ln>
+        </p:spPr>
+        <p:style>
+          <a:lnRef idx="0"/>
+          <a:fillRef idx="0"/>
+          <a:effectRef idx="0"/>
+          <a:fontRef idx="minor"/>
+        </p:style>
+        <p:txBody>
+          <a:bodyPr lIns="0" rIns="0" tIns="0" bIns="0" anchor="ctr">
+            <a:noAutofit/>
+          </a:bodyPr>
+          <a:p>
+            <a:pPr defTabSz="914400">
+              <a:lnSpc>
+                <a:spcPct val="100000"/>
+              </a:lnSpc>
+              <a:tabLst>
+                <a:tab algn="l" pos="0"/>
+              </a:tabLst>
+            </a:pPr>
+            <a:r>
+              <a:rPr lang="en-US" sz="1400" b="0" i="1" u="none" strike="noStrike">
+                <a:solidFill>
+                  <a:srgbClr val="7a9bb5"/>
+                </a:solidFill>
+                <a:effectLst/>
+                <a:uFillTx/>
+                <a:latin typeface="Cantarell"/>
+                <a:ea typeface="Cantarell"/>
+              </a:rPr>
+              <a:t>POR:</a:t>
+            </a:r>
+            <a:endParaRPr lang="pt-BR" sz="1400" b="0" u="none" strike="noStrike">
+              <a:solidFill>
+                <a:srgbClr val="ffffff"/>
+              </a:solidFill>
+              <a:effectLst/>
+              <a:uFillTx/>
+              <a:latin typeface="Arial"/>
+            </a:endParaRPr>
+          </a:p>
+          <a:p>
+            <a:pPr defTabSz="914400">
+              <a:lnSpc>
+                <a:spcPct val="100000"/>
+              </a:lnSpc>
+              <a:tabLst>
+                <a:tab algn="l" pos="0"/>
+              </a:tabLst>
+            </a:pPr>
+            <a:r>
+              <a:rPr lang="en-US" sz="1400" b="0" u="none" strike="noStrike">
+                <a:solidFill>
+                  <a:srgbClr val="7a9bb5"/>
+                </a:solidFill>
+                <a:effectLst/>
+                <a:uFillTx/>
+                <a:latin typeface="Cantarell"/>
+                <a:ea typeface="Cantarell"/>
+              </a:rPr>
+              <a:t>Igor </a:t>
+            </a:r>
+            <a:r>
+              <a:rPr lang="en-US" sz="1400" b="0" u="none" strike="noStrike">
+                <a:solidFill>
+                  <a:srgbClr val="7a9bb5"/>
+                </a:solidFill>
+                <a:effectLst/>
+                <a:uFillTx/>
+                <a:latin typeface="Cantarell"/>
+                <a:ea typeface="Cantarell"/>
+              </a:rPr>
+              <a:t>Meireles </a:t>
+            </a:r>
+            <a:r>
+              <a:rPr lang="en-US" sz="1400" b="0" u="none" strike="noStrike">
+                <a:solidFill>
+                  <a:srgbClr val="7a9bb5"/>
+                </a:solidFill>
+                <a:effectLst/>
+                <a:uFillTx/>
+                <a:latin typeface="Cantarell"/>
+                <a:ea typeface="Cantarell"/>
+              </a:rPr>
+              <a:t>de Lima </a:t>
+            </a:r>
+            <a:r>
+              <a:rPr lang="en-US" sz="1400" b="0" u="none" strike="noStrike">
+                <a:solidFill>
+                  <a:srgbClr val="7a9bb5"/>
+                </a:solidFill>
+                <a:effectLst/>
+                <a:uFillTx/>
+                <a:latin typeface="Cantarell"/>
+                <a:ea typeface="Cantarell"/>
+              </a:rPr>
+              <a:t>Taveira</a:t>
+            </a:r>
+            <a:endParaRPr lang="pt-BR" sz="1400" b="0" u="none" strike="noStrike">
+              <a:solidFill>
+                <a:srgbClr val="ffffff"/>
+              </a:solidFill>
+              <a:effectLst/>
+              <a:uFillTx/>
+              <a:latin typeface="Arial"/>
+            </a:endParaRPr>
+          </a:p>
+          <a:p>
+            <a:pPr defTabSz="914400">
+              <a:lnSpc>
+                <a:spcPct val="100000"/>
+              </a:lnSpc>
+              <a:tabLst>
+                <a:tab algn="l" pos="0"/>
+              </a:tabLst>
+            </a:pPr>
+            <a:r>
+              <a:rPr lang="en-US" sz="1400" b="0" u="none" strike="noStrike">
+                <a:solidFill>
+                  <a:srgbClr val="7a9bb5"/>
+                </a:solidFill>
+                <a:effectLst/>
+                <a:uFillTx/>
+                <a:latin typeface="Cantarell"/>
+                <a:ea typeface="Cantarell"/>
+              </a:rPr>
+              <a:t>Davih </a:t>
+            </a:r>
+            <a:r>
+              <a:rPr lang="en-US" sz="1400" b="0" u="none" strike="noStrike">
+                <a:solidFill>
+                  <a:srgbClr val="7a9bb5"/>
+                </a:solidFill>
+                <a:effectLst/>
+                <a:uFillTx/>
+                <a:latin typeface="Cantarell"/>
+                <a:ea typeface="Cantarell"/>
+              </a:rPr>
+              <a:t>Taumatur</a:t>
+            </a:r>
+            <a:r>
+              <a:rPr lang="en-US" sz="1400" b="0" u="none" strike="noStrike">
+                <a:solidFill>
+                  <a:srgbClr val="7a9bb5"/>
+                </a:solidFill>
+                <a:effectLst/>
+                <a:uFillTx/>
+                <a:latin typeface="Cantarell"/>
+                <a:ea typeface="Cantarell"/>
+              </a:rPr>
+              <a:t>go Soares</a:t>
+            </a:r>
+            <a:endParaRPr lang="pt-BR" sz="1400" b="0" u="none" strike="noStrike">
               <a:solidFill>
                 <a:srgbClr val="ffffff"/>
               </a:solidFill>
@@ -4657,14 +5631,14 @@
       </p:grpSpPr>
       <p:sp>
         <p:nvSpPr>
-          <p:cNvPr id="130" name="Shape 0"/>
+          <p:cNvPr id="136" name="Shape 0"/>
           <p:cNvSpPr/>
           <p:nvPr/>
         </p:nvSpPr>
         <p:spPr>
           <a:xfrm>
             <a:off x="0" y="0"/>
-            <a:ext cx="163800" cy="5142960"/>
+            <a:ext cx="163080" cy="5142240"/>
           </a:xfrm>
           <a:prstGeom prst="rect">
             <a:avLst/>
@@ -4706,14 +5680,14 @@
       </p:sp>
       <p:sp>
         <p:nvSpPr>
-          <p:cNvPr id="131" name="Text 1"/>
+          <p:cNvPr id="137" name="Text 1"/>
           <p:cNvSpPr/>
           <p:nvPr/>
         </p:nvSpPr>
         <p:spPr>
           <a:xfrm>
             <a:off x="320040" y="128160"/>
-            <a:ext cx="8503200" cy="566280"/>
+            <a:ext cx="8502480" cy="565560"/>
           </a:xfrm>
           <a:prstGeom prst="rect">
             <a:avLst/>
@@ -4767,7 +5741,7 @@
       </p:sp>
       <p:sp>
         <p:nvSpPr>
-          <p:cNvPr id="132" name="Shape 2"/>
+          <p:cNvPr id="138" name="Shape 2"/>
           <p:cNvSpPr/>
           <p:nvPr/>
         </p:nvSpPr>
@@ -4811,7 +5785,7 @@
       </p:sp>
       <p:pic>
         <p:nvPicPr>
-          <p:cNvPr id="133" name=""/>
+          <p:cNvPr id="139" name=""/>
           <p:cNvPicPr/>
           <p:nvPr/>
         </p:nvPicPr>
@@ -4822,7 +5796,7 @@
         <p:spPr>
           <a:xfrm>
             <a:off x="288000" y="921240"/>
-            <a:ext cx="8601120" cy="3423960"/>
+            <a:ext cx="8600400" cy="3423240"/>
           </a:xfrm>
           <a:prstGeom prst="rect">
             <a:avLst/>
@@ -4872,14 +5846,14 @@
       </p:grpSpPr>
       <p:sp>
         <p:nvSpPr>
-          <p:cNvPr id="134" name="Shape 0"/>
+          <p:cNvPr id="140" name="Shape 0"/>
           <p:cNvSpPr/>
           <p:nvPr/>
         </p:nvSpPr>
         <p:spPr>
           <a:xfrm>
             <a:off x="0" y="0"/>
-            <a:ext cx="163800" cy="5142960"/>
+            <a:ext cx="163080" cy="5142240"/>
           </a:xfrm>
           <a:prstGeom prst="rect">
             <a:avLst/>
@@ -4921,14 +5895,14 @@
       </p:sp>
       <p:sp>
         <p:nvSpPr>
-          <p:cNvPr id="135" name="Text 1"/>
+          <p:cNvPr id="141" name="Text 1"/>
           <p:cNvSpPr/>
           <p:nvPr/>
         </p:nvSpPr>
         <p:spPr>
           <a:xfrm>
             <a:off x="320040" y="128160"/>
-            <a:ext cx="8503200" cy="566280"/>
+            <a:ext cx="8502480" cy="565560"/>
           </a:xfrm>
           <a:prstGeom prst="rect">
             <a:avLst/>
@@ -4982,7 +5956,7 @@
       </p:sp>
       <p:sp>
         <p:nvSpPr>
-          <p:cNvPr id="136" name="Shape 2"/>
+          <p:cNvPr id="142" name="Shape 2"/>
           <p:cNvSpPr/>
           <p:nvPr/>
         </p:nvSpPr>
@@ -5026,14 +6000,14 @@
       </p:sp>
       <p:sp>
         <p:nvSpPr>
-          <p:cNvPr id="137" name="Shape 3"/>
+          <p:cNvPr id="143" name="Shape 3"/>
           <p:cNvSpPr/>
           <p:nvPr/>
         </p:nvSpPr>
         <p:spPr>
           <a:xfrm>
             <a:off x="320040" y="4800600"/>
-            <a:ext cx="8503200" cy="182160"/>
+            <a:ext cx="8502480" cy="181440"/>
           </a:xfrm>
           <a:prstGeom prst="rect">
             <a:avLst/>
@@ -5082,14 +6056,14 @@
       </p:sp>
       <p:sp>
         <p:nvSpPr>
-          <p:cNvPr id="138" name="Text 4"/>
+          <p:cNvPr id="144" name="Text 4"/>
           <p:cNvSpPr/>
           <p:nvPr/>
         </p:nvSpPr>
         <p:spPr>
           <a:xfrm>
             <a:off x="320040" y="4773240"/>
-            <a:ext cx="8503200" cy="255240"/>
+            <a:ext cx="8502480" cy="254520"/>
           </a:xfrm>
           <a:prstGeom prst="rect">
             <a:avLst/>
@@ -5143,7 +6117,7 @@
       </p:sp>
       <p:pic>
         <p:nvPicPr>
-          <p:cNvPr id="139" name=""/>
+          <p:cNvPr id="145" name=""/>
           <p:cNvPicPr/>
           <p:nvPr/>
         </p:nvPicPr>
@@ -5154,7 +6128,7 @@
         <p:spPr>
           <a:xfrm>
             <a:off x="573480" y="867240"/>
-            <a:ext cx="8102520" cy="3887640"/>
+            <a:ext cx="8101800" cy="3886920"/>
           </a:xfrm>
           <a:prstGeom prst="rect">
             <a:avLst/>
@@ -5204,14 +6178,14 @@
       </p:grpSpPr>
       <p:sp>
         <p:nvSpPr>
-          <p:cNvPr id="140" name="Shape 0"/>
+          <p:cNvPr id="146" name="Shape 0"/>
           <p:cNvSpPr/>
           <p:nvPr/>
         </p:nvSpPr>
         <p:spPr>
           <a:xfrm>
             <a:off x="0" y="0"/>
-            <a:ext cx="163800" cy="5142960"/>
+            <a:ext cx="163080" cy="5142240"/>
           </a:xfrm>
           <a:prstGeom prst="rect">
             <a:avLst/>
@@ -5253,14 +6227,14 @@
       </p:sp>
       <p:sp>
         <p:nvSpPr>
-          <p:cNvPr id="141" name="Text 1"/>
+          <p:cNvPr id="147" name="Text 1"/>
           <p:cNvSpPr/>
           <p:nvPr/>
         </p:nvSpPr>
         <p:spPr>
           <a:xfrm>
             <a:off x="320040" y="128160"/>
-            <a:ext cx="8503200" cy="566280"/>
+            <a:ext cx="8502480" cy="565560"/>
           </a:xfrm>
           <a:prstGeom prst="rect">
             <a:avLst/>
@@ -5314,7 +6288,7 @@
       </p:sp>
       <p:sp>
         <p:nvSpPr>
-          <p:cNvPr id="142" name="Shape 2"/>
+          <p:cNvPr id="148" name="Shape 2"/>
           <p:cNvSpPr/>
           <p:nvPr/>
         </p:nvSpPr>
@@ -5358,7 +6332,7 @@
       </p:sp>
       <p:pic>
         <p:nvPicPr>
-          <p:cNvPr id="143" name=""/>
+          <p:cNvPr id="149" name=""/>
           <p:cNvPicPr/>
           <p:nvPr/>
         </p:nvPicPr>
@@ -5369,7 +6343,7 @@
         <p:spPr>
           <a:xfrm>
             <a:off x="396000" y="1026000"/>
-            <a:ext cx="8421120" cy="3358440"/>
+            <a:ext cx="8420400" cy="3357720"/>
           </a:xfrm>
           <a:prstGeom prst="rect">
             <a:avLst/>
@@ -5419,14 +6393,14 @@
       </p:grpSpPr>
       <p:sp>
         <p:nvSpPr>
-          <p:cNvPr id="144" name="Shape 0"/>
+          <p:cNvPr id="150" name="Shape 0"/>
           <p:cNvSpPr/>
           <p:nvPr/>
         </p:nvSpPr>
         <p:spPr>
           <a:xfrm>
             <a:off x="0" y="0"/>
-            <a:ext cx="163800" cy="5142960"/>
+            <a:ext cx="163080" cy="5142240"/>
           </a:xfrm>
           <a:prstGeom prst="rect">
             <a:avLst/>
@@ -5468,14 +6442,14 @@
       </p:sp>
       <p:sp>
         <p:nvSpPr>
-          <p:cNvPr id="145" name="Text 1"/>
+          <p:cNvPr id="151" name="Text 1"/>
           <p:cNvSpPr/>
           <p:nvPr/>
         </p:nvSpPr>
         <p:spPr>
           <a:xfrm>
             <a:off x="320040" y="128160"/>
-            <a:ext cx="8503200" cy="566280"/>
+            <a:ext cx="8502480" cy="565560"/>
           </a:xfrm>
           <a:prstGeom prst="rect">
             <a:avLst/>
@@ -5529,7 +6503,7 @@
       </p:sp>
       <p:sp>
         <p:nvSpPr>
-          <p:cNvPr id="146" name="Shape 2"/>
+          <p:cNvPr id="152" name="Shape 2"/>
           <p:cNvSpPr/>
           <p:nvPr/>
         </p:nvSpPr>
@@ -5573,14 +6547,14 @@
       </p:sp>
       <p:sp>
         <p:nvSpPr>
-          <p:cNvPr id="147" name="Text 4"/>
+          <p:cNvPr id="153" name="Text 4"/>
           <p:cNvSpPr/>
           <p:nvPr/>
         </p:nvSpPr>
         <p:spPr>
           <a:xfrm>
             <a:off x="216000" y="900000"/>
-            <a:ext cx="6659640" cy="2404080"/>
+            <a:ext cx="6658920" cy="2403360"/>
           </a:xfrm>
           <a:prstGeom prst="rect">
             <a:avLst/>
@@ -5784,14 +6758,14 @@
       </p:sp>
       <p:sp>
         <p:nvSpPr>
-          <p:cNvPr id="148" name="Shape 5"/>
+          <p:cNvPr id="154" name="Shape 5"/>
           <p:cNvSpPr/>
           <p:nvPr/>
         </p:nvSpPr>
         <p:spPr>
           <a:xfrm>
             <a:off x="5120640" y="804600"/>
-            <a:ext cx="3702600" cy="712440"/>
+            <a:ext cx="3701880" cy="711720"/>
           </a:xfrm>
           <a:prstGeom prst="rect">
             <a:avLst/>
@@ -5840,14 +6814,14 @@
       </p:sp>
       <p:sp>
         <p:nvSpPr>
-          <p:cNvPr id="149" name="Text 6"/>
+          <p:cNvPr id="155" name="Text 6"/>
           <p:cNvSpPr/>
           <p:nvPr/>
         </p:nvSpPr>
         <p:spPr>
           <a:xfrm>
             <a:off x="5257800" y="850320"/>
-            <a:ext cx="3428280" cy="227880"/>
+            <a:ext cx="3427560" cy="227160"/>
           </a:xfrm>
           <a:prstGeom prst="rect">
             <a:avLst/>
@@ -5901,14 +6875,14 @@
       </p:sp>
       <p:sp>
         <p:nvSpPr>
-          <p:cNvPr id="150" name="Text 7"/>
+          <p:cNvPr id="156" name="Text 7"/>
           <p:cNvSpPr/>
           <p:nvPr/>
         </p:nvSpPr>
         <p:spPr>
           <a:xfrm>
             <a:off x="5257800" y="1115640"/>
-            <a:ext cx="3428280" cy="365040"/>
+            <a:ext cx="3427560" cy="364320"/>
           </a:xfrm>
           <a:prstGeom prst="rect">
             <a:avLst/>
@@ -5992,14 +6966,14 @@
       </p:sp>
       <p:sp>
         <p:nvSpPr>
-          <p:cNvPr id="151" name="Shape 8"/>
+          <p:cNvPr id="157" name="Shape 8"/>
           <p:cNvSpPr/>
           <p:nvPr/>
         </p:nvSpPr>
         <p:spPr>
           <a:xfrm>
             <a:off x="5120640" y="1627560"/>
-            <a:ext cx="3702600" cy="712440"/>
+            <a:ext cx="3701880" cy="711720"/>
           </a:xfrm>
           <a:prstGeom prst="rect">
             <a:avLst/>
@@ -6048,14 +7022,14 @@
       </p:sp>
       <p:sp>
         <p:nvSpPr>
-          <p:cNvPr id="152" name="Text 9"/>
+          <p:cNvPr id="158" name="Text 9"/>
           <p:cNvSpPr/>
           <p:nvPr/>
         </p:nvSpPr>
         <p:spPr>
           <a:xfrm>
             <a:off x="5257800" y="1673280"/>
-            <a:ext cx="3428280" cy="227880"/>
+            <a:ext cx="3427560" cy="227160"/>
           </a:xfrm>
           <a:prstGeom prst="rect">
             <a:avLst/>
@@ -6109,14 +7083,14 @@
       </p:sp>
       <p:sp>
         <p:nvSpPr>
-          <p:cNvPr id="153" name="Text 10"/>
+          <p:cNvPr id="159" name="Text 10"/>
           <p:cNvSpPr/>
           <p:nvPr/>
         </p:nvSpPr>
         <p:spPr>
           <a:xfrm>
             <a:off x="5257800" y="1938600"/>
-            <a:ext cx="3428280" cy="365040"/>
+            <a:ext cx="3427560" cy="364320"/>
           </a:xfrm>
           <a:prstGeom prst="rect">
             <a:avLst/>
@@ -6170,14 +7144,14 @@
       </p:sp>
       <p:sp>
         <p:nvSpPr>
-          <p:cNvPr id="154" name="Shape 11"/>
+          <p:cNvPr id="160" name="Shape 11"/>
           <p:cNvSpPr/>
           <p:nvPr/>
         </p:nvSpPr>
         <p:spPr>
           <a:xfrm>
             <a:off x="5120640" y="2450520"/>
-            <a:ext cx="3702600" cy="712440"/>
+            <a:ext cx="3701880" cy="711720"/>
           </a:xfrm>
           <a:prstGeom prst="rect">
             <a:avLst/>
@@ -6226,14 +7200,14 @@
       </p:sp>
       <p:sp>
         <p:nvSpPr>
-          <p:cNvPr id="155" name="Text 12"/>
+          <p:cNvPr id="161" name="Text 12"/>
           <p:cNvSpPr/>
           <p:nvPr/>
         </p:nvSpPr>
         <p:spPr>
           <a:xfrm>
             <a:off x="5257800" y="2496240"/>
-            <a:ext cx="3428280" cy="227880"/>
+            <a:ext cx="3427560" cy="227160"/>
           </a:xfrm>
           <a:prstGeom prst="rect">
             <a:avLst/>
@@ -6287,14 +7261,14 @@
       </p:sp>
       <p:sp>
         <p:nvSpPr>
-          <p:cNvPr id="156" name="Text 13"/>
+          <p:cNvPr id="162" name="Text 13"/>
           <p:cNvSpPr/>
           <p:nvPr/>
         </p:nvSpPr>
         <p:spPr>
           <a:xfrm>
             <a:off x="5257800" y="2761560"/>
-            <a:ext cx="3428280" cy="365040"/>
+            <a:ext cx="3427560" cy="364320"/>
           </a:xfrm>
           <a:prstGeom prst="rect">
             <a:avLst/>
@@ -6348,14 +7322,14 @@
       </p:sp>
       <p:sp>
         <p:nvSpPr>
-          <p:cNvPr id="157" name="Shape 14"/>
+          <p:cNvPr id="163" name="Shape 14"/>
           <p:cNvSpPr/>
           <p:nvPr/>
         </p:nvSpPr>
         <p:spPr>
           <a:xfrm>
             <a:off x="5120640" y="3273480"/>
-            <a:ext cx="3702600" cy="712440"/>
+            <a:ext cx="3701880" cy="711720"/>
           </a:xfrm>
           <a:prstGeom prst="rect">
             <a:avLst/>
@@ -6404,14 +7378,14 @@
       </p:sp>
       <p:sp>
         <p:nvSpPr>
-          <p:cNvPr id="158" name="Text 15"/>
+          <p:cNvPr id="164" name="Text 15"/>
           <p:cNvSpPr/>
           <p:nvPr/>
         </p:nvSpPr>
         <p:spPr>
           <a:xfrm>
             <a:off x="5257800" y="3319200"/>
-            <a:ext cx="3428280" cy="227880"/>
+            <a:ext cx="3427560" cy="227160"/>
           </a:xfrm>
           <a:prstGeom prst="rect">
             <a:avLst/>
@@ -6465,14 +7439,14 @@
       </p:sp>
       <p:sp>
         <p:nvSpPr>
-          <p:cNvPr id="159" name="Text 16"/>
+          <p:cNvPr id="165" name="Text 16"/>
           <p:cNvSpPr/>
           <p:nvPr/>
         </p:nvSpPr>
         <p:spPr>
           <a:xfrm>
             <a:off x="5257800" y="3584520"/>
-            <a:ext cx="3428280" cy="365040"/>
+            <a:ext cx="3427560" cy="364320"/>
           </a:xfrm>
           <a:prstGeom prst="rect">
             <a:avLst/>
@@ -6556,14 +7530,14 @@
       </p:sp>
       <p:sp>
         <p:nvSpPr>
-          <p:cNvPr id="160" name="Shape 17"/>
+          <p:cNvPr id="166" name="Shape 17"/>
           <p:cNvSpPr/>
           <p:nvPr/>
         </p:nvSpPr>
         <p:spPr>
           <a:xfrm>
             <a:off x="320040" y="4074840"/>
-            <a:ext cx="8503200" cy="621000"/>
+            <a:ext cx="8502480" cy="620280"/>
           </a:xfrm>
           <a:prstGeom prst="rect">
             <a:avLst/>
@@ -6612,14 +7586,14 @@
       </p:sp>
       <p:sp>
         <p:nvSpPr>
-          <p:cNvPr id="161" name="Text 18"/>
+          <p:cNvPr id="167" name="Text 18"/>
           <p:cNvSpPr/>
           <p:nvPr/>
         </p:nvSpPr>
         <p:spPr>
           <a:xfrm>
             <a:off x="502920" y="4074840"/>
-            <a:ext cx="8320320" cy="621000"/>
+            <a:ext cx="8319600" cy="620280"/>
           </a:xfrm>
           <a:prstGeom prst="rect">
             <a:avLst/>
@@ -6710,14 +7684,14 @@
       </p:grpSpPr>
       <p:sp>
         <p:nvSpPr>
-          <p:cNvPr id="162" name="Shape 21"/>
+          <p:cNvPr id="168" name="Shape 21"/>
           <p:cNvSpPr/>
           <p:nvPr/>
         </p:nvSpPr>
         <p:spPr>
           <a:xfrm>
             <a:off x="0" y="0"/>
-            <a:ext cx="163800" cy="5142960"/>
+            <a:ext cx="163080" cy="5142240"/>
           </a:xfrm>
           <a:prstGeom prst="rect">
             <a:avLst/>
@@ -6752,20 +7726,21 @@
               <a:effectLst/>
               <a:uFillTx/>
               <a:latin typeface="Arial"/>
-            </a:endParaRPr>
-          </a:p>
-        </p:txBody>
-      </p:sp>
-      <p:sp>
-        <p:nvSpPr>
-          <p:cNvPr id="163" name="Text 23"/>
+              <a:ea typeface="DejaVu Sans"/>
+            </a:endParaRPr>
+          </a:p>
+        </p:txBody>
+      </p:sp>
+      <p:sp>
+        <p:nvSpPr>
+          <p:cNvPr id="169" name="Text 23"/>
           <p:cNvSpPr/>
           <p:nvPr/>
         </p:nvSpPr>
         <p:spPr>
           <a:xfrm>
             <a:off x="320040" y="128160"/>
-            <a:ext cx="8503200" cy="566280"/>
+            <a:ext cx="8502480" cy="565560"/>
           </a:xfrm>
           <a:prstGeom prst="rect">
             <a:avLst/>
@@ -6819,7 +7794,7 @@
       </p:sp>
       <p:sp>
         <p:nvSpPr>
-          <p:cNvPr id="164" name="Shape 22"/>
+          <p:cNvPr id="170" name="Shape 22"/>
           <p:cNvSpPr/>
           <p:nvPr/>
         </p:nvSpPr>
@@ -6831,7 +7806,7 @@
           <a:prstGeom prst="line">
             <a:avLst/>
           </a:prstGeom>
-          <a:ln w="17780">
+          <a:ln w="17640">
             <a:solidFill>
               <a:srgbClr val="2a9d8f"/>
             </a:solidFill>
@@ -6856,20 +7831,21 @@
               <a:effectLst/>
               <a:uFillTx/>
               <a:latin typeface="Arial"/>
-            </a:endParaRPr>
-          </a:p>
-        </p:txBody>
-      </p:sp>
-      <p:sp>
-        <p:nvSpPr>
-          <p:cNvPr id="165" name="Shape 23"/>
+              <a:ea typeface="DejaVu Sans"/>
+            </a:endParaRPr>
+          </a:p>
+        </p:txBody>
+      </p:sp>
+      <p:sp>
+        <p:nvSpPr>
+          <p:cNvPr id="171" name="Shape 23"/>
           <p:cNvSpPr/>
           <p:nvPr/>
         </p:nvSpPr>
         <p:spPr>
           <a:xfrm>
             <a:off x="320040" y="804600"/>
-            <a:ext cx="5074200" cy="2102400"/>
+            <a:ext cx="5073480" cy="2101680"/>
           </a:xfrm>
           <a:prstGeom prst="rect">
             <a:avLst/>
@@ -6881,7 +7857,7 @@
             <a:noFill/>
           </a:ln>
           <a:effectLst>
-            <a:outerShdw algn="bl" blurRad="88920" dir="8100000" dist="37674" kx="0" ky="0" rotWithShape="0" sx="100000" sy="100000">
+            <a:outerShdw blurRad="88920" dir="8100000" dist="37674" rotWithShape="0">
               <a:srgbClr val="000000">
                 <a:alpha val="17000"/>
               </a:srgbClr>
@@ -6911,20 +7887,21 @@
               <a:effectLst/>
               <a:uFillTx/>
               <a:latin typeface="Arial"/>
-            </a:endParaRPr>
-          </a:p>
-        </p:txBody>
-      </p:sp>
-      <p:sp>
-        <p:nvSpPr>
-          <p:cNvPr id="166" name="Text 24"/>
+              <a:ea typeface="DejaVu Sans"/>
+            </a:endParaRPr>
+          </a:p>
+        </p:txBody>
+      </p:sp>
+      <p:sp>
+        <p:nvSpPr>
+          <p:cNvPr id="172" name="Text 24"/>
           <p:cNvSpPr/>
           <p:nvPr/>
         </p:nvSpPr>
         <p:spPr>
           <a:xfrm>
             <a:off x="457200" y="850320"/>
-            <a:ext cx="4799880" cy="1992600"/>
+            <a:ext cx="4799160" cy="1991880"/>
           </a:xfrm>
           <a:prstGeom prst="rect">
             <a:avLst/>
@@ -7188,14 +8165,14 @@
       </p:sp>
       <p:sp>
         <p:nvSpPr>
-          <p:cNvPr id="167" name="Shape 24"/>
+          <p:cNvPr id="173" name="Shape 24"/>
           <p:cNvSpPr/>
           <p:nvPr/>
         </p:nvSpPr>
         <p:spPr>
           <a:xfrm>
             <a:off x="5559480" y="804600"/>
-            <a:ext cx="3263760" cy="657720"/>
+            <a:ext cx="3263040" cy="657000"/>
           </a:xfrm>
           <a:prstGeom prst="rect">
             <a:avLst/>
@@ -7207,7 +8184,7 @@
             <a:noFill/>
           </a:ln>
           <a:effectLst>
-            <a:outerShdw algn="bl" blurRad="88920" dir="8100000" dist="37674" kx="0" ky="0" rotWithShape="0" sx="100000" sy="100000">
+            <a:outerShdw blurRad="88920" dir="8100000" dist="37674" rotWithShape="0">
               <a:srgbClr val="000000">
                 <a:alpha val="17000"/>
               </a:srgbClr>
@@ -7237,20 +8214,21 @@
               <a:effectLst/>
               <a:uFillTx/>
               <a:latin typeface="Arial"/>
-            </a:endParaRPr>
-          </a:p>
-        </p:txBody>
-      </p:sp>
-      <p:sp>
-        <p:nvSpPr>
-          <p:cNvPr id="168" name="Text 25"/>
+              <a:ea typeface="DejaVu Sans"/>
+            </a:endParaRPr>
+          </a:p>
+        </p:txBody>
+      </p:sp>
+      <p:sp>
+        <p:nvSpPr>
+          <p:cNvPr id="174" name="Text 25"/>
           <p:cNvSpPr/>
           <p:nvPr/>
         </p:nvSpPr>
         <p:spPr>
           <a:xfrm>
             <a:off x="5687640" y="850320"/>
-            <a:ext cx="3016800" cy="200520"/>
+            <a:ext cx="3016080" cy="199800"/>
           </a:xfrm>
           <a:prstGeom prst="rect">
             <a:avLst/>
@@ -7304,14 +8282,14 @@
       </p:sp>
       <p:sp>
         <p:nvSpPr>
-          <p:cNvPr id="169" name="Text 26"/>
+          <p:cNvPr id="175" name="Text 26"/>
           <p:cNvSpPr/>
           <p:nvPr/>
         </p:nvSpPr>
         <p:spPr>
           <a:xfrm>
             <a:off x="5687640" y="1078920"/>
-            <a:ext cx="3016800" cy="346680"/>
+            <a:ext cx="3016080" cy="345960"/>
           </a:xfrm>
           <a:prstGeom prst="rect">
             <a:avLst/>
@@ -7395,14 +8373,14 @@
       </p:sp>
       <p:sp>
         <p:nvSpPr>
-          <p:cNvPr id="170" name="Shape 25"/>
+          <p:cNvPr id="176" name="Shape 25"/>
           <p:cNvSpPr/>
           <p:nvPr/>
         </p:nvSpPr>
         <p:spPr>
           <a:xfrm>
             <a:off x="5559480" y="1554480"/>
-            <a:ext cx="3263760" cy="657720"/>
+            <a:ext cx="3263040" cy="657000"/>
           </a:xfrm>
           <a:prstGeom prst="rect">
             <a:avLst/>
@@ -7414,7 +8392,7 @@
             <a:noFill/>
           </a:ln>
           <a:effectLst>
-            <a:outerShdw algn="bl" blurRad="88920" dir="8100000" dist="37674" kx="0" ky="0" rotWithShape="0" sx="100000" sy="100000">
+            <a:outerShdw blurRad="88920" dir="8100000" dist="37674" rotWithShape="0">
               <a:srgbClr val="000000">
                 <a:alpha val="17000"/>
               </a:srgbClr>
@@ -7444,20 +8422,21 @@
               <a:effectLst/>
               <a:uFillTx/>
               <a:latin typeface="Arial"/>
-            </a:endParaRPr>
-          </a:p>
-        </p:txBody>
-      </p:sp>
-      <p:sp>
-        <p:nvSpPr>
-          <p:cNvPr id="171" name="Text 27"/>
+              <a:ea typeface="DejaVu Sans"/>
+            </a:endParaRPr>
+          </a:p>
+        </p:txBody>
+      </p:sp>
+      <p:sp>
+        <p:nvSpPr>
+          <p:cNvPr id="177" name="Text 27"/>
           <p:cNvSpPr/>
           <p:nvPr/>
         </p:nvSpPr>
         <p:spPr>
           <a:xfrm>
             <a:off x="5687640" y="1600200"/>
-            <a:ext cx="3016800" cy="200520"/>
+            <a:ext cx="3016080" cy="199800"/>
           </a:xfrm>
           <a:prstGeom prst="rect">
             <a:avLst/>
@@ -7511,14 +8490,14 @@
       </p:sp>
       <p:sp>
         <p:nvSpPr>
-          <p:cNvPr id="172" name="Text 28"/>
+          <p:cNvPr id="178" name="Text 28"/>
           <p:cNvSpPr/>
           <p:nvPr/>
         </p:nvSpPr>
         <p:spPr>
           <a:xfrm>
             <a:off x="5687640" y="1828800"/>
-            <a:ext cx="3016800" cy="346680"/>
+            <a:ext cx="3016080" cy="345960"/>
           </a:xfrm>
           <a:prstGeom prst="rect">
             <a:avLst/>
@@ -7602,14 +8581,14 @@
       </p:sp>
       <p:sp>
         <p:nvSpPr>
-          <p:cNvPr id="173" name="Shape 26"/>
+          <p:cNvPr id="179" name="Shape 26"/>
           <p:cNvSpPr/>
           <p:nvPr/>
         </p:nvSpPr>
         <p:spPr>
           <a:xfrm>
             <a:off x="5559480" y="2304360"/>
-            <a:ext cx="3263760" cy="657720"/>
+            <a:ext cx="3263040" cy="657000"/>
           </a:xfrm>
           <a:prstGeom prst="rect">
             <a:avLst/>
@@ -7621,7 +8600,7 @@
             <a:noFill/>
           </a:ln>
           <a:effectLst>
-            <a:outerShdw algn="bl" blurRad="88920" dir="8100000" dist="37674" kx="0" ky="0" rotWithShape="0" sx="100000" sy="100000">
+            <a:outerShdw blurRad="88920" dir="8100000" dist="37674" rotWithShape="0">
               <a:srgbClr val="000000">
                 <a:alpha val="17000"/>
               </a:srgbClr>
@@ -7651,20 +8630,21 @@
               <a:effectLst/>
               <a:uFillTx/>
               <a:latin typeface="Arial"/>
-            </a:endParaRPr>
-          </a:p>
-        </p:txBody>
-      </p:sp>
-      <p:sp>
-        <p:nvSpPr>
-          <p:cNvPr id="174" name="Text 29"/>
+              <a:ea typeface="DejaVu Sans"/>
+            </a:endParaRPr>
+          </a:p>
+        </p:txBody>
+      </p:sp>
+      <p:sp>
+        <p:nvSpPr>
+          <p:cNvPr id="180" name="Text 29"/>
           <p:cNvSpPr/>
           <p:nvPr/>
         </p:nvSpPr>
         <p:spPr>
           <a:xfrm>
             <a:off x="5687640" y="2350080"/>
-            <a:ext cx="3016800" cy="200520"/>
+            <a:ext cx="3016080" cy="199800"/>
           </a:xfrm>
           <a:prstGeom prst="rect">
             <a:avLst/>
@@ -7718,14 +8698,14 @@
       </p:sp>
       <p:sp>
         <p:nvSpPr>
-          <p:cNvPr id="175" name="Text 30"/>
+          <p:cNvPr id="181" name="Text 30"/>
           <p:cNvSpPr/>
           <p:nvPr/>
         </p:nvSpPr>
         <p:spPr>
           <a:xfrm>
             <a:off x="5687640" y="2578680"/>
-            <a:ext cx="3016800" cy="346680"/>
+            <a:ext cx="3016080" cy="345960"/>
           </a:xfrm>
           <a:prstGeom prst="rect">
             <a:avLst/>
@@ -7809,14 +8789,14 @@
       </p:sp>
       <p:sp>
         <p:nvSpPr>
-          <p:cNvPr id="176" name="Shape 27"/>
+          <p:cNvPr id="182" name="Shape 27"/>
           <p:cNvSpPr/>
           <p:nvPr/>
         </p:nvSpPr>
         <p:spPr>
           <a:xfrm>
             <a:off x="5559480" y="3054240"/>
-            <a:ext cx="3263760" cy="657720"/>
+            <a:ext cx="3263040" cy="657000"/>
           </a:xfrm>
           <a:prstGeom prst="rect">
             <a:avLst/>
@@ -7828,7 +8808,7 @@
             <a:noFill/>
           </a:ln>
           <a:effectLst>
-            <a:outerShdw algn="bl" blurRad="88920" dir="8100000" dist="37674" kx="0" ky="0" rotWithShape="0" sx="100000" sy="100000">
+            <a:outerShdw blurRad="88920" dir="8100000" dist="37674" rotWithShape="0">
               <a:srgbClr val="000000">
                 <a:alpha val="17000"/>
               </a:srgbClr>
@@ -7858,20 +8838,21 @@
               <a:effectLst/>
               <a:uFillTx/>
               <a:latin typeface="Arial"/>
-            </a:endParaRPr>
-          </a:p>
-        </p:txBody>
-      </p:sp>
-      <p:sp>
-        <p:nvSpPr>
-          <p:cNvPr id="177" name="Text 31"/>
+              <a:ea typeface="DejaVu Sans"/>
+            </a:endParaRPr>
+          </a:p>
+        </p:txBody>
+      </p:sp>
+      <p:sp>
+        <p:nvSpPr>
+          <p:cNvPr id="183" name="Text 31"/>
           <p:cNvSpPr/>
           <p:nvPr/>
         </p:nvSpPr>
         <p:spPr>
           <a:xfrm>
             <a:off x="5687640" y="3099960"/>
-            <a:ext cx="3016800" cy="200520"/>
+            <a:ext cx="3016080" cy="199800"/>
           </a:xfrm>
           <a:prstGeom prst="rect">
             <a:avLst/>
@@ -7925,14 +8906,14 @@
       </p:sp>
       <p:sp>
         <p:nvSpPr>
-          <p:cNvPr id="178" name="Text 32"/>
+          <p:cNvPr id="184" name="Text 32"/>
           <p:cNvSpPr/>
           <p:nvPr/>
         </p:nvSpPr>
         <p:spPr>
           <a:xfrm>
             <a:off x="5687640" y="3328560"/>
-            <a:ext cx="3016800" cy="346680"/>
+            <a:ext cx="3016080" cy="345960"/>
           </a:xfrm>
           <a:prstGeom prst="rect">
             <a:avLst/>
@@ -8016,7 +8997,7 @@
       </p:sp>
       <p:graphicFrame>
         <p:nvGraphicFramePr>
-          <p:cNvPr id="179" name="Table 2"/>
+          <p:cNvPr id="185" name="Table 2"/>
           <p:cNvGraphicFramePr/>
           <p:nvPr/>
         </p:nvGraphicFramePr>
@@ -9104,14 +10085,14 @@
       </p:graphicFrame>
       <p:sp>
         <p:nvSpPr>
-          <p:cNvPr id="180" name="Shape 28"/>
+          <p:cNvPr id="186" name="Shape 28"/>
           <p:cNvSpPr/>
           <p:nvPr/>
         </p:nvSpPr>
         <p:spPr>
           <a:xfrm>
             <a:off x="320040" y="4370760"/>
-            <a:ext cx="8503200" cy="593640"/>
+            <a:ext cx="8502480" cy="592920"/>
           </a:xfrm>
           <a:prstGeom prst="rect">
             <a:avLst/>
@@ -9123,7 +10104,7 @@
             <a:noFill/>
           </a:ln>
           <a:effectLst>
-            <a:outerShdw algn="bl" blurRad="88920" dir="8100000" dist="37674" kx="0" ky="0" rotWithShape="0" sx="100000" sy="100000">
+            <a:outerShdw blurRad="88920" dir="8100000" dist="37674" rotWithShape="0">
               <a:srgbClr val="000000">
                 <a:alpha val="17000"/>
               </a:srgbClr>
@@ -9153,20 +10134,21 @@
               <a:effectLst/>
               <a:uFillTx/>
               <a:latin typeface="Arial"/>
-            </a:endParaRPr>
-          </a:p>
-        </p:txBody>
-      </p:sp>
-      <p:sp>
-        <p:nvSpPr>
-          <p:cNvPr id="181" name="Text 33"/>
+              <a:ea typeface="DejaVu Sans"/>
+            </a:endParaRPr>
+          </a:p>
+        </p:txBody>
+      </p:sp>
+      <p:sp>
+        <p:nvSpPr>
+          <p:cNvPr id="187" name="Text 33"/>
           <p:cNvSpPr/>
           <p:nvPr/>
         </p:nvSpPr>
         <p:spPr>
           <a:xfrm>
             <a:off x="475560" y="4370760"/>
-            <a:ext cx="8320320" cy="593640"/>
+            <a:ext cx="8319600" cy="592920"/>
           </a:xfrm>
           <a:prstGeom prst="rect">
             <a:avLst/>
@@ -9257,14 +10239,14 @@
       </p:grpSpPr>
       <p:sp>
         <p:nvSpPr>
-          <p:cNvPr id="182" name="Shape 0"/>
+          <p:cNvPr id="188" name="Shape 0"/>
           <p:cNvSpPr/>
           <p:nvPr/>
         </p:nvSpPr>
         <p:spPr>
           <a:xfrm>
             <a:off x="0" y="0"/>
-            <a:ext cx="163800" cy="5142960"/>
+            <a:ext cx="163080" cy="5142240"/>
           </a:xfrm>
           <a:prstGeom prst="rect">
             <a:avLst/>
@@ -9306,14 +10288,14 @@
       </p:sp>
       <p:sp>
         <p:nvSpPr>
-          <p:cNvPr id="183" name="Text 1"/>
+          <p:cNvPr id="189" name="Text 1"/>
           <p:cNvSpPr/>
           <p:nvPr/>
         </p:nvSpPr>
         <p:spPr>
           <a:xfrm>
             <a:off x="320040" y="128160"/>
-            <a:ext cx="8503200" cy="566280"/>
+            <a:ext cx="8502480" cy="565560"/>
           </a:xfrm>
           <a:prstGeom prst="rect">
             <a:avLst/>
@@ -9367,7 +10349,7 @@
       </p:sp>
       <p:sp>
         <p:nvSpPr>
-          <p:cNvPr id="184" name="Shape 2"/>
+          <p:cNvPr id="190" name="Shape 2"/>
           <p:cNvSpPr/>
           <p:nvPr/>
         </p:nvSpPr>
@@ -9411,14 +10393,14 @@
       </p:sp>
       <p:sp>
         <p:nvSpPr>
-          <p:cNvPr id="185" name="Shape 3"/>
+          <p:cNvPr id="191" name="Shape 3"/>
           <p:cNvSpPr/>
           <p:nvPr/>
         </p:nvSpPr>
         <p:spPr>
           <a:xfrm>
             <a:off x="320040" y="868680"/>
-            <a:ext cx="8503200" cy="712440"/>
+            <a:ext cx="8502480" cy="711720"/>
           </a:xfrm>
           <a:prstGeom prst="rect">
             <a:avLst/>
@@ -9467,14 +10449,14 @@
       </p:sp>
       <p:sp>
         <p:nvSpPr>
-          <p:cNvPr id="186" name="Shape 4"/>
+          <p:cNvPr id="192" name="Shape 4"/>
           <p:cNvSpPr/>
           <p:nvPr/>
         </p:nvSpPr>
         <p:spPr>
           <a:xfrm>
             <a:off x="320040" y="868680"/>
-            <a:ext cx="54000" cy="712440"/>
+            <a:ext cx="53280" cy="711720"/>
           </a:xfrm>
           <a:prstGeom prst="rect">
             <a:avLst/>
@@ -9516,14 +10498,14 @@
       </p:sp>
       <p:sp>
         <p:nvSpPr>
-          <p:cNvPr id="187" name="Text 5"/>
+          <p:cNvPr id="193" name="Text 5"/>
           <p:cNvSpPr/>
           <p:nvPr/>
         </p:nvSpPr>
         <p:spPr>
           <a:xfrm>
             <a:off x="530280" y="923400"/>
-            <a:ext cx="1370880" cy="227880"/>
+            <a:ext cx="1370160" cy="227160"/>
           </a:xfrm>
           <a:prstGeom prst="rect">
             <a:avLst/>
@@ -9577,14 +10559,14 @@
       </p:sp>
       <p:sp>
         <p:nvSpPr>
-          <p:cNvPr id="188" name="Text 6"/>
+          <p:cNvPr id="194" name="Text 6"/>
           <p:cNvSpPr/>
           <p:nvPr/>
         </p:nvSpPr>
         <p:spPr>
           <a:xfrm>
             <a:off x="530280" y="1179720"/>
-            <a:ext cx="8183160" cy="346680"/>
+            <a:ext cx="8182440" cy="345960"/>
           </a:xfrm>
           <a:prstGeom prst="rect">
             <a:avLst/>
@@ -9638,14 +10620,14 @@
       </p:sp>
       <p:sp>
         <p:nvSpPr>
-          <p:cNvPr id="189" name="Shape 7"/>
+          <p:cNvPr id="195" name="Shape 7"/>
           <p:cNvSpPr/>
           <p:nvPr/>
         </p:nvSpPr>
         <p:spPr>
           <a:xfrm>
             <a:off x="320040" y="1691640"/>
-            <a:ext cx="8503200" cy="712440"/>
+            <a:ext cx="8502480" cy="711720"/>
           </a:xfrm>
           <a:prstGeom prst="rect">
             <a:avLst/>
@@ -9694,14 +10676,14 @@
       </p:sp>
       <p:sp>
         <p:nvSpPr>
-          <p:cNvPr id="190" name="Shape 8"/>
+          <p:cNvPr id="196" name="Shape 8"/>
           <p:cNvSpPr/>
           <p:nvPr/>
         </p:nvSpPr>
         <p:spPr>
           <a:xfrm>
             <a:off x="320040" y="1691640"/>
-            <a:ext cx="54000" cy="712440"/>
+            <a:ext cx="53280" cy="711720"/>
           </a:xfrm>
           <a:prstGeom prst="rect">
             <a:avLst/>
@@ -9743,14 +10725,14 @@
       </p:sp>
       <p:sp>
         <p:nvSpPr>
-          <p:cNvPr id="191" name="Text 9"/>
+          <p:cNvPr id="197" name="Text 9"/>
           <p:cNvSpPr/>
           <p:nvPr/>
         </p:nvSpPr>
         <p:spPr>
           <a:xfrm>
             <a:off x="530280" y="1746360"/>
-            <a:ext cx="1370880" cy="227880"/>
+            <a:ext cx="1370160" cy="227160"/>
           </a:xfrm>
           <a:prstGeom prst="rect">
             <a:avLst/>
@@ -9804,14 +10786,14 @@
       </p:sp>
       <p:sp>
         <p:nvSpPr>
-          <p:cNvPr id="192" name="Text 10"/>
+          <p:cNvPr id="198" name="Text 10"/>
           <p:cNvSpPr/>
           <p:nvPr/>
         </p:nvSpPr>
         <p:spPr>
           <a:xfrm>
             <a:off x="530280" y="2002680"/>
-            <a:ext cx="8183160" cy="346680"/>
+            <a:ext cx="8182440" cy="345960"/>
           </a:xfrm>
           <a:prstGeom prst="rect">
             <a:avLst/>
@@ -9865,14 +10847,14 @@
       </p:sp>
       <p:sp>
         <p:nvSpPr>
-          <p:cNvPr id="193" name="Shape 11"/>
+          <p:cNvPr id="199" name="Shape 11"/>
           <p:cNvSpPr/>
           <p:nvPr/>
         </p:nvSpPr>
         <p:spPr>
           <a:xfrm>
             <a:off x="320040" y="2514600"/>
-            <a:ext cx="8503200" cy="712440"/>
+            <a:ext cx="8502480" cy="711720"/>
           </a:xfrm>
           <a:prstGeom prst="rect">
             <a:avLst/>
@@ -9921,14 +10903,14 @@
       </p:sp>
       <p:sp>
         <p:nvSpPr>
-          <p:cNvPr id="194" name="Shape 12"/>
+          <p:cNvPr id="200" name="Shape 12"/>
           <p:cNvSpPr/>
           <p:nvPr/>
         </p:nvSpPr>
         <p:spPr>
           <a:xfrm>
             <a:off x="320040" y="2514600"/>
-            <a:ext cx="54000" cy="712440"/>
+            <a:ext cx="53280" cy="711720"/>
           </a:xfrm>
           <a:prstGeom prst="rect">
             <a:avLst/>
@@ -9970,14 +10952,14 @@
       </p:sp>
       <p:sp>
         <p:nvSpPr>
-          <p:cNvPr id="195" name="Text 13"/>
+          <p:cNvPr id="201" name="Text 13"/>
           <p:cNvSpPr/>
           <p:nvPr/>
         </p:nvSpPr>
         <p:spPr>
           <a:xfrm>
             <a:off x="530280" y="2569320"/>
-            <a:ext cx="1370880" cy="227880"/>
+            <a:ext cx="1370160" cy="227160"/>
           </a:xfrm>
           <a:prstGeom prst="rect">
             <a:avLst/>
@@ -10031,14 +11013,14 @@
       </p:sp>
       <p:sp>
         <p:nvSpPr>
-          <p:cNvPr id="196" name="Text 14"/>
+          <p:cNvPr id="202" name="Text 14"/>
           <p:cNvSpPr/>
           <p:nvPr/>
         </p:nvSpPr>
         <p:spPr>
           <a:xfrm>
             <a:off x="530280" y="2825640"/>
-            <a:ext cx="8183160" cy="346680"/>
+            <a:ext cx="8182440" cy="345960"/>
           </a:xfrm>
           <a:prstGeom prst="rect">
             <a:avLst/>
@@ -10092,14 +11074,14 @@
       </p:sp>
       <p:sp>
         <p:nvSpPr>
-          <p:cNvPr id="197" name="Shape 15"/>
+          <p:cNvPr id="203" name="Shape 15"/>
           <p:cNvSpPr/>
           <p:nvPr/>
         </p:nvSpPr>
         <p:spPr>
           <a:xfrm>
             <a:off x="320040" y="3337560"/>
-            <a:ext cx="8503200" cy="712440"/>
+            <a:ext cx="8502480" cy="711720"/>
           </a:xfrm>
           <a:prstGeom prst="rect">
             <a:avLst/>
@@ -10148,14 +11130,14 @@
       </p:sp>
       <p:sp>
         <p:nvSpPr>
-          <p:cNvPr id="198" name="Shape 16"/>
+          <p:cNvPr id="204" name="Shape 16"/>
           <p:cNvSpPr/>
           <p:nvPr/>
         </p:nvSpPr>
         <p:spPr>
           <a:xfrm>
             <a:off x="320040" y="3337560"/>
-            <a:ext cx="54000" cy="712440"/>
+            <a:ext cx="53280" cy="711720"/>
           </a:xfrm>
           <a:prstGeom prst="rect">
             <a:avLst/>
@@ -10197,14 +11179,14 @@
       </p:sp>
       <p:sp>
         <p:nvSpPr>
-          <p:cNvPr id="199" name="Text 17"/>
+          <p:cNvPr id="205" name="Text 17"/>
           <p:cNvSpPr/>
           <p:nvPr/>
         </p:nvSpPr>
         <p:spPr>
           <a:xfrm>
             <a:off x="530280" y="3392280"/>
-            <a:ext cx="1370880" cy="227880"/>
+            <a:ext cx="1370160" cy="227160"/>
           </a:xfrm>
           <a:prstGeom prst="rect">
             <a:avLst/>
@@ -10258,14 +11240,14 @@
       </p:sp>
       <p:sp>
         <p:nvSpPr>
-          <p:cNvPr id="200" name="Text 18"/>
+          <p:cNvPr id="206" name="Text 18"/>
           <p:cNvSpPr/>
           <p:nvPr/>
         </p:nvSpPr>
         <p:spPr>
           <a:xfrm>
             <a:off x="530280" y="3648600"/>
-            <a:ext cx="8183160" cy="346680"/>
+            <a:ext cx="8182440" cy="345960"/>
           </a:xfrm>
           <a:prstGeom prst="rect">
             <a:avLst/>
@@ -10319,14 +11301,14 @@
       </p:sp>
       <p:sp>
         <p:nvSpPr>
-          <p:cNvPr id="201" name="Shape 19"/>
+          <p:cNvPr id="207" name="Shape 19"/>
           <p:cNvSpPr/>
           <p:nvPr/>
         </p:nvSpPr>
         <p:spPr>
           <a:xfrm>
             <a:off x="320040" y="4160520"/>
-            <a:ext cx="8503200" cy="712440"/>
+            <a:ext cx="8502480" cy="711720"/>
           </a:xfrm>
           <a:prstGeom prst="rect">
             <a:avLst/>
@@ -10375,14 +11357,14 @@
       </p:sp>
       <p:sp>
         <p:nvSpPr>
-          <p:cNvPr id="202" name="Shape 20"/>
+          <p:cNvPr id="208" name="Shape 20"/>
           <p:cNvSpPr/>
           <p:nvPr/>
         </p:nvSpPr>
         <p:spPr>
           <a:xfrm>
             <a:off x="320040" y="4160520"/>
-            <a:ext cx="54000" cy="712440"/>
+            <a:ext cx="53280" cy="711720"/>
           </a:xfrm>
           <a:prstGeom prst="rect">
             <a:avLst/>
@@ -10424,14 +11406,14 @@
       </p:sp>
       <p:sp>
         <p:nvSpPr>
-          <p:cNvPr id="203" name="Text 21"/>
+          <p:cNvPr id="209" name="Text 21"/>
           <p:cNvSpPr/>
           <p:nvPr/>
         </p:nvSpPr>
         <p:spPr>
           <a:xfrm>
             <a:off x="530280" y="4215240"/>
-            <a:ext cx="1370880" cy="227880"/>
+            <a:ext cx="1370160" cy="227160"/>
           </a:xfrm>
           <a:prstGeom prst="rect">
             <a:avLst/>
@@ -10485,14 +11467,14 @@
       </p:sp>
       <p:sp>
         <p:nvSpPr>
-          <p:cNvPr id="204" name="Text 22"/>
+          <p:cNvPr id="210" name="Text 22"/>
           <p:cNvSpPr/>
           <p:nvPr/>
         </p:nvSpPr>
         <p:spPr>
           <a:xfrm>
             <a:off x="530280" y="4471560"/>
-            <a:ext cx="8183160" cy="346680"/>
+            <a:ext cx="8182440" cy="345960"/>
           </a:xfrm>
           <a:prstGeom prst="rect">
             <a:avLst/>
@@ -10583,14 +11565,14 @@
       </p:grpSpPr>
       <p:sp>
         <p:nvSpPr>
-          <p:cNvPr id="24" name="Shape 0"/>
+          <p:cNvPr id="30" name="Shape 0"/>
           <p:cNvSpPr/>
           <p:nvPr/>
         </p:nvSpPr>
         <p:spPr>
           <a:xfrm>
             <a:off x="0" y="0"/>
-            <a:ext cx="163800" cy="5142960"/>
+            <a:ext cx="163080" cy="5142240"/>
           </a:xfrm>
           <a:prstGeom prst="rect">
             <a:avLst/>
@@ -10632,14 +11614,14 @@
       </p:sp>
       <p:sp>
         <p:nvSpPr>
-          <p:cNvPr id="25" name="Text 1"/>
+          <p:cNvPr id="31" name="Text 1"/>
           <p:cNvSpPr/>
           <p:nvPr/>
         </p:nvSpPr>
         <p:spPr>
           <a:xfrm>
             <a:off x="320040" y="128160"/>
-            <a:ext cx="8503200" cy="566280"/>
+            <a:ext cx="8502480" cy="565560"/>
           </a:xfrm>
           <a:prstGeom prst="rect">
             <a:avLst/>
@@ -10693,7 +11675,7 @@
       </p:sp>
       <p:sp>
         <p:nvSpPr>
-          <p:cNvPr id="26" name="Shape 2"/>
+          <p:cNvPr id="32" name="Shape 2"/>
           <p:cNvSpPr/>
           <p:nvPr/>
         </p:nvSpPr>
@@ -10737,14 +11719,14 @@
       </p:sp>
       <p:sp>
         <p:nvSpPr>
-          <p:cNvPr id="27" name="Shape 3"/>
+          <p:cNvPr id="33" name="Shape 3"/>
           <p:cNvSpPr/>
           <p:nvPr/>
         </p:nvSpPr>
         <p:spPr>
           <a:xfrm>
             <a:off x="320040" y="914400"/>
-            <a:ext cx="438120" cy="438120"/>
+            <a:ext cx="437400" cy="437400"/>
           </a:xfrm>
           <a:prstGeom prst="ellipse">
             <a:avLst/>
@@ -10786,14 +11768,14 @@
       </p:sp>
       <p:sp>
         <p:nvSpPr>
-          <p:cNvPr id="28" name="Text 4"/>
+          <p:cNvPr id="34" name="Text 4"/>
           <p:cNvSpPr/>
           <p:nvPr/>
         </p:nvSpPr>
         <p:spPr>
           <a:xfrm>
             <a:off x="320040" y="914400"/>
-            <a:ext cx="438120" cy="438120"/>
+            <a:ext cx="437400" cy="437400"/>
           </a:xfrm>
           <a:prstGeom prst="rect">
             <a:avLst/>
@@ -10847,14 +11829,14 @@
       </p:sp>
       <p:sp>
         <p:nvSpPr>
-          <p:cNvPr id="29" name="Text 5"/>
+          <p:cNvPr id="35" name="Text 5"/>
           <p:cNvSpPr/>
           <p:nvPr/>
         </p:nvSpPr>
         <p:spPr>
           <a:xfrm>
             <a:off x="887040" y="905400"/>
-            <a:ext cx="7908840" cy="236880"/>
+            <a:ext cx="7908120" cy="236160"/>
           </a:xfrm>
           <a:prstGeom prst="rect">
             <a:avLst/>
@@ -10908,14 +11890,14 @@
       </p:sp>
       <p:sp>
         <p:nvSpPr>
-          <p:cNvPr id="30" name="Text 6"/>
+          <p:cNvPr id="36" name="Text 6"/>
           <p:cNvSpPr/>
           <p:nvPr/>
         </p:nvSpPr>
         <p:spPr>
           <a:xfrm>
             <a:off x="887040" y="1161360"/>
-            <a:ext cx="7908840" cy="383400"/>
+            <a:ext cx="7908120" cy="382680"/>
           </a:xfrm>
           <a:prstGeom prst="rect">
             <a:avLst/>
@@ -10969,14 +11951,14 @@
       </p:sp>
       <p:sp>
         <p:nvSpPr>
-          <p:cNvPr id="31" name="Shape 7"/>
+          <p:cNvPr id="37" name="Shape 7"/>
           <p:cNvSpPr/>
           <p:nvPr/>
         </p:nvSpPr>
         <p:spPr>
           <a:xfrm>
             <a:off x="320040" y="1710000"/>
-            <a:ext cx="438120" cy="438120"/>
+            <a:ext cx="437400" cy="437400"/>
           </a:xfrm>
           <a:prstGeom prst="ellipse">
             <a:avLst/>
@@ -11018,14 +12000,14 @@
       </p:sp>
       <p:sp>
         <p:nvSpPr>
-          <p:cNvPr id="32" name="Text 8"/>
+          <p:cNvPr id="38" name="Text 8"/>
           <p:cNvSpPr/>
           <p:nvPr/>
         </p:nvSpPr>
         <p:spPr>
           <a:xfrm>
             <a:off x="320040" y="1710000"/>
-            <a:ext cx="438120" cy="438120"/>
+            <a:ext cx="437400" cy="437400"/>
           </a:xfrm>
           <a:prstGeom prst="rect">
             <a:avLst/>
@@ -11079,14 +12061,14 @@
       </p:sp>
       <p:sp>
         <p:nvSpPr>
-          <p:cNvPr id="33" name="Text 9"/>
+          <p:cNvPr id="39" name="Text 9"/>
           <p:cNvSpPr/>
           <p:nvPr/>
         </p:nvSpPr>
         <p:spPr>
           <a:xfrm>
             <a:off x="887040" y="1700640"/>
-            <a:ext cx="7908840" cy="236880"/>
+            <a:ext cx="7908120" cy="236160"/>
           </a:xfrm>
           <a:prstGeom prst="rect">
             <a:avLst/>
@@ -11140,14 +12122,14 @@
       </p:sp>
       <p:sp>
         <p:nvSpPr>
-          <p:cNvPr id="34" name="Text 10"/>
+          <p:cNvPr id="40" name="Text 10"/>
           <p:cNvSpPr/>
           <p:nvPr/>
         </p:nvSpPr>
         <p:spPr>
           <a:xfrm>
             <a:off x="887040" y="1956960"/>
-            <a:ext cx="7908840" cy="383400"/>
+            <a:ext cx="7908120" cy="382680"/>
           </a:xfrm>
           <a:prstGeom prst="rect">
             <a:avLst/>
@@ -11201,14 +12183,14 @@
       </p:sp>
       <p:sp>
         <p:nvSpPr>
-          <p:cNvPr id="35" name="Shape 11"/>
+          <p:cNvPr id="41" name="Shape 11"/>
           <p:cNvSpPr/>
           <p:nvPr/>
         </p:nvSpPr>
         <p:spPr>
           <a:xfrm>
             <a:off x="320040" y="2505600"/>
-            <a:ext cx="438120" cy="438120"/>
+            <a:ext cx="437400" cy="437400"/>
           </a:xfrm>
           <a:prstGeom prst="ellipse">
             <a:avLst/>
@@ -11250,14 +12232,14 @@
       </p:sp>
       <p:sp>
         <p:nvSpPr>
-          <p:cNvPr id="36" name="Text 12"/>
+          <p:cNvPr id="42" name="Text 12"/>
           <p:cNvSpPr/>
           <p:nvPr/>
         </p:nvSpPr>
         <p:spPr>
           <a:xfrm>
             <a:off x="320040" y="2505600"/>
-            <a:ext cx="438120" cy="438120"/>
+            <a:ext cx="437400" cy="437400"/>
           </a:xfrm>
           <a:prstGeom prst="rect">
             <a:avLst/>
@@ -11311,14 +12293,14 @@
       </p:sp>
       <p:sp>
         <p:nvSpPr>
-          <p:cNvPr id="37" name="Text 13"/>
+          <p:cNvPr id="43" name="Text 13"/>
           <p:cNvSpPr/>
           <p:nvPr/>
         </p:nvSpPr>
         <p:spPr>
           <a:xfrm>
             <a:off x="887040" y="2496240"/>
-            <a:ext cx="7908840" cy="236880"/>
+            <a:ext cx="7908120" cy="236160"/>
           </a:xfrm>
           <a:prstGeom prst="rect">
             <a:avLst/>
@@ -11372,14 +12354,14 @@
       </p:sp>
       <p:sp>
         <p:nvSpPr>
-          <p:cNvPr id="38" name="Text 14"/>
+          <p:cNvPr id="44" name="Text 14"/>
           <p:cNvSpPr/>
           <p:nvPr/>
         </p:nvSpPr>
         <p:spPr>
           <a:xfrm>
             <a:off x="887040" y="2752200"/>
-            <a:ext cx="7908840" cy="383400"/>
+            <a:ext cx="7908120" cy="382680"/>
           </a:xfrm>
           <a:prstGeom prst="rect">
             <a:avLst/>
@@ -11433,14 +12415,14 @@
       </p:sp>
       <p:sp>
         <p:nvSpPr>
-          <p:cNvPr id="39" name="Shape 15"/>
+          <p:cNvPr id="45" name="Shape 15"/>
           <p:cNvSpPr/>
           <p:nvPr/>
         </p:nvSpPr>
         <p:spPr>
           <a:xfrm>
             <a:off x="320040" y="3300840"/>
-            <a:ext cx="438120" cy="438120"/>
+            <a:ext cx="437400" cy="437400"/>
           </a:xfrm>
           <a:prstGeom prst="ellipse">
             <a:avLst/>
@@ -11482,14 +12464,14 @@
       </p:sp>
       <p:sp>
         <p:nvSpPr>
-          <p:cNvPr id="40" name="Text 16"/>
+          <p:cNvPr id="46" name="Text 16"/>
           <p:cNvSpPr/>
           <p:nvPr/>
         </p:nvSpPr>
         <p:spPr>
           <a:xfrm>
             <a:off x="320040" y="3300840"/>
-            <a:ext cx="438120" cy="438120"/>
+            <a:ext cx="437400" cy="437400"/>
           </a:xfrm>
           <a:prstGeom prst="rect">
             <a:avLst/>
@@ -11543,14 +12525,14 @@
       </p:sp>
       <p:sp>
         <p:nvSpPr>
-          <p:cNvPr id="41" name="Text 17"/>
+          <p:cNvPr id="47" name="Text 17"/>
           <p:cNvSpPr/>
           <p:nvPr/>
         </p:nvSpPr>
         <p:spPr>
           <a:xfrm>
             <a:off x="887040" y="3291840"/>
-            <a:ext cx="7908840" cy="236880"/>
+            <a:ext cx="7908120" cy="236160"/>
           </a:xfrm>
           <a:prstGeom prst="rect">
             <a:avLst/>
@@ -11604,14 +12586,14 @@
       </p:sp>
       <p:sp>
         <p:nvSpPr>
-          <p:cNvPr id="42" name="Text 18"/>
+          <p:cNvPr id="48" name="Text 18"/>
           <p:cNvSpPr/>
           <p:nvPr/>
         </p:nvSpPr>
         <p:spPr>
           <a:xfrm>
             <a:off x="887040" y="3547800"/>
-            <a:ext cx="7908840" cy="383400"/>
+            <a:ext cx="7908120" cy="382680"/>
           </a:xfrm>
           <a:prstGeom prst="rect">
             <a:avLst/>
@@ -11665,14 +12647,14 @@
       </p:sp>
       <p:sp>
         <p:nvSpPr>
-          <p:cNvPr id="43" name="Shape 19"/>
+          <p:cNvPr id="49" name="Shape 19"/>
           <p:cNvSpPr/>
           <p:nvPr/>
         </p:nvSpPr>
         <p:spPr>
           <a:xfrm>
             <a:off x="320040" y="4096440"/>
-            <a:ext cx="438120" cy="438120"/>
+            <a:ext cx="437400" cy="437400"/>
           </a:xfrm>
           <a:prstGeom prst="ellipse">
             <a:avLst/>
@@ -11714,14 +12696,14 @@
       </p:sp>
       <p:sp>
         <p:nvSpPr>
-          <p:cNvPr id="44" name="Text 20"/>
+          <p:cNvPr id="50" name="Text 20"/>
           <p:cNvSpPr/>
           <p:nvPr/>
         </p:nvSpPr>
         <p:spPr>
           <a:xfrm>
             <a:off x="320040" y="4096440"/>
-            <a:ext cx="438120" cy="438120"/>
+            <a:ext cx="437400" cy="437400"/>
           </a:xfrm>
           <a:prstGeom prst="rect">
             <a:avLst/>
@@ -11775,14 +12757,14 @@
       </p:sp>
       <p:sp>
         <p:nvSpPr>
-          <p:cNvPr id="45" name="Text 21"/>
+          <p:cNvPr id="51" name="Text 21"/>
           <p:cNvSpPr/>
           <p:nvPr/>
         </p:nvSpPr>
         <p:spPr>
           <a:xfrm>
             <a:off x="887040" y="4087440"/>
-            <a:ext cx="7908840" cy="236880"/>
+            <a:ext cx="7908120" cy="236160"/>
           </a:xfrm>
           <a:prstGeom prst="rect">
             <a:avLst/>
@@ -11836,14 +12818,14 @@
       </p:sp>
       <p:sp>
         <p:nvSpPr>
-          <p:cNvPr id="46" name="Text 22"/>
+          <p:cNvPr id="52" name="Text 22"/>
           <p:cNvSpPr/>
           <p:nvPr/>
         </p:nvSpPr>
         <p:spPr>
           <a:xfrm>
             <a:off x="887040" y="4343400"/>
-            <a:ext cx="7908840" cy="383400"/>
+            <a:ext cx="7908120" cy="382680"/>
           </a:xfrm>
           <a:prstGeom prst="rect">
             <a:avLst/>
@@ -11934,14 +12916,14 @@
       </p:grpSpPr>
       <p:sp>
         <p:nvSpPr>
-          <p:cNvPr id="47" name="Shape 0"/>
+          <p:cNvPr id="53" name="Shape 0"/>
           <p:cNvSpPr/>
           <p:nvPr/>
         </p:nvSpPr>
         <p:spPr>
           <a:xfrm>
             <a:off x="0" y="0"/>
-            <a:ext cx="163800" cy="5142960"/>
+            <a:ext cx="163080" cy="5142240"/>
           </a:xfrm>
           <a:prstGeom prst="rect">
             <a:avLst/>
@@ -11983,14 +12965,14 @@
       </p:sp>
       <p:sp>
         <p:nvSpPr>
-          <p:cNvPr id="48" name="Text 1"/>
+          <p:cNvPr id="54" name="Text 1"/>
           <p:cNvSpPr/>
           <p:nvPr/>
         </p:nvSpPr>
         <p:spPr>
           <a:xfrm>
             <a:off x="320040" y="128160"/>
-            <a:ext cx="8503200" cy="566280"/>
+            <a:ext cx="8502480" cy="565560"/>
           </a:xfrm>
           <a:prstGeom prst="rect">
             <a:avLst/>
@@ -12044,7 +13026,7 @@
       </p:sp>
       <p:sp>
         <p:nvSpPr>
-          <p:cNvPr id="49" name="Shape 2"/>
+          <p:cNvPr id="55" name="Shape 2"/>
           <p:cNvSpPr/>
           <p:nvPr/>
         </p:nvSpPr>
@@ -12088,14 +13070,14 @@
       </p:sp>
       <p:sp>
         <p:nvSpPr>
-          <p:cNvPr id="50" name="Shape 3"/>
+          <p:cNvPr id="56" name="Shape 3"/>
           <p:cNvSpPr/>
           <p:nvPr/>
         </p:nvSpPr>
         <p:spPr>
           <a:xfrm>
             <a:off x="320040" y="822960"/>
-            <a:ext cx="4114080" cy="1919520"/>
+            <a:ext cx="4113360" cy="1918800"/>
           </a:xfrm>
           <a:prstGeom prst="rect">
             <a:avLst/>
@@ -12144,14 +13126,14 @@
       </p:sp>
       <p:sp>
         <p:nvSpPr>
-          <p:cNvPr id="51" name="Shape 4"/>
+          <p:cNvPr id="57" name="Shape 4"/>
           <p:cNvSpPr/>
           <p:nvPr/>
         </p:nvSpPr>
         <p:spPr>
           <a:xfrm>
             <a:off x="475560" y="887040"/>
-            <a:ext cx="438120" cy="438120"/>
+            <a:ext cx="437400" cy="437400"/>
           </a:xfrm>
           <a:prstGeom prst="ellipse">
             <a:avLst/>
@@ -12193,14 +13175,14 @@
       </p:sp>
       <p:sp>
         <p:nvSpPr>
-          <p:cNvPr id="52" name="Text 5"/>
+          <p:cNvPr id="58" name="Text 5"/>
           <p:cNvSpPr/>
           <p:nvPr/>
         </p:nvSpPr>
         <p:spPr>
           <a:xfrm>
             <a:off x="475560" y="887040"/>
-            <a:ext cx="438120" cy="438120"/>
+            <a:ext cx="437400" cy="437400"/>
           </a:xfrm>
           <a:prstGeom prst="rect">
             <a:avLst/>
@@ -12254,14 +13236,14 @@
       </p:sp>
       <p:sp>
         <p:nvSpPr>
-          <p:cNvPr id="53" name="Text 6"/>
+          <p:cNvPr id="59" name="Text 6"/>
           <p:cNvSpPr/>
           <p:nvPr/>
         </p:nvSpPr>
         <p:spPr>
           <a:xfrm>
             <a:off x="1024200" y="887040"/>
-            <a:ext cx="3291120" cy="273600"/>
+            <a:ext cx="3290400" cy="272880"/>
           </a:xfrm>
           <a:prstGeom prst="rect">
             <a:avLst/>
@@ -12315,14 +13297,14 @@
       </p:sp>
       <p:sp>
         <p:nvSpPr>
-          <p:cNvPr id="54" name="Text 7"/>
+          <p:cNvPr id="60" name="Text 7"/>
           <p:cNvSpPr/>
           <p:nvPr/>
         </p:nvSpPr>
         <p:spPr>
           <a:xfrm>
             <a:off x="475560" y="1351080"/>
-            <a:ext cx="3124080" cy="628560"/>
+            <a:ext cx="3123360" cy="627840"/>
           </a:xfrm>
           <a:prstGeom prst="rect">
             <a:avLst/>
@@ -12454,14 +13436,14 @@
       </p:sp>
       <p:sp>
         <p:nvSpPr>
-          <p:cNvPr id="55" name="Shape 8"/>
+          <p:cNvPr id="61" name="Shape 8"/>
           <p:cNvSpPr/>
           <p:nvPr/>
         </p:nvSpPr>
         <p:spPr>
           <a:xfrm>
             <a:off x="4663440" y="822960"/>
-            <a:ext cx="4159800" cy="1919520"/>
+            <a:ext cx="4159080" cy="1918800"/>
           </a:xfrm>
           <a:prstGeom prst="rect">
             <a:avLst/>
@@ -12510,14 +13492,14 @@
       </p:sp>
       <p:sp>
         <p:nvSpPr>
-          <p:cNvPr id="56" name="Shape 9"/>
+          <p:cNvPr id="62" name="Shape 9"/>
           <p:cNvSpPr/>
           <p:nvPr/>
         </p:nvSpPr>
         <p:spPr>
           <a:xfrm>
             <a:off x="4818960" y="887040"/>
-            <a:ext cx="438120" cy="438120"/>
+            <a:ext cx="437400" cy="437400"/>
           </a:xfrm>
           <a:prstGeom prst="ellipse">
             <a:avLst/>
@@ -12559,14 +13541,14 @@
       </p:sp>
       <p:sp>
         <p:nvSpPr>
-          <p:cNvPr id="57" name="Text 10"/>
+          <p:cNvPr id="63" name="Text 10"/>
           <p:cNvSpPr/>
           <p:nvPr/>
         </p:nvSpPr>
         <p:spPr>
           <a:xfrm>
             <a:off x="4818960" y="887040"/>
-            <a:ext cx="438120" cy="438120"/>
+            <a:ext cx="437400" cy="437400"/>
           </a:xfrm>
           <a:prstGeom prst="rect">
             <a:avLst/>
@@ -12620,14 +13602,14 @@
       </p:sp>
       <p:sp>
         <p:nvSpPr>
-          <p:cNvPr id="58" name="Text 11"/>
+          <p:cNvPr id="64" name="Text 11"/>
           <p:cNvSpPr/>
           <p:nvPr/>
         </p:nvSpPr>
         <p:spPr>
           <a:xfrm>
             <a:off x="5367600" y="887040"/>
-            <a:ext cx="3336840" cy="273600"/>
+            <a:ext cx="3336120" cy="272880"/>
           </a:xfrm>
           <a:prstGeom prst="rect">
             <a:avLst/>
@@ -12681,14 +13663,14 @@
       </p:sp>
       <p:sp>
         <p:nvSpPr>
-          <p:cNvPr id="59" name="Text 12"/>
+          <p:cNvPr id="65" name="Text 12"/>
           <p:cNvSpPr/>
           <p:nvPr/>
         </p:nvSpPr>
         <p:spPr>
           <a:xfrm>
             <a:off x="4818960" y="1351080"/>
-            <a:ext cx="3839760" cy="1462320"/>
+            <a:ext cx="3839040" cy="1461600"/>
           </a:xfrm>
           <a:prstGeom prst="rect">
             <a:avLst/>
@@ -12747,180 +13729,18 @@
               <a:latin typeface="Arial"/>
             </a:endParaRPr>
           </a:p>
-          <a:p>
-            <a:pPr>
-              <a:lnSpc>
-                <a:spcPct val="100000"/>
-              </a:lnSpc>
-            </a:pPr>
-            <a:endParaRPr lang="pt-BR" sz="1050" b="0" u="none" strike="noStrike">
-              <a:solidFill>
-                <a:srgbClr val="ffffff"/>
-              </a:solidFill>
-              <a:effectLst/>
-              <a:uFillTx/>
-              <a:latin typeface="Arial"/>
-            </a:endParaRPr>
-          </a:p>
-          <a:p>
-            <a:pPr>
-              <a:lnSpc>
-                <a:spcPct val="100000"/>
-              </a:lnSpc>
-            </a:pPr>
-            <a:r>
-              <a:rPr lang="en-US" sz="1050" b="1" u="none" strike="noStrike">
-                <a:solidFill>
-                  <a:srgbClr val="e9c46a"/>
-                </a:solidFill>
-                <a:effectLst/>
-                <a:uFillTx/>
-                <a:latin typeface="Cantarell"/>
-                <a:ea typeface="Cantarell"/>
-              </a:rPr>
-              <a:t>Por que soma e não comparação?</a:t>
-            </a:r>
-            <a:endParaRPr lang="pt-BR" sz="1050" b="0" u="none" strike="noStrike">
-              <a:solidFill>
-                <a:srgbClr val="ffffff"/>
-              </a:solidFill>
-              <a:effectLst/>
-              <a:uFillTx/>
-              <a:latin typeface="Arial"/>
-            </a:endParaRPr>
-          </a:p>
-          <a:p>
-            <a:pPr defTabSz="914400">
-              <a:lnSpc>
-                <a:spcPct val="100000"/>
-              </a:lnSpc>
-              <a:tabLst>
-                <a:tab algn="l" pos="0"/>
-              </a:tabLst>
-            </a:pPr>
-            <a:r>
-              <a:rPr lang="en-US" sz="1050" b="0" u="none" strike="noStrike">
-                <a:solidFill>
-                  <a:srgbClr val="edf4f7"/>
-                </a:solidFill>
-                <a:effectLst/>
-                <a:uFillTx/>
-                <a:latin typeface="Cantarell"/>
-                <a:ea typeface="Cantarell"/>
-              </a:rPr>
-              <a:t>A comparação  se n ≤ 1  ocorre em TODAS</a:t>
-            </a:r>
-            <a:endParaRPr lang="pt-BR" sz="1050" b="0" u="none" strike="noStrike">
-              <a:solidFill>
-                <a:srgbClr val="ffffff"/>
-              </a:solidFill>
-              <a:effectLst/>
-              <a:uFillTx/>
-              <a:latin typeface="Arial"/>
-            </a:endParaRPr>
-          </a:p>
-          <a:p>
-            <a:pPr defTabSz="914400">
-              <a:lnSpc>
-                <a:spcPct val="100000"/>
-              </a:lnSpc>
-              <a:tabLst>
-                <a:tab algn="l" pos="0"/>
-              </a:tabLst>
-            </a:pPr>
-            <a:r>
-              <a:rPr lang="en-US" sz="1050" b="0" u="none" strike="noStrike">
-                <a:solidFill>
-                  <a:srgbClr val="edf4f7"/>
-                </a:solidFill>
-                <a:effectLst/>
-                <a:uFillTx/>
-                <a:latin typeface="Cantarell"/>
-                <a:ea typeface="Cantarell"/>
-              </a:rPr>
-              <a:t>as chamadas (inclusive casos base).</a:t>
-            </a:r>
-            <a:endParaRPr lang="pt-BR" sz="1050" b="0" u="none" strike="noStrike">
-              <a:solidFill>
-                <a:srgbClr val="ffffff"/>
-              </a:solidFill>
-              <a:effectLst/>
-              <a:uFillTx/>
-              <a:latin typeface="Arial"/>
-            </a:endParaRPr>
-          </a:p>
-          <a:p>
-            <a:pPr defTabSz="914400">
-              <a:lnSpc>
-                <a:spcPct val="100000"/>
-              </a:lnSpc>
-              <a:tabLst>
-                <a:tab algn="l" pos="0"/>
-              </a:tabLst>
-            </a:pPr>
-            <a:r>
-              <a:rPr lang="en-US" sz="1050" b="0" u="none" strike="noStrike">
-                <a:solidFill>
-                  <a:srgbClr val="edf4f7"/>
-                </a:solidFill>
-                <a:effectLst/>
-                <a:uFillTx/>
-                <a:latin typeface="Cantarell"/>
-                <a:ea typeface="Cantarell"/>
-              </a:rPr>
-              <a:t>A soma só ocorre em chamadas não-base</a:t>
-            </a:r>
-            <a:endParaRPr lang="pt-BR" sz="1050" b="0" u="none" strike="noStrike">
-              <a:solidFill>
-                <a:srgbClr val="ffffff"/>
-              </a:solidFill>
-              <a:effectLst/>
-              <a:uFillTx/>
-              <a:latin typeface="Arial"/>
-            </a:endParaRPr>
-          </a:p>
-          <a:p>
-            <a:pPr defTabSz="914400">
-              <a:lnSpc>
-                <a:spcPct val="100000"/>
-              </a:lnSpc>
-              <a:tabLst>
-                <a:tab algn="l" pos="0"/>
-              </a:tabLst>
-            </a:pPr>
-            <a:r>
-              <a:rPr lang="en-US" sz="1050" b="0" u="none" strike="noStrike">
-                <a:solidFill>
-                  <a:srgbClr val="edf4f7"/>
-                </a:solidFill>
-                <a:effectLst/>
-                <a:uFillTx/>
-                <a:latin typeface="Cantarell"/>
-                <a:ea typeface="Cantarell"/>
-              </a:rPr>
-              <a:t>e representa o trabalho útil do algoritmo.</a:t>
-            </a:r>
-            <a:endParaRPr lang="pt-BR" sz="1050" b="0" u="none" strike="noStrike">
-              <a:solidFill>
-                <a:srgbClr val="ffffff"/>
-              </a:solidFill>
-              <a:effectLst/>
-              <a:uFillTx/>
-              <a:latin typeface="Arial"/>
-            </a:endParaRPr>
-          </a:p>
-        </p:txBody>
-      </p:sp>
-      <p:sp>
-        <p:nvSpPr>
-          <p:cNvPr id="60" name="Shape 13"/>
+        </p:txBody>
+      </p:sp>
+      <p:sp>
+        <p:nvSpPr>
+          <p:cNvPr id="66" name="Shape 13"/>
           <p:cNvSpPr/>
           <p:nvPr/>
         </p:nvSpPr>
         <p:spPr>
           <a:xfrm>
             <a:off x="320040" y="2880360"/>
-            <a:ext cx="8503200" cy="685080"/>
+            <a:ext cx="8502480" cy="684360"/>
           </a:xfrm>
           <a:prstGeom prst="rect">
             <a:avLst/>
@@ -12969,14 +13789,14 @@
       </p:sp>
       <p:sp>
         <p:nvSpPr>
-          <p:cNvPr id="61" name="Text 14"/>
+          <p:cNvPr id="67" name="Text 14"/>
           <p:cNvSpPr/>
           <p:nvPr/>
         </p:nvSpPr>
         <p:spPr>
           <a:xfrm>
             <a:off x="320040" y="2880360"/>
-            <a:ext cx="8503200" cy="685080"/>
+            <a:ext cx="8502480" cy="684360"/>
           </a:xfrm>
           <a:prstGeom prst="rect">
             <a:avLst/>
@@ -13078,14 +13898,14 @@
       </p:sp>
       <p:sp>
         <p:nvSpPr>
-          <p:cNvPr id="62" name="Shape 15"/>
+          <p:cNvPr id="68" name="Shape 15"/>
           <p:cNvSpPr/>
           <p:nvPr/>
         </p:nvSpPr>
         <p:spPr>
           <a:xfrm>
             <a:off x="320040" y="3657600"/>
-            <a:ext cx="8503200" cy="1261080"/>
+            <a:ext cx="8502480" cy="1260360"/>
           </a:xfrm>
           <a:prstGeom prst="rect">
             <a:avLst/>
@@ -13134,14 +13954,14 @@
       </p:sp>
       <p:sp>
         <p:nvSpPr>
-          <p:cNvPr id="63" name="Text 16"/>
+          <p:cNvPr id="69" name="Text 16"/>
           <p:cNvSpPr/>
           <p:nvPr/>
         </p:nvSpPr>
         <p:spPr>
           <a:xfrm>
             <a:off x="448200" y="3749040"/>
-            <a:ext cx="8247240" cy="1078200"/>
+            <a:ext cx="8246520" cy="1077480"/>
           </a:xfrm>
           <a:prstGeom prst="rect">
             <a:avLst/>
@@ -13322,14 +14142,14 @@
       </p:grpSpPr>
       <p:sp>
         <p:nvSpPr>
-          <p:cNvPr id="64" name="Shape 0"/>
+          <p:cNvPr id="70" name="Shape 0"/>
           <p:cNvSpPr/>
           <p:nvPr/>
         </p:nvSpPr>
         <p:spPr>
           <a:xfrm>
             <a:off x="0" y="0"/>
-            <a:ext cx="163800" cy="5142960"/>
+            <a:ext cx="163080" cy="5142240"/>
           </a:xfrm>
           <a:prstGeom prst="rect">
             <a:avLst/>
@@ -13371,14 +14191,14 @@
       </p:sp>
       <p:sp>
         <p:nvSpPr>
-          <p:cNvPr id="65" name="Text 1"/>
+          <p:cNvPr id="71" name="Text 1"/>
           <p:cNvSpPr/>
           <p:nvPr/>
         </p:nvSpPr>
         <p:spPr>
           <a:xfrm>
             <a:off x="320040" y="128160"/>
-            <a:ext cx="8503200" cy="566280"/>
+            <a:ext cx="8502480" cy="565560"/>
           </a:xfrm>
           <a:prstGeom prst="rect">
             <a:avLst/>
@@ -13432,7 +14252,7 @@
       </p:sp>
       <p:sp>
         <p:nvSpPr>
-          <p:cNvPr id="66" name="Shape 2"/>
+          <p:cNvPr id="72" name="Shape 2"/>
           <p:cNvSpPr/>
           <p:nvPr/>
         </p:nvSpPr>
@@ -13476,14 +14296,14 @@
       </p:sp>
       <p:sp>
         <p:nvSpPr>
-          <p:cNvPr id="67" name="Shape 3"/>
+          <p:cNvPr id="73" name="Shape 3"/>
           <p:cNvSpPr/>
           <p:nvPr/>
         </p:nvSpPr>
         <p:spPr>
           <a:xfrm>
             <a:off x="320040" y="822960"/>
-            <a:ext cx="8503200" cy="959400"/>
+            <a:ext cx="8502480" cy="958680"/>
           </a:xfrm>
           <a:prstGeom prst="rect">
             <a:avLst/>
@@ -13532,14 +14352,14 @@
       </p:sp>
       <p:sp>
         <p:nvSpPr>
-          <p:cNvPr id="68" name="Shape 4"/>
+          <p:cNvPr id="74" name="Shape 4"/>
           <p:cNvSpPr/>
           <p:nvPr/>
         </p:nvSpPr>
         <p:spPr>
           <a:xfrm>
             <a:off x="475560" y="887040"/>
-            <a:ext cx="438120" cy="438120"/>
+            <a:ext cx="437400" cy="437400"/>
           </a:xfrm>
           <a:prstGeom prst="ellipse">
             <a:avLst/>
@@ -13581,14 +14401,14 @@
       </p:sp>
       <p:sp>
         <p:nvSpPr>
-          <p:cNvPr id="69" name="Text 5"/>
+          <p:cNvPr id="75" name="Text 5"/>
           <p:cNvSpPr/>
           <p:nvPr/>
         </p:nvSpPr>
         <p:spPr>
           <a:xfrm>
             <a:off x="475560" y="887040"/>
-            <a:ext cx="438120" cy="438120"/>
+            <a:ext cx="437400" cy="437400"/>
           </a:xfrm>
           <a:prstGeom prst="rect">
             <a:avLst/>
@@ -13642,14 +14462,14 @@
       </p:sp>
       <p:sp>
         <p:nvSpPr>
-          <p:cNvPr id="70" name="Text 6"/>
+          <p:cNvPr id="76" name="Text 6"/>
           <p:cNvSpPr/>
           <p:nvPr/>
         </p:nvSpPr>
         <p:spPr>
           <a:xfrm>
             <a:off x="1051560" y="822960"/>
-            <a:ext cx="7634520" cy="959400"/>
+            <a:ext cx="7633800" cy="958680"/>
           </a:xfrm>
           <a:prstGeom prst="rect">
             <a:avLst/>
@@ -13715,14 +14535,14 @@
       </p:sp>
       <p:sp>
         <p:nvSpPr>
-          <p:cNvPr id="71" name="Shape 7"/>
+          <p:cNvPr id="77" name="Shape 7"/>
           <p:cNvSpPr/>
           <p:nvPr/>
         </p:nvSpPr>
         <p:spPr>
           <a:xfrm>
             <a:off x="320040" y="1920240"/>
-            <a:ext cx="4114080" cy="2193840"/>
+            <a:ext cx="4113360" cy="2193120"/>
           </a:xfrm>
           <a:prstGeom prst="rect">
             <a:avLst/>
@@ -13771,14 +14591,14 @@
       </p:sp>
       <p:sp>
         <p:nvSpPr>
-          <p:cNvPr id="72" name="Text 8"/>
+          <p:cNvPr id="78" name="Text 8"/>
           <p:cNvSpPr/>
           <p:nvPr/>
         </p:nvSpPr>
         <p:spPr>
           <a:xfrm>
             <a:off x="475560" y="1984320"/>
-            <a:ext cx="3794040" cy="273600"/>
+            <a:ext cx="3793320" cy="272880"/>
           </a:xfrm>
           <a:prstGeom prst="rect">
             <a:avLst/>
@@ -13832,14 +14652,14 @@
       </p:sp>
       <p:sp>
         <p:nvSpPr>
-          <p:cNvPr id="73" name="Text 9"/>
+          <p:cNvPr id="79" name="Text 9"/>
           <p:cNvSpPr/>
           <p:nvPr/>
         </p:nvSpPr>
         <p:spPr>
           <a:xfrm>
             <a:off x="475560" y="2304360"/>
-            <a:ext cx="3794040" cy="1736640"/>
+            <a:ext cx="3793320" cy="1735920"/>
           </a:xfrm>
           <a:prstGeom prst="rect">
             <a:avLst/>
@@ -14049,14 +14869,14 @@
       </p:sp>
       <p:sp>
         <p:nvSpPr>
-          <p:cNvPr id="74" name="Shape 10"/>
+          <p:cNvPr id="80" name="Shape 10"/>
           <p:cNvSpPr/>
           <p:nvPr/>
         </p:nvSpPr>
         <p:spPr>
           <a:xfrm>
             <a:off x="4663440" y="1920240"/>
-            <a:ext cx="4159800" cy="2193840"/>
+            <a:ext cx="4159080" cy="2193120"/>
           </a:xfrm>
           <a:prstGeom prst="rect">
             <a:avLst/>
@@ -14105,14 +14925,14 @@
       </p:sp>
       <p:sp>
         <p:nvSpPr>
-          <p:cNvPr id="75" name="Text 11"/>
+          <p:cNvPr id="81" name="Text 11"/>
           <p:cNvSpPr/>
           <p:nvPr/>
         </p:nvSpPr>
         <p:spPr>
           <a:xfrm>
             <a:off x="4818960" y="1984320"/>
-            <a:ext cx="3839760" cy="273600"/>
+            <a:ext cx="3839040" cy="272880"/>
           </a:xfrm>
           <a:prstGeom prst="rect">
             <a:avLst/>
@@ -14166,14 +14986,14 @@
       </p:sp>
       <p:sp>
         <p:nvSpPr>
-          <p:cNvPr id="76" name="Text 12"/>
+          <p:cNvPr id="82" name="Text 12"/>
           <p:cNvSpPr/>
           <p:nvPr/>
         </p:nvSpPr>
         <p:spPr>
           <a:xfrm>
             <a:off x="4818960" y="2304360"/>
-            <a:ext cx="3839760" cy="1736640"/>
+            <a:ext cx="3839040" cy="1735920"/>
           </a:xfrm>
           <a:prstGeom prst="rect">
             <a:avLst/>
@@ -14260,7 +15080,7 @@
                 <a:latin typeface="Cantarell"/>
                 <a:ea typeface="Cantarell"/>
               </a:rPr>
-              <a:t>Melhor caso: elemento na posição 0</a:t>
+              <a:t>Melhor caso: elemento no meio do array</a:t>
             </a:r>
             <a:endParaRPr lang="pt-BR" sz="1100" b="0" u="none" strike="noStrike">
               <a:solidFill>
@@ -14290,7 +15110,79 @@
                 <a:latin typeface="Cantarell"/>
                 <a:ea typeface="Cantarell"/>
               </a:rPr>
-              <a:t>→ C_min(n) = 1</a:t>
+              <a:t>→ C</a:t>
+            </a:r>
+            <a:r>
+              <a:rPr lang="en-US" sz="1100" b="0" u="none" strike="noStrike" baseline="-8000">
+                <a:solidFill>
+                  <a:srgbClr val="edf4f7"/>
+                </a:solidFill>
+                <a:effectLst/>
+                <a:uFillTx/>
+                <a:latin typeface="Cantarell"/>
+                <a:ea typeface="Cantarell"/>
+              </a:rPr>
+              <a:t>min</a:t>
+            </a:r>
+            <a:r>
+              <a:rPr lang="en-US" sz="1100" b="0" u="none" strike="noStrike">
+                <a:solidFill>
+                  <a:srgbClr val="edf4f7"/>
+                </a:solidFill>
+                <a:effectLst/>
+                <a:uFillTx/>
+                <a:latin typeface="Cantarell"/>
+                <a:ea typeface="Cantarell"/>
+              </a:rPr>
+              <a:t>(n) </a:t>
+            </a:r>
+            <a:r>
+              <a:rPr lang="en-US" sz="1050" b="0" u="none" strike="noStrike">
+                <a:solidFill>
+                  <a:srgbClr val="ffffff"/>
+                </a:solidFill>
+                <a:effectLst/>
+                <a:uFillTx/>
+                <a:latin typeface="Cantarell"/>
+                <a:ea typeface="Consolas"/>
+              </a:rPr>
+              <a:t>∈</a:t>
+            </a:r>
+            <a:r>
+              <a:rPr lang="en-US" sz="1100" b="0" u="none" strike="noStrike">
+                <a:solidFill>
+                  <a:srgbClr val="edf4f7"/>
+                </a:solidFill>
+                <a:effectLst/>
+                <a:uFillTx/>
+                <a:latin typeface="Cantarell"/>
+                <a:ea typeface="Cantarell"/>
+              </a:rPr>
+              <a:t> </a:t>
+            </a:r>
+            <a:r>
+              <a:rPr lang="en-US" sz="1050" b="0" u="none" strike="noStrike">
+                <a:solidFill>
+                  <a:srgbClr val="ffffff"/>
+                </a:solidFill>
+                <a:effectLst/>
+                <a:uFillTx/>
+                <a:latin typeface="Cantarell"/>
+                <a:ea typeface="Consolas"/>
+              </a:rPr>
+              <a:t>Θ</a:t>
+            </a:r>
+            <a:r>
+              <a:rPr lang="en-US" sz="1100" b="0" u="none" strike="noStrike">
+                <a:solidFill>
+                  <a:srgbClr val="edf4f7"/>
+                </a:solidFill>
+                <a:effectLst/>
+                <a:uFillTx/>
+                <a:latin typeface="Cantarell"/>
+                <a:ea typeface="Cantarell"/>
+              </a:rPr>
+              <a:t>(1)</a:t>
             </a:r>
             <a:endParaRPr lang="pt-BR" sz="1100" b="0" u="none" strike="noStrike">
               <a:solidFill>
@@ -14338,7 +15230,7 @@
                 <a:latin typeface="Cantarell"/>
                 <a:ea typeface="Cantarell"/>
               </a:rPr>
-              <a:t>Pior caso: não encontrado</a:t>
+              <a:t>Pior caso: não encontrado ou no final das divisões</a:t>
             </a:r>
             <a:endParaRPr lang="pt-BR" sz="1100" b="0" u="none" strike="noStrike">
               <a:solidFill>
@@ -14368,7 +15260,79 @@
                 <a:latin typeface="Cantarell"/>
                 <a:ea typeface="Cantarell"/>
               </a:rPr>
-              <a:t>→ C_max(n) = n</a:t>
+              <a:t>→ C</a:t>
+            </a:r>
+            <a:r>
+              <a:rPr lang="en-US" sz="1100" b="0" u="none" strike="noStrike" baseline="-8000">
+                <a:solidFill>
+                  <a:srgbClr val="edf4f7"/>
+                </a:solidFill>
+                <a:effectLst/>
+                <a:uFillTx/>
+                <a:latin typeface="Cantarell"/>
+                <a:ea typeface="Cantarell"/>
+              </a:rPr>
+              <a:t>max</a:t>
+            </a:r>
+            <a:r>
+              <a:rPr lang="en-US" sz="1100" b="0" u="none" strike="noStrike">
+                <a:solidFill>
+                  <a:srgbClr val="edf4f7"/>
+                </a:solidFill>
+                <a:effectLst/>
+                <a:uFillTx/>
+                <a:latin typeface="Cantarell"/>
+                <a:ea typeface="Cantarell"/>
+              </a:rPr>
+              <a:t>(n) </a:t>
+            </a:r>
+            <a:r>
+              <a:rPr lang="en-US" sz="1050" b="0" u="none" strike="noStrike">
+                <a:solidFill>
+                  <a:srgbClr val="ffffff"/>
+                </a:solidFill>
+                <a:effectLst/>
+                <a:uFillTx/>
+                <a:latin typeface="Cantarell"/>
+                <a:ea typeface="Consolas"/>
+              </a:rPr>
+              <a:t>∈</a:t>
+            </a:r>
+            <a:r>
+              <a:rPr lang="en-US" sz="1100" b="0" u="none" strike="noStrike">
+                <a:solidFill>
+                  <a:srgbClr val="edf4f7"/>
+                </a:solidFill>
+                <a:effectLst/>
+                <a:uFillTx/>
+                <a:latin typeface="Cantarell"/>
+                <a:ea typeface="Cantarell"/>
+              </a:rPr>
+              <a:t> </a:t>
+            </a:r>
+            <a:r>
+              <a:rPr lang="en-US" sz="1050" b="0" u="none" strike="noStrike">
+                <a:solidFill>
+                  <a:srgbClr val="ffffff"/>
+                </a:solidFill>
+                <a:effectLst/>
+                <a:uFillTx/>
+                <a:latin typeface="Cantarell"/>
+                <a:ea typeface="Consolas"/>
+              </a:rPr>
+              <a:t>Θ</a:t>
+            </a:r>
+            <a:r>
+              <a:rPr lang="en-US" sz="1100" b="0" u="none" strike="noStrike">
+                <a:solidFill>
+                  <a:srgbClr val="edf4f7"/>
+                </a:solidFill>
+                <a:effectLst/>
+                <a:uFillTx/>
+                <a:latin typeface="Cantarell"/>
+                <a:ea typeface="Cantarell"/>
+              </a:rPr>
+              <a:t>(log n)</a:t>
             </a:r>
             <a:endParaRPr lang="pt-BR" sz="1100" b="0" u="none" strike="noStrike">
               <a:solidFill>
@@ -14431,14 +15395,14 @@
       </p:sp>
       <p:sp>
         <p:nvSpPr>
-          <p:cNvPr id="77" name="Shape 13"/>
+          <p:cNvPr id="83" name="Shape 13"/>
           <p:cNvSpPr/>
           <p:nvPr/>
         </p:nvSpPr>
         <p:spPr>
           <a:xfrm>
             <a:off x="320040" y="4224600"/>
-            <a:ext cx="8503200" cy="621000"/>
+            <a:ext cx="8502480" cy="620280"/>
           </a:xfrm>
           <a:prstGeom prst="rect">
             <a:avLst/>
@@ -14487,14 +15451,14 @@
       </p:sp>
       <p:sp>
         <p:nvSpPr>
-          <p:cNvPr id="78" name="Text 14"/>
+          <p:cNvPr id="84" name="Text 14"/>
           <p:cNvSpPr/>
           <p:nvPr/>
         </p:nvSpPr>
         <p:spPr>
           <a:xfrm>
             <a:off x="502920" y="4224600"/>
-            <a:ext cx="8320320" cy="621000"/>
+            <a:ext cx="8319600" cy="620280"/>
           </a:xfrm>
           <a:prstGeom prst="rect">
             <a:avLst/>
@@ -14585,14 +15549,14 @@
       </p:grpSpPr>
       <p:sp>
         <p:nvSpPr>
-          <p:cNvPr id="79" name="Shape 0"/>
+          <p:cNvPr id="85" name="Shape 0"/>
           <p:cNvSpPr/>
           <p:nvPr/>
         </p:nvSpPr>
         <p:spPr>
           <a:xfrm>
             <a:off x="0" y="0"/>
-            <a:ext cx="163800" cy="5142960"/>
+            <a:ext cx="163080" cy="5142240"/>
           </a:xfrm>
           <a:prstGeom prst="rect">
             <a:avLst/>
@@ -14634,14 +15598,14 @@
       </p:sp>
       <p:sp>
         <p:nvSpPr>
-          <p:cNvPr id="80" name="Text 1"/>
+          <p:cNvPr id="86" name="Text 1"/>
           <p:cNvSpPr/>
           <p:nvPr/>
         </p:nvSpPr>
         <p:spPr>
           <a:xfrm>
             <a:off x="320040" y="128160"/>
-            <a:ext cx="8503200" cy="566280"/>
+            <a:ext cx="8502480" cy="565560"/>
           </a:xfrm>
           <a:prstGeom prst="rect">
             <a:avLst/>
@@ -14695,7 +15659,7 @@
       </p:sp>
       <p:sp>
         <p:nvSpPr>
-          <p:cNvPr id="81" name="Shape 2"/>
+          <p:cNvPr id="87" name="Shape 2"/>
           <p:cNvSpPr/>
           <p:nvPr/>
         </p:nvSpPr>
@@ -14739,14 +15703,14 @@
       </p:sp>
       <p:sp>
         <p:nvSpPr>
-          <p:cNvPr id="82" name="Shape 3"/>
+          <p:cNvPr id="88" name="Shape 3"/>
           <p:cNvSpPr/>
           <p:nvPr/>
         </p:nvSpPr>
         <p:spPr>
           <a:xfrm>
             <a:off x="320040" y="822960"/>
-            <a:ext cx="438120" cy="438120"/>
+            <a:ext cx="437400" cy="437400"/>
           </a:xfrm>
           <a:prstGeom prst="ellipse">
             <a:avLst/>
@@ -14788,14 +15752,14 @@
       </p:sp>
       <p:sp>
         <p:nvSpPr>
-          <p:cNvPr id="83" name="Text 4"/>
+          <p:cNvPr id="89" name="Text 4"/>
           <p:cNvSpPr/>
           <p:nvPr/>
         </p:nvSpPr>
         <p:spPr>
           <a:xfrm>
             <a:off x="320040" y="822960"/>
-            <a:ext cx="438120" cy="438120"/>
+            <a:ext cx="437400" cy="437400"/>
           </a:xfrm>
           <a:prstGeom prst="rect">
             <a:avLst/>
@@ -14849,14 +15813,14 @@
       </p:sp>
       <p:sp>
         <p:nvSpPr>
-          <p:cNvPr id="84" name="Shape 5"/>
+          <p:cNvPr id="90" name="Shape 5"/>
           <p:cNvSpPr/>
           <p:nvPr/>
         </p:nvSpPr>
         <p:spPr>
           <a:xfrm>
             <a:off x="320040" y="804600"/>
-            <a:ext cx="4296960" cy="3291120"/>
+            <a:ext cx="4296240" cy="3290400"/>
           </a:xfrm>
           <a:prstGeom prst="rect">
             <a:avLst/>
@@ -14905,14 +15869,14 @@
       </p:sp>
       <p:sp>
         <p:nvSpPr>
-          <p:cNvPr id="85" name="Text 6"/>
+          <p:cNvPr id="91" name="Text 6"/>
           <p:cNvSpPr/>
           <p:nvPr/>
         </p:nvSpPr>
         <p:spPr>
           <a:xfrm>
             <a:off x="475560" y="850320"/>
-            <a:ext cx="3976920" cy="255240"/>
+            <a:ext cx="3976200" cy="254520"/>
           </a:xfrm>
           <a:prstGeom prst="rect">
             <a:avLst/>
@@ -14966,14 +15930,14 @@
       </p:sp>
       <p:sp>
         <p:nvSpPr>
-          <p:cNvPr id="86" name="Text 7"/>
+          <p:cNvPr id="92" name="Text 7"/>
           <p:cNvSpPr/>
           <p:nvPr/>
         </p:nvSpPr>
         <p:spPr>
           <a:xfrm>
             <a:off x="475560" y="1143000"/>
-            <a:ext cx="3976920" cy="2833920"/>
+            <a:ext cx="3976200" cy="2833200"/>
           </a:xfrm>
           <a:prstGeom prst="rect">
             <a:avLst/>
@@ -15276,14 +16240,14 @@
       </p:sp>
       <p:sp>
         <p:nvSpPr>
-          <p:cNvPr id="87" name="Shape 8"/>
+          <p:cNvPr id="93" name="Shape 8"/>
           <p:cNvSpPr/>
           <p:nvPr/>
         </p:nvSpPr>
         <p:spPr>
           <a:xfrm>
             <a:off x="4773240" y="804600"/>
-            <a:ext cx="4050000" cy="3291120"/>
+            <a:ext cx="4049280" cy="3290400"/>
           </a:xfrm>
           <a:prstGeom prst="rect">
             <a:avLst/>
@@ -15332,14 +16296,14 @@
       </p:sp>
       <p:sp>
         <p:nvSpPr>
-          <p:cNvPr id="88" name="Text 9"/>
+          <p:cNvPr id="94" name="Text 9"/>
           <p:cNvSpPr/>
           <p:nvPr/>
         </p:nvSpPr>
         <p:spPr>
           <a:xfrm>
             <a:off x="4919400" y="850320"/>
-            <a:ext cx="3748320" cy="255240"/>
+            <a:ext cx="3747600" cy="254520"/>
           </a:xfrm>
           <a:prstGeom prst="rect">
             <a:avLst/>
@@ -15393,7 +16357,7 @@
       </p:sp>
       <p:graphicFrame>
         <p:nvGraphicFramePr>
-          <p:cNvPr id="89" name="Table 0"/>
+          <p:cNvPr id="95" name="Table 0"/>
           <p:cNvGraphicFramePr/>
           <p:nvPr/>
         </p:nvGraphicFramePr>
@@ -17616,14 +18580,14 @@
       </p:graphicFrame>
       <p:sp>
         <p:nvSpPr>
-          <p:cNvPr id="90" name="Shape 10"/>
+          <p:cNvPr id="96" name="Shape 10"/>
           <p:cNvSpPr/>
           <p:nvPr/>
         </p:nvSpPr>
         <p:spPr>
           <a:xfrm>
             <a:off x="320040" y="4224600"/>
-            <a:ext cx="8503200" cy="685080"/>
+            <a:ext cx="8502480" cy="684360"/>
           </a:xfrm>
           <a:prstGeom prst="rect">
             <a:avLst/>
@@ -17672,14 +18636,14 @@
       </p:sp>
       <p:sp>
         <p:nvSpPr>
-          <p:cNvPr id="91" name="Text 11"/>
+          <p:cNvPr id="97" name="Text 11"/>
           <p:cNvSpPr/>
           <p:nvPr/>
         </p:nvSpPr>
         <p:spPr>
           <a:xfrm>
             <a:off x="320040" y="4224600"/>
-            <a:ext cx="8503200" cy="685080"/>
+            <a:ext cx="8502480" cy="684360"/>
           </a:xfrm>
           <a:prstGeom prst="rect">
             <a:avLst/>
@@ -17782,14 +18746,14 @@
       </p:grpSpPr>
       <p:sp>
         <p:nvSpPr>
-          <p:cNvPr id="92" name="Shape 0"/>
+          <p:cNvPr id="98" name="Shape 0"/>
           <p:cNvSpPr/>
           <p:nvPr/>
         </p:nvSpPr>
         <p:spPr>
           <a:xfrm>
             <a:off x="0" y="0"/>
-            <a:ext cx="163800" cy="5142960"/>
+            <a:ext cx="163080" cy="5142240"/>
           </a:xfrm>
           <a:prstGeom prst="rect">
             <a:avLst/>
@@ -17831,14 +18795,14 @@
       </p:sp>
       <p:sp>
         <p:nvSpPr>
-          <p:cNvPr id="93" name="Text 1"/>
+          <p:cNvPr id="99" name="Text 1"/>
           <p:cNvSpPr/>
           <p:nvPr/>
         </p:nvSpPr>
         <p:spPr>
           <a:xfrm>
             <a:off x="320040" y="128160"/>
-            <a:ext cx="8503200" cy="566280"/>
+            <a:ext cx="8502480" cy="565560"/>
           </a:xfrm>
           <a:prstGeom prst="rect">
             <a:avLst/>
@@ -17892,7 +18856,7 @@
       </p:sp>
       <p:sp>
         <p:nvSpPr>
-          <p:cNvPr id="94" name="Shape 2"/>
+          <p:cNvPr id="100" name="Shape 2"/>
           <p:cNvSpPr/>
           <p:nvPr/>
         </p:nvSpPr>
@@ -17936,14 +18900,14 @@
       </p:sp>
       <p:sp>
         <p:nvSpPr>
-          <p:cNvPr id="95" name="Shape 3"/>
+          <p:cNvPr id="101" name="Shape 3"/>
           <p:cNvSpPr/>
           <p:nvPr/>
         </p:nvSpPr>
         <p:spPr>
           <a:xfrm>
             <a:off x="320040" y="804600"/>
-            <a:ext cx="3931200" cy="3839760"/>
+            <a:ext cx="3930480" cy="3839040"/>
           </a:xfrm>
           <a:prstGeom prst="rect">
             <a:avLst/>
@@ -17992,14 +18956,14 @@
       </p:sp>
       <p:sp>
         <p:nvSpPr>
-          <p:cNvPr id="96" name="Text 4"/>
+          <p:cNvPr id="102" name="Text 4"/>
           <p:cNvSpPr/>
           <p:nvPr/>
         </p:nvSpPr>
         <p:spPr>
           <a:xfrm>
             <a:off x="457200" y="850320"/>
-            <a:ext cx="3656880" cy="255240"/>
+            <a:ext cx="3656160" cy="254520"/>
           </a:xfrm>
           <a:prstGeom prst="rect">
             <a:avLst/>
@@ -18053,14 +19017,14 @@
       </p:sp>
       <p:sp>
         <p:nvSpPr>
-          <p:cNvPr id="97" name="Text 5"/>
+          <p:cNvPr id="103" name="Text 5"/>
           <p:cNvSpPr/>
           <p:nvPr/>
         </p:nvSpPr>
         <p:spPr>
           <a:xfrm>
             <a:off x="457200" y="1170360"/>
-            <a:ext cx="3656880" cy="3364200"/>
+            <a:ext cx="3656160" cy="3363480"/>
           </a:xfrm>
           <a:prstGeom prst="rect">
             <a:avLst/>
@@ -18360,14 +19324,14 @@
       </p:sp>
       <p:sp>
         <p:nvSpPr>
-          <p:cNvPr id="98" name="Shape 6"/>
+          <p:cNvPr id="104" name="Shape 6"/>
           <p:cNvSpPr/>
           <p:nvPr/>
         </p:nvSpPr>
         <p:spPr>
           <a:xfrm>
             <a:off x="4434840" y="804600"/>
-            <a:ext cx="4662720" cy="3839760"/>
+            <a:ext cx="4662000" cy="3839040"/>
           </a:xfrm>
           <a:prstGeom prst="rect">
             <a:avLst/>
@@ -18416,14 +19380,14 @@
       </p:sp>
       <p:sp>
         <p:nvSpPr>
-          <p:cNvPr id="99" name="Text 7"/>
+          <p:cNvPr id="105" name="Text 7"/>
           <p:cNvSpPr/>
           <p:nvPr/>
         </p:nvSpPr>
         <p:spPr>
           <a:xfrm>
             <a:off x="4572000" y="850320"/>
-            <a:ext cx="4388400" cy="255240"/>
+            <a:ext cx="4387680" cy="254520"/>
           </a:xfrm>
           <a:prstGeom prst="rect">
             <a:avLst/>
@@ -18477,14 +19441,14 @@
       </p:sp>
       <p:sp>
         <p:nvSpPr>
-          <p:cNvPr id="100" name="Text 8"/>
+          <p:cNvPr id="106" name="Text 8"/>
           <p:cNvSpPr/>
           <p:nvPr/>
         </p:nvSpPr>
         <p:spPr>
           <a:xfrm>
             <a:off x="4572000" y="1170360"/>
-            <a:ext cx="4388400" cy="3364200"/>
+            <a:ext cx="4387680" cy="3363480"/>
           </a:xfrm>
           <a:prstGeom prst="rect">
             <a:avLst/>
@@ -18754,7 +19718,7 @@
                 <a:latin typeface="Cantarell"/>
                 <a:ea typeface="Consolas"/>
               </a:rPr>
-              <a:t>Termos dobram a cada passo!</a:t>
+              <a:t>Termos AUMENTAM a cada passo!</a:t>
             </a:r>
             <a:endParaRPr lang="pt-BR" sz="1100" b="0" u="none" strike="noStrike">
               <a:solidFill>
@@ -18878,14 +19842,14 @@
       </p:grpSpPr>
       <p:sp>
         <p:nvSpPr>
-          <p:cNvPr id="101" name="Shape 0"/>
+          <p:cNvPr id="107" name="Shape 0"/>
           <p:cNvSpPr/>
           <p:nvPr/>
         </p:nvSpPr>
         <p:spPr>
           <a:xfrm>
             <a:off x="0" y="0"/>
-            <a:ext cx="163800" cy="5142960"/>
+            <a:ext cx="163080" cy="5142240"/>
           </a:xfrm>
           <a:prstGeom prst="rect">
             <a:avLst/>
@@ -18927,14 +19891,14 @@
       </p:sp>
       <p:sp>
         <p:nvSpPr>
-          <p:cNvPr id="102" name="Text 1"/>
+          <p:cNvPr id="108" name="Text 1"/>
           <p:cNvSpPr/>
           <p:nvPr/>
         </p:nvSpPr>
         <p:spPr>
           <a:xfrm>
             <a:off x="320040" y="128160"/>
-            <a:ext cx="8503200" cy="566280"/>
+            <a:ext cx="8502480" cy="565560"/>
           </a:xfrm>
           <a:prstGeom prst="rect">
             <a:avLst/>
@@ -18988,7 +19952,7 @@
       </p:sp>
       <p:sp>
         <p:nvSpPr>
-          <p:cNvPr id="103" name="Shape 2"/>
+          <p:cNvPr id="109" name="Shape 2"/>
           <p:cNvSpPr/>
           <p:nvPr/>
         </p:nvSpPr>
@@ -19032,14 +19996,14 @@
       </p:sp>
       <p:sp>
         <p:nvSpPr>
-          <p:cNvPr id="104" name="Shape 3"/>
+          <p:cNvPr id="110" name="Shape 3"/>
           <p:cNvSpPr/>
           <p:nvPr/>
         </p:nvSpPr>
         <p:spPr>
           <a:xfrm>
             <a:off x="320040" y="804600"/>
-            <a:ext cx="4205520" cy="1261080"/>
+            <a:ext cx="4204800" cy="1260360"/>
           </a:xfrm>
           <a:prstGeom prst="rect">
             <a:avLst/>
@@ -19088,14 +20052,14 @@
       </p:sp>
       <p:sp>
         <p:nvSpPr>
-          <p:cNvPr id="105" name="Text 4"/>
+          <p:cNvPr id="111" name="Text 4"/>
           <p:cNvSpPr/>
           <p:nvPr/>
         </p:nvSpPr>
         <p:spPr>
           <a:xfrm>
             <a:off x="457200" y="868680"/>
-            <a:ext cx="3931200" cy="273600"/>
+            <a:ext cx="3930480" cy="272880"/>
           </a:xfrm>
           <a:prstGeom prst="rect">
             <a:avLst/>
@@ -19149,14 +20113,14 @@
       </p:sp>
       <p:sp>
         <p:nvSpPr>
-          <p:cNvPr id="106" name="Text 5"/>
+          <p:cNvPr id="112" name="Text 5"/>
           <p:cNvSpPr/>
           <p:nvPr/>
         </p:nvSpPr>
         <p:spPr>
           <a:xfrm>
             <a:off x="457200" y="1188720"/>
-            <a:ext cx="3931200" cy="803880"/>
+            <a:ext cx="3930480" cy="803160"/>
           </a:xfrm>
           <a:prstGeom prst="rect">
             <a:avLst/>
@@ -19195,7 +20159,7 @@
                 <a:latin typeface="Cantarell"/>
                 <a:ea typeface="Consolas"/>
               </a:rPr>
-              <a:t>Ignorar o +1 (particular) → rⁿ = rⁿ⁻¹ + rⁿ⁻²</a:t>
+              <a:t>Ignorar a/o +1 (cte./particular) → rⁿ = rⁿ⁻¹ + rⁿ⁻²</a:t>
             </a:r>
             <a:endParaRPr lang="pt-BR" sz="1050" b="0" u="none" strike="noStrike">
               <a:solidFill>
@@ -19210,14 +20174,14 @@
       </p:sp>
       <p:sp>
         <p:nvSpPr>
-          <p:cNvPr id="107" name="Shape 6"/>
+          <p:cNvPr id="113" name="Shape 6"/>
           <p:cNvSpPr/>
           <p:nvPr/>
         </p:nvSpPr>
         <p:spPr>
           <a:xfrm>
             <a:off x="320040" y="2194560"/>
-            <a:ext cx="4205520" cy="1261080"/>
+            <a:ext cx="4204800" cy="1260360"/>
           </a:xfrm>
           <a:prstGeom prst="rect">
             <a:avLst/>
@@ -19266,14 +20230,14 @@
       </p:sp>
       <p:sp>
         <p:nvSpPr>
-          <p:cNvPr id="108" name="Text 7"/>
+          <p:cNvPr id="114" name="Text 7"/>
           <p:cNvSpPr/>
           <p:nvPr/>
         </p:nvSpPr>
         <p:spPr>
           <a:xfrm>
             <a:off x="457200" y="2258640"/>
-            <a:ext cx="3931200" cy="273600"/>
+            <a:ext cx="3930480" cy="272880"/>
           </a:xfrm>
           <a:prstGeom prst="rect">
             <a:avLst/>
@@ -19327,14 +20291,14 @@
       </p:sp>
       <p:sp>
         <p:nvSpPr>
-          <p:cNvPr id="109" name="Text 8"/>
+          <p:cNvPr id="115" name="Text 8"/>
           <p:cNvSpPr/>
           <p:nvPr/>
         </p:nvSpPr>
         <p:spPr>
           <a:xfrm>
             <a:off x="457200" y="2578680"/>
-            <a:ext cx="3931200" cy="803880"/>
+            <a:ext cx="3930480" cy="803160"/>
           </a:xfrm>
           <a:prstGeom prst="rect">
             <a:avLst/>
@@ -19388,14 +20352,14 @@
       </p:sp>
       <p:sp>
         <p:nvSpPr>
-          <p:cNvPr id="110" name="Shape 9"/>
+          <p:cNvPr id="116" name="Shape 9"/>
           <p:cNvSpPr/>
           <p:nvPr/>
         </p:nvSpPr>
         <p:spPr>
           <a:xfrm>
             <a:off x="320040" y="3584520"/>
-            <a:ext cx="4205520" cy="1261080"/>
+            <a:ext cx="4204800" cy="1260360"/>
           </a:xfrm>
           <a:prstGeom prst="rect">
             <a:avLst/>
@@ -19444,14 +20408,14 @@
       </p:sp>
       <p:sp>
         <p:nvSpPr>
-          <p:cNvPr id="111" name="Text 10"/>
+          <p:cNvPr id="117" name="Text 10"/>
           <p:cNvSpPr/>
           <p:nvPr/>
         </p:nvSpPr>
         <p:spPr>
           <a:xfrm>
             <a:off x="457200" y="3648600"/>
-            <a:ext cx="3931200" cy="273600"/>
+            <a:ext cx="3930480" cy="272880"/>
           </a:xfrm>
           <a:prstGeom prst="rect">
             <a:avLst/>
@@ -19505,14 +20469,14 @@
       </p:sp>
       <p:sp>
         <p:nvSpPr>
-          <p:cNvPr id="112" name="Text 11"/>
+          <p:cNvPr id="118" name="Text 11"/>
           <p:cNvSpPr/>
           <p:nvPr/>
         </p:nvSpPr>
         <p:spPr>
           <a:xfrm>
             <a:off x="457200" y="3968640"/>
-            <a:ext cx="3931200" cy="803880"/>
+            <a:ext cx="3930480" cy="803160"/>
           </a:xfrm>
           <a:prstGeom prst="rect">
             <a:avLst/>
@@ -19566,14 +20530,14 @@
       </p:sp>
       <p:sp>
         <p:nvSpPr>
-          <p:cNvPr id="113" name="Shape 12"/>
+          <p:cNvPr id="119" name="Shape 12"/>
           <p:cNvSpPr/>
           <p:nvPr/>
         </p:nvSpPr>
         <p:spPr>
           <a:xfrm>
             <a:off x="4709160" y="804600"/>
-            <a:ext cx="4205520" cy="1261080"/>
+            <a:ext cx="4204800" cy="1260360"/>
           </a:xfrm>
           <a:prstGeom prst="rect">
             <a:avLst/>
@@ -19622,14 +20586,14 @@
       </p:sp>
       <p:sp>
         <p:nvSpPr>
-          <p:cNvPr id="114" name="Text 13"/>
+          <p:cNvPr id="120" name="Text 13"/>
           <p:cNvSpPr/>
           <p:nvPr/>
         </p:nvSpPr>
         <p:spPr>
           <a:xfrm>
             <a:off x="4846320" y="868680"/>
-            <a:ext cx="3931200" cy="273600"/>
+            <a:ext cx="3930480" cy="272880"/>
           </a:xfrm>
           <a:prstGeom prst="rect">
             <a:avLst/>
@@ -19683,14 +20647,14 @@
       </p:sp>
       <p:sp>
         <p:nvSpPr>
-          <p:cNvPr id="115" name="Text 14"/>
+          <p:cNvPr id="121" name="Text 14"/>
           <p:cNvSpPr/>
           <p:nvPr/>
         </p:nvSpPr>
         <p:spPr>
           <a:xfrm>
             <a:off x="4846320" y="1188720"/>
-            <a:ext cx="3931200" cy="803880"/>
+            <a:ext cx="3930480" cy="803160"/>
           </a:xfrm>
           <a:prstGeom prst="rect">
             <a:avLst/>
@@ -19744,14 +20708,14 @@
       </p:sp>
       <p:sp>
         <p:nvSpPr>
-          <p:cNvPr id="116" name="Shape 15"/>
+          <p:cNvPr id="122" name="Shape 15"/>
           <p:cNvSpPr/>
           <p:nvPr/>
         </p:nvSpPr>
         <p:spPr>
           <a:xfrm>
             <a:off x="4709160" y="2194560"/>
-            <a:ext cx="4205520" cy="1261080"/>
+            <a:ext cx="4204800" cy="1260360"/>
           </a:xfrm>
           <a:prstGeom prst="rect">
             <a:avLst/>
@@ -19800,14 +20764,14 @@
       </p:sp>
       <p:sp>
         <p:nvSpPr>
-          <p:cNvPr id="117" name="Text 16"/>
+          <p:cNvPr id="123" name="Text 16"/>
           <p:cNvSpPr/>
           <p:nvPr/>
         </p:nvSpPr>
         <p:spPr>
           <a:xfrm>
             <a:off x="4846320" y="2258640"/>
-            <a:ext cx="3931200" cy="273600"/>
+            <a:ext cx="3930480" cy="272880"/>
           </a:xfrm>
           <a:prstGeom prst="rect">
             <a:avLst/>
@@ -19861,14 +20825,14 @@
       </p:sp>
       <p:sp>
         <p:nvSpPr>
-          <p:cNvPr id="118" name="Text 17"/>
+          <p:cNvPr id="124" name="Text 17"/>
           <p:cNvSpPr/>
           <p:nvPr/>
         </p:nvSpPr>
         <p:spPr>
           <a:xfrm>
             <a:off x="4846320" y="2578680"/>
-            <a:ext cx="3931200" cy="803880"/>
+            <a:ext cx="3930480" cy="803160"/>
           </a:xfrm>
           <a:prstGeom prst="rect">
             <a:avLst/>
@@ -19922,14 +20886,14 @@
       </p:sp>
       <p:sp>
         <p:nvSpPr>
-          <p:cNvPr id="119" name="Shape 18"/>
+          <p:cNvPr id="125" name="Shape 18"/>
           <p:cNvSpPr/>
           <p:nvPr/>
         </p:nvSpPr>
         <p:spPr>
           <a:xfrm>
             <a:off x="4709160" y="3584520"/>
-            <a:ext cx="4205520" cy="1261080"/>
+            <a:ext cx="4204800" cy="1260360"/>
           </a:xfrm>
           <a:prstGeom prst="rect">
             <a:avLst/>
@@ -19978,14 +20942,14 @@
       </p:sp>
       <p:sp>
         <p:nvSpPr>
-          <p:cNvPr id="120" name="Text 19"/>
+          <p:cNvPr id="126" name="Text 19"/>
           <p:cNvSpPr/>
           <p:nvPr/>
         </p:nvSpPr>
         <p:spPr>
           <a:xfrm>
             <a:off x="4846320" y="3648600"/>
-            <a:ext cx="3931200" cy="273600"/>
+            <a:ext cx="3930480" cy="272880"/>
           </a:xfrm>
           <a:prstGeom prst="rect">
             <a:avLst/>
@@ -20039,14 +21003,14 @@
       </p:sp>
       <p:sp>
         <p:nvSpPr>
-          <p:cNvPr id="121" name="Text 20"/>
+          <p:cNvPr id="127" name="Text 20"/>
           <p:cNvSpPr/>
           <p:nvPr/>
         </p:nvSpPr>
         <p:spPr>
           <a:xfrm>
             <a:off x="4846320" y="3968640"/>
-            <a:ext cx="3931200" cy="803880"/>
+            <a:ext cx="3930480" cy="803160"/>
           </a:xfrm>
           <a:prstGeom prst="rect">
             <a:avLst/>
@@ -20137,14 +21101,14 @@
       </p:grpSpPr>
       <p:sp>
         <p:nvSpPr>
-          <p:cNvPr id="122" name="Shape 0"/>
+          <p:cNvPr id="128" name="Shape 0"/>
           <p:cNvSpPr/>
           <p:nvPr/>
         </p:nvSpPr>
         <p:spPr>
           <a:xfrm>
             <a:off x="0" y="0"/>
-            <a:ext cx="163800" cy="5142960"/>
+            <a:ext cx="163080" cy="5142240"/>
           </a:xfrm>
           <a:prstGeom prst="rect">
             <a:avLst/>
@@ -20186,14 +21150,14 @@
       </p:sp>
       <p:sp>
         <p:nvSpPr>
-          <p:cNvPr id="123" name="Text 1"/>
+          <p:cNvPr id="129" name="Text 1"/>
           <p:cNvSpPr/>
           <p:nvPr/>
         </p:nvSpPr>
         <p:spPr>
           <a:xfrm>
             <a:off x="320040" y="128160"/>
-            <a:ext cx="8503200" cy="566280"/>
+            <a:ext cx="8502480" cy="565560"/>
           </a:xfrm>
           <a:prstGeom prst="rect">
             <a:avLst/>
@@ -20247,7 +21211,7 @@
       </p:sp>
       <p:sp>
         <p:nvSpPr>
-          <p:cNvPr id="124" name="Shape 2"/>
+          <p:cNvPr id="130" name="Shape 2"/>
           <p:cNvSpPr/>
           <p:nvPr/>
         </p:nvSpPr>
@@ -20291,7 +21255,7 @@
       </p:sp>
       <p:pic>
         <p:nvPicPr>
-          <p:cNvPr id="125" name=""/>
+          <p:cNvPr id="131" name=""/>
           <p:cNvPicPr/>
           <p:nvPr/>
         </p:nvPicPr>
@@ -20302,7 +21266,7 @@
         <p:spPr>
           <a:xfrm>
             <a:off x="681480" y="808920"/>
-            <a:ext cx="7742520" cy="4279320"/>
+            <a:ext cx="7741800" cy="4278600"/>
           </a:xfrm>
           <a:prstGeom prst="rect">
             <a:avLst/>
@@ -20352,14 +21316,14 @@
       </p:grpSpPr>
       <p:sp>
         <p:nvSpPr>
-          <p:cNvPr id="126" name="Shape 0"/>
+          <p:cNvPr id="132" name="Shape 0"/>
           <p:cNvSpPr/>
           <p:nvPr/>
         </p:nvSpPr>
         <p:spPr>
           <a:xfrm>
             <a:off x="0" y="0"/>
-            <a:ext cx="163800" cy="5142960"/>
+            <a:ext cx="163080" cy="5142240"/>
           </a:xfrm>
           <a:prstGeom prst="rect">
             <a:avLst/>
@@ -20401,14 +21365,14 @@
       </p:sp>
       <p:sp>
         <p:nvSpPr>
-          <p:cNvPr id="127" name="Text 1"/>
+          <p:cNvPr id="133" name="Text 1"/>
           <p:cNvSpPr/>
           <p:nvPr/>
         </p:nvSpPr>
         <p:spPr>
           <a:xfrm>
             <a:off x="320040" y="128160"/>
-            <a:ext cx="8503200" cy="566280"/>
+            <a:ext cx="8502480" cy="565560"/>
           </a:xfrm>
           <a:prstGeom prst="rect">
             <a:avLst/>
@@ -20462,7 +21426,7 @@
       </p:sp>
       <p:sp>
         <p:nvSpPr>
-          <p:cNvPr id="128" name="Shape 2"/>
+          <p:cNvPr id="134" name="Shape 2"/>
           <p:cNvSpPr/>
           <p:nvPr/>
         </p:nvSpPr>
@@ -20506,7 +21470,7 @@
       </p:sp>
       <p:pic>
         <p:nvPicPr>
-          <p:cNvPr id="129" name=""/>
+          <p:cNvPr id="135" name=""/>
           <p:cNvPicPr/>
           <p:nvPr/>
         </p:nvPicPr>
@@ -20517,7 +21481,7 @@
         <p:spPr>
           <a:xfrm>
             <a:off x="1140480" y="792000"/>
-            <a:ext cx="6828840" cy="4232880"/>
+            <a:ext cx="6828120" cy="4232160"/>
           </a:xfrm>
           <a:prstGeom prst="rect">
             <a:avLst/>
@@ -20690,14 +21654,14 @@
     </a:clrScheme>
     <a:fontScheme name="Office">
       <a:majorFont>
-        <a:latin typeface="Calibri Light" panose="020F0302020204030204" pitchFamily="0" charset="1"/>
-        <a:ea typeface=""/>
-        <a:cs typeface=""/>
+        <a:latin typeface="Arial" pitchFamily="0" charset="1"/>
+        <a:ea typeface="DejaVu Sans" pitchFamily="0" charset="1"/>
+        <a:cs typeface="DejaVu Sans" pitchFamily="0" charset="1"/>
       </a:majorFont>
       <a:minorFont>
-        <a:latin typeface="Calibri" panose="020F0502020204030204" pitchFamily="0" charset="1"/>
-        <a:ea typeface=""/>
-        <a:cs typeface=""/>
+        <a:latin typeface="Arial" pitchFamily="0" charset="1"/>
+        <a:ea typeface="DejaVu Sans" pitchFamily="0" charset="1"/>
+        <a:cs typeface="DejaVu Sans" pitchFamily="0" charset="1"/>
       </a:minorFont>
     </a:fontScheme>
     <a:fmtScheme>
@@ -20705,67 +21669,25 @@
         <a:solidFill>
           <a:schemeClr val="phClr"/>
         </a:solidFill>
-        <a:gradFill>
-          <a:gsLst>
-            <a:gs pos="0">
-              <a:schemeClr val="phClr">
-                <a:lumMod val="110000"/>
-                <a:tint val="67000"/>
-              </a:schemeClr>
-            </a:gs>
-            <a:gs pos="50000">
-              <a:schemeClr val="phClr">
-                <a:lumMod val="105000"/>
-                <a:tint val="73000"/>
-              </a:schemeClr>
-            </a:gs>
-            <a:gs pos="100000">
-              <a:schemeClr val="phClr">
-                <a:lumMod val="105000"/>
-                <a:tint val="81000"/>
-              </a:schemeClr>
-            </a:gs>
-          </a:gsLst>
-          <a:lin ang="5400000" scaled="0"/>
-          <a:tileRect l="0" t="0" r="0" b="0"/>
-        </a:gradFill>
-        <a:gradFill>
-          <a:gsLst>
-            <a:gs pos="0">
-              <a:schemeClr val="phClr">
-                <a:lumMod val="102000"/>
-                <a:tint val="94000"/>
-              </a:schemeClr>
-            </a:gs>
-            <a:gs pos="50000">
-              <a:schemeClr val="phClr">
-                <a:lumMod val="100000"/>
-                <a:shade val="100000"/>
-              </a:schemeClr>
-            </a:gs>
-            <a:gs pos="100000">
-              <a:schemeClr val="phClr">
-                <a:lumMod val="99000"/>
-                <a:shade val="78000"/>
-              </a:schemeClr>
-            </a:gs>
-          </a:gsLst>
-          <a:lin ang="5400000" scaled="0"/>
-          <a:tileRect l="0" t="0" r="0" b="0"/>
-        </a:gradFill>
+        <a:solidFill>
+          <a:schemeClr val="phClr"/>
+        </a:solidFill>
+        <a:solidFill>
+          <a:schemeClr val="phClr"/>
+        </a:solidFill>
       </a:fillStyleLst>
       <a:lnStyleLst>
         <a:ln w="6350" cap="flat" cmpd="sng" algn="ctr">
           <a:prstDash val="solid"/>
-          <a:miter lim="800000"/>
+          <a:miter/>
         </a:ln>
-        <a:ln w="12700" cap="flat" cmpd="sng" algn="ctr">
+        <a:ln w="6350" cap="flat" cmpd="sng" algn="ctr">
           <a:prstDash val="solid"/>
-          <a:miter lim="800000"/>
+          <a:miter/>
         </a:ln>
-        <a:ln w="19050" cap="flat" cmpd="sng" algn="ctr">
+        <a:ln w="6350" cap="flat" cmpd="sng" algn="ctr">
           <a:prstDash val="solid"/>
-          <a:miter lim="800000"/>
+          <a:miter/>
         </a:ln>
       </a:lnStyleLst>
       <a:effectStyleLst>
@@ -20784,42 +21706,124 @@
           <a:schemeClr val="phClr"/>
         </a:solidFill>
         <a:solidFill>
-          <a:schemeClr val="phClr">
-            <a:tint val="95000"/>
-          </a:schemeClr>
+          <a:schemeClr val="phClr"/>
         </a:solidFill>
-        <a:gradFill>
-          <a:gsLst>
-            <a:gs pos="0">
-              <a:schemeClr val="phClr">
-                <a:tint val="93000"/>
-                <a:shade val="98000"/>
-                <a:lumMod val="102000"/>
-              </a:schemeClr>
-            </a:gs>
-            <a:gs pos="50000">
-              <a:schemeClr val="phClr">
-                <a:tint val="98000"/>
-                <a:shade val="90000"/>
-                <a:lumMod val="103000"/>
-              </a:schemeClr>
-            </a:gs>
-            <a:gs pos="100000">
-              <a:schemeClr val="phClr">
-                <a:shade val="63000"/>
-              </a:schemeClr>
-            </a:gs>
-          </a:gsLst>
-          <a:lin ang="5400000" scaled="0"/>
-          <a:tileRect l="0" t="0" r="0" b="0"/>
-        </a:gradFill>
+        <a:solidFill>
+          <a:schemeClr val="phClr"/>
+        </a:solidFill>
       </a:bgFillStyleLst>
     </a:fmtScheme>
   </a:themeElements>
 </a:theme>
 </file>
 
-<file path=ppt/theme/theme4.xml><?xml version="1.0" encoding="utf-8"?>
+<file path=ppt/theme/theme3.xml><?xml version="1.0" encoding="utf-8"?>
+<a:theme xmlns:a="http://schemas.openxmlformats.org/drawingml/2006/main" xmlns:r="http://schemas.openxmlformats.org/officeDocument/2006/relationships" name="Office Theme">
+  <a:themeElements>
+    <a:clrScheme name="Office">
+      <a:dk1>
+        <a:srgbClr val="000000"/>
+      </a:dk1>
+      <a:lt1>
+        <a:srgbClr val="ffffff"/>
+      </a:lt1>
+      <a:dk2>
+        <a:srgbClr val="44546a"/>
+      </a:dk2>
+      <a:lt2>
+        <a:srgbClr val="e7e6e6"/>
+      </a:lt2>
+      <a:accent1>
+        <a:srgbClr val="4472c4"/>
+      </a:accent1>
+      <a:accent2>
+        <a:srgbClr val="ed7d31"/>
+      </a:accent2>
+      <a:accent3>
+        <a:srgbClr val="a5a5a5"/>
+      </a:accent3>
+      <a:accent4>
+        <a:srgbClr val="ffc000"/>
+      </a:accent4>
+      <a:accent5>
+        <a:srgbClr val="5b9bd5"/>
+      </a:accent5>
+      <a:accent6>
+        <a:srgbClr val="70ad47"/>
+      </a:accent6>
+      <a:hlink>
+        <a:srgbClr val="0563c1"/>
+      </a:hlink>
+      <a:folHlink>
+        <a:srgbClr val="954f72"/>
+      </a:folHlink>
+    </a:clrScheme>
+    <a:fontScheme name="Office">
+      <a:majorFont>
+        <a:latin typeface="Arial" pitchFamily="0" charset="1"/>
+        <a:ea typeface="DejaVu Sans" pitchFamily="0" charset="1"/>
+        <a:cs typeface="DejaVu Sans" pitchFamily="0" charset="1"/>
+      </a:majorFont>
+      <a:minorFont>
+        <a:latin typeface="Arial" pitchFamily="0" charset="1"/>
+        <a:ea typeface="DejaVu Sans" pitchFamily="0" charset="1"/>
+        <a:cs typeface="DejaVu Sans" pitchFamily="0" charset="1"/>
+      </a:minorFont>
+    </a:fontScheme>
+    <a:fmtScheme>
+      <a:fillStyleLst>
+        <a:solidFill>
+          <a:schemeClr val="phClr"/>
+        </a:solidFill>
+        <a:solidFill>
+          <a:schemeClr val="phClr"/>
+        </a:solidFill>
+        <a:solidFill>
+          <a:schemeClr val="phClr"/>
+        </a:solidFill>
+      </a:fillStyleLst>
+      <a:lnStyleLst>
+        <a:ln w="6350" cap="flat" cmpd="sng" algn="ctr">
+          <a:prstDash val="solid"/>
+          <a:miter/>
+        </a:ln>
+        <a:ln w="6350" cap="flat" cmpd="sng" algn="ctr">
+          <a:prstDash val="solid"/>
+          <a:miter/>
+        </a:ln>
+        <a:ln w="6350" cap="flat" cmpd="sng" algn="ctr">
+          <a:prstDash val="solid"/>
+          <a:miter/>
+        </a:ln>
+      </a:lnStyleLst>
+      <a:effectStyleLst>
+        <a:effectStyle>
+          <a:effectLst/>
+        </a:effectStyle>
+        <a:effectStyle>
+          <a:effectLst/>
+        </a:effectStyle>
+        <a:effectStyle>
+          <a:effectLst/>
+        </a:effectStyle>
+      </a:effectStyleLst>
+      <a:bgFillStyleLst>
+        <a:solidFill>
+          <a:schemeClr val="phClr"/>
+        </a:solidFill>
+        <a:solidFill>
+          <a:schemeClr val="phClr"/>
+        </a:solidFill>
+        <a:solidFill>
+          <a:schemeClr val="phClr"/>
+        </a:solidFill>
+      </a:bgFillStyleLst>
+    </a:fmtScheme>
+  </a:themeElements>
+</a:theme>
+</file>
+
+<file path=ppt/theme/theme5.xml><?xml version="1.0" encoding="utf-8"?>
 <a:theme xmlns:a="http://schemas.openxmlformats.org/drawingml/2006/main" xmlns:r="http://schemas.openxmlformats.org/officeDocument/2006/relationships" name="Office Theme">
   <a:themeElements>
     <a:clrScheme name="LibreOffice">
